--- a/递归之箱_结课汇报_董长坤.pptx
+++ b/递归之箱_结课汇报_董长坤.pptx
@@ -15,6 +15,9 @@
     <p:sldId id="268" r:id="rId18"/>
     <p:sldId id="269" r:id="rId19"/>
     <p:sldId id="270" r:id="rId20"/>
+    <p:sldId id="271" r:id="rId21"/>
+    <p:sldId id="272" r:id="rId22"/>
+    <p:sldId id="273" r:id="rId23"/>
   </p:sldIdLst>
   <p:sldSz cx="12191365" cy="6858000" type="screen4x3"/>
   <p:notesSz cx="6858000" cy="9144000"/>
@@ -3113,7 +3116,7 @@
                 <a:latin typeface="微软雅黑"/>
                 <a:ea typeface="微软雅黑"/>
               </a:rPr>
-              <a:t>关键实现 ① · 口由内层地图边缘决定</a:t>
+              <a:t>AI 的四种失效模式与应对</a:t>
             </a:r>
             <a:endParaRPr sz="2600" b="1">
               <a:solidFill>
@@ -3251,7 +3254,7 @@
                 <a:latin typeface="微软雅黑"/>
                 <a:ea typeface="微软雅黑"/>
               </a:rPr>
-              <a:t>5 / 10</a:t>
+              <a:t>5 / 13</a:t>
             </a:r>
             <a:endParaRPr sz="900" b="0">
               <a:solidFill>
@@ -3291,14 +3294,14 @@
               </a:spcAft>
             </a:pPr>
             <a:r>
-              <a:rPr sz="1600" b="1">
+              <a:rPr sz="1350" b="1">
                 <a:solidFill>
                   <a:srgbClr val="F5A623"/>
                 </a:solidFill>
                 <a:latin typeface="微软雅黑"/>
                 <a:ea typeface="微软雅黑"/>
               </a:rPr>
-              <a:t>问题：一个箱子能从哪条边进出？</a:t>
+              <a:t>四种真实踩过的坑</a:t>
             </a:r>
             <a:endParaRPr sz="1600" b="1">
               <a:solidFill>
@@ -3315,14 +3318,14 @@
               </a:spcAft>
             </a:pPr>
             <a:r>
-              <a:rPr sz="1300" b="0">
+              <a:rPr sz="1250" b="0">
                 <a:solidFill>
                   <a:srgbClr val="EBEEF5"/>
                 </a:solidFill>
                 <a:latin typeface="微软雅黑"/>
                 <a:ea typeface="微软雅黑"/>
               </a:rPr>
-              <a:t>▪  最初用方向字段：一个箱子只能有一个门</a:t>
+              <a:t>▪  看不到画面 → 把“好不好看”变成对比度阈值 + 几何断言 + 程序生成的预览图</a:t>
             </a:r>
             <a:endParaRPr sz="1300" b="0">
               <a:solidFill>
@@ -3339,14 +3342,14 @@
               </a:spcAft>
             </a:pPr>
             <a:r>
-              <a:rPr sz="1300" b="0">
+              <a:rPr sz="1250" b="0">
                 <a:solidFill>
                   <a:srgbClr val="EBEEF5"/>
                 </a:solidFill>
                 <a:latin typeface="微软雅黑"/>
                 <a:ea typeface="微软雅黑"/>
               </a:rPr>
-              <a:t>▪  但“哪条边能进”应该由地图本身表达，而不是外挂字段</a:t>
+              <a:t>▪  想当然下结论 → 用 BFS 解算器推翻自己的“有解 / 无解”判断（两次）</a:t>
             </a:r>
             <a:endParaRPr sz="1300" b="0">
               <a:solidFill>
@@ -3363,14 +3366,14 @@
               </a:spcAft>
             </a:pPr>
             <a:r>
-              <a:rPr sz="1300" b="0">
+              <a:rPr sz="1250" b="0">
                 <a:solidFill>
                   <a:srgbClr val="EBEEF5"/>
                 </a:solidFill>
                 <a:latin typeface="微软雅黑"/>
                 <a:ea typeface="微软雅黑"/>
               </a:rPr>
-              <a:t>▪  改成：内层宽高必须为奇数，四条边的中心格就是口位</a:t>
+              <a:t>▪  文档写了却被忽略 → AGENTS.md 自动注入，RULE.md / SKILL.md 必须先读再动手</a:t>
             </a:r>
             <a:endParaRPr sz="1300" b="0">
               <a:solidFill>
@@ -3387,14 +3390,14 @@
               </a:spcAft>
             </a:pPr>
             <a:r>
-              <a:rPr sz="1600" b="1">
+              <a:rPr sz="1250" b="1">
                 <a:solidFill>
                   <a:srgbClr val="F5A623"/>
                 </a:solidFill>
                 <a:latin typeface="微软雅黑"/>
                 <a:ea typeface="微软雅黑"/>
               </a:rPr>
-              <a:t>规则</a:t>
+              <a:t>▪  术语漂移 → 同一机制在两份文档里说法打架，统一术语并由测试盯住</a:t>
             </a:r>
             <a:endParaRPr sz="1600" b="1">
               <a:solidFill>
@@ -3411,14 +3414,38 @@
               </a:spcAft>
             </a:pPr>
             <a:r>
-              <a:rPr sz="1300" b="0">
+              <a:rPr sz="1350" b="1">
+                <a:solidFill>
+                  <a:srgbClr val="F5A623"/>
+                </a:solidFill>
+                <a:latin typeface="微软雅黑"/>
+                <a:ea typeface="微软雅黑"/>
+              </a:rPr>
+              <a:t>边界与责任划分</a:t>
+            </a:r>
+            <a:endParaRPr sz="1300" b="0">
+              <a:solidFill>
+                <a:srgbClr val="EBEEF5"/>
+              </a:solidFill>
+              <a:latin typeface="微软雅黑"/>
+              <a:ea typeface="微软雅黑"/>
+            </a:endParaRPr>
+          </a:p>
+          <a:p>
+            <a:pPr algn="l">
+              <a:spcAft>
+                <a:spcPts val="1000"/>
+              </a:spcAft>
+            </a:pPr>
+            <a:r>
+              <a:rPr sz="1250" b="0">
                 <a:solidFill>
                   <a:srgbClr val="EBEEF5"/>
                 </a:solidFill>
                 <a:latin typeface="微软雅黑"/>
                 <a:ea typeface="微软雅黑"/>
               </a:rPr>
-              <a:t>▪  中心格是墙 → 这条边进不去；边缘除中心格外必须都是墙</a:t>
+              <a:t>▪  AI 承担实现与自查：代码生成、文档校对、解算器原型、关卡数据转换</a:t>
             </a:r>
             <a:endParaRPr sz="1300" b="0">
               <a:solidFill>
@@ -3435,38 +3462,14 @@
               </a:spcAft>
             </a:pPr>
             <a:r>
-              <a:rPr sz="1300" b="0">
+              <a:rPr sz="1250" b="0">
                 <a:solidFill>
                   <a:srgbClr val="EBEEF5"/>
                 </a:solidFill>
                 <a:latin typeface="微软雅黑"/>
                 <a:ea typeface="微软雅黑"/>
               </a:rPr>
-              <a:t>▪  箱子双向穿口：能被推进别人的口，也能从内部被推出来</a:t>
-            </a:r>
-            <a:endParaRPr sz="1300" b="0">
-              <a:solidFill>
-                <a:srgbClr val="EBEEF5"/>
-              </a:solidFill>
-              <a:latin typeface="微软雅黑"/>
-              <a:ea typeface="微软雅黑"/>
-            </a:endParaRPr>
-          </a:p>
-          <a:p>
-            <a:pPr algn="l">
-              <a:spcAft>
-                <a:spcPts val="1000"/>
-              </a:spcAft>
-            </a:pPr>
-            <a:r>
-              <a:rPr sz="1300" b="0">
-                <a:solidFill>
-                  <a:srgbClr val="EBEEF5"/>
-                </a:solidFill>
-                <a:latin typeface="微软雅黑"/>
-                <a:ea typeface="微软雅黑"/>
-              </a:rPr>
-              <a:t>▪  「吞食01」就靠它：必须先把箱子吞进 A，再从里面推出来</a:t>
+              <a:t>▪  人承担判断与验收：定机制、定优先级、验观感与手感、决定取舍</a:t>
             </a:r>
             <a:endParaRPr sz="1300" b="0">
               <a:solidFill>
@@ -3557,7 +3560,7 @@
                 <a:latin typeface="微软雅黑"/>
                 <a:ea typeface="微软雅黑"/>
               </a:rPr>
-              <a:t>规则取舍</a:t>
+              <a:t>结论</a:t>
             </a:r>
             <a:endParaRPr sz="1500" b="1">
               <a:solidFill>
@@ -3578,7 +3581,7 @@
         <p:spPr>
           <a:xfrm>
             <a:off x="6675120" y="1874519"/>
-            <a:ext cx="4846320" cy="200025"/>
+            <a:ext cx="4846320" cy="502920"/>
           </a:xfrm>
           <a:prstGeom prst="rect">
             <a:avLst/>
@@ -3604,7 +3607,7 @@
                 <a:latin typeface="微软雅黑"/>
                 <a:ea typeface="微软雅黑"/>
               </a:rPr>
-              <a:t>方向字段　</a:t>
+              <a:t>AI 是加速器　</a:t>
             </a:r>
             <a:r>
               <a:rPr lang="zh-CN" sz="1300" b="1">
@@ -3614,7 +3617,7 @@
                 <a:latin typeface="微软雅黑"/>
                 <a:ea typeface="微软雅黑"/>
               </a:rPr>
-              <a:t>写起来简单，但表达力弱、容易和地图脱节</a:t>
+              <a:t>不是决策者：规则与验收标准由人定</a:t>
             </a:r>
             <a:endParaRPr sz="1300" b="0">
               <a:solidFill>
@@ -3634,8 +3637,8 @@
         </p:nvSpPr>
         <p:spPr>
           <a:xfrm>
-            <a:off x="6675120" y="2395728"/>
-            <a:ext cx="4846320" cy="411480"/>
+            <a:off x="6675120" y="2468880"/>
+            <a:ext cx="4846320" cy="685800"/>
           </a:xfrm>
           <a:prstGeom prst="rect">
             <a:avLst/>
@@ -3661,7 +3664,7 @@
                 <a:latin typeface="微软雅黑"/>
                 <a:ea typeface="微软雅黑"/>
               </a:rPr>
-              <a:t>边缘墙规则　</a:t>
+              <a:t>可验证才可用　</a:t>
             </a:r>
             <a:r>
               <a:rPr sz="1300" b="0">
@@ -3671,7 +3674,7 @@
                 <a:latin typeface="微软雅黑"/>
                 <a:ea typeface="微软雅黑"/>
               </a:rPr>
-              <a:t>复杂一点，但所见即所得：墙上的缺口就是门</a:t>
+              <a:t>无法自动验证的产出，必须留人工验收环节</a:t>
             </a:r>
             <a:endParaRPr sz="1300" b="0">
               <a:solidFill>
@@ -3691,8 +3694,8 @@
         </p:nvSpPr>
         <p:spPr>
           <a:xfrm>
-            <a:off x="6675120" y="2926080"/>
-            <a:ext cx="4754880" cy="184150"/>
+            <a:off x="6675120" y="3246120"/>
+            <a:ext cx="4754880" cy="182880"/>
           </a:xfrm>
           <a:prstGeom prst="rect">
             <a:avLst/>
@@ -3738,7 +3741,7 @@
         </p:nvSpPr>
         <p:spPr>
           <a:xfrm>
-            <a:off x="6675120" y="3310128"/>
+            <a:off x="6675120" y="3611880"/>
             <a:ext cx="1133856" cy="457200"/>
           </a:xfrm>
           <a:prstGeom prst="roundRect">
@@ -3781,7 +3784,7 @@
                 <a:latin typeface="微软雅黑"/>
                 <a:ea typeface="微软雅黑"/>
               </a:rPr>
-              <a:t>中心格</a:t>
+              <a:t>规则先行</a:t>
             </a:r>
             <a:endParaRPr sz="1100" b="0">
               <a:solidFill>
@@ -3801,7 +3804,7 @@
         </p:nvSpPr>
         <p:spPr>
           <a:xfrm>
-            <a:off x="7918704" y="3310128"/>
+            <a:off x="7918704" y="3611880"/>
             <a:ext cx="1133856" cy="457200"/>
           </a:xfrm>
           <a:prstGeom prst="roundRect">
@@ -3844,7 +3847,7 @@
                 <a:latin typeface="微软雅黑"/>
                 <a:ea typeface="微软雅黑"/>
               </a:rPr>
-              <a:t>双向穿口</a:t>
+              <a:t>数据化验收</a:t>
             </a:r>
             <a:endParaRPr sz="1100" b="0">
               <a:solidFill>
@@ -3864,7 +3867,7 @@
         </p:nvSpPr>
         <p:spPr>
           <a:xfrm>
-            <a:off x="9162288" y="3310128"/>
+            <a:off x="9162288" y="3611880"/>
             <a:ext cx="1133856" cy="457200"/>
           </a:xfrm>
           <a:prstGeom prst="roundRect">
@@ -3907,7 +3910,7 @@
                 <a:latin typeface="微软雅黑"/>
                 <a:ea typeface="微软雅黑"/>
               </a:rPr>
-              <a:t>吞食</a:t>
+              <a:t>人工拍板</a:t>
             </a:r>
             <a:endParaRPr sz="1100" b="0">
               <a:solidFill>
@@ -3927,7 +3930,7 @@
         </p:nvSpPr>
         <p:spPr>
           <a:xfrm>
-            <a:off x="10405872" y="3310128"/>
+            <a:off x="10405872" y="3611880"/>
             <a:ext cx="1133856" cy="457200"/>
           </a:xfrm>
           <a:prstGeom prst="roundRect">
@@ -3970,7 +3973,7 @@
                 <a:latin typeface="微软雅黑"/>
                 <a:ea typeface="微软雅黑"/>
               </a:rPr>
-              <a:t>隧道解</a:t>
+              <a:t>全程留痕</a:t>
             </a:r>
             <a:endParaRPr sz="1100" b="0">
               <a:solidFill>
@@ -4043,7 +4046,7 @@
                 <a:latin typeface="微软雅黑"/>
                 <a:ea typeface="微软雅黑"/>
               </a:rPr>
-              <a:t>关键实现 ② · 状态模型与撤销 / 重置</a:t>
+              <a:t>问题解决流程 · 五个真实问题</a:t>
             </a:r>
             <a:endParaRPr sz="2600" b="1">
               <a:solidFill>
@@ -4181,7 +4184,7 @@
                 <a:latin typeface="微软雅黑"/>
                 <a:ea typeface="微软雅黑"/>
               </a:rPr>
-              <a:t>6 / 10</a:t>
+              <a:t>6 / 13</a:t>
             </a:r>
             <a:endParaRPr sz="900" b="0">
               <a:solidFill>
@@ -4195,238 +4198,25 @@
       </p:sp>
       <p:sp>
         <p:nvSpPr>
-          <p:cNvPr id="6" name="TextBox 5"/>
-          <p:cNvSpPr txBox="1"/>
+          <p:cNvPr id="6" name="Rectangle 5"/>
+          <p:cNvSpPr/>
           <p:nvPr/>
         </p:nvSpPr>
         <p:spPr>
           <a:xfrm>
             <a:off x="502920" y="1234440"/>
-            <a:ext cx="5577840" cy="2590165"/>
+            <a:ext cx="2286000" cy="411480"/>
           </a:xfrm>
           <a:prstGeom prst="rect">
             <a:avLst/>
           </a:prstGeom>
-          <a:noFill/>
-        </p:spPr>
-        <p:txBody>
-          <a:bodyPr wrap="square" lIns="0" tIns="0" rIns="0" bIns="0" anchor="t">
-            <a:spAutoFit/>
-          </a:bodyPr>
-          <a:lstStyle/>
-          <a:p>
-            <a:pPr algn="l">
-              <a:spcAft>
-                <a:spcPts val="1000"/>
-              </a:spcAft>
-            </a:pPr>
-            <a:r>
-              <a:rPr sz="1600" b="1">
-                <a:solidFill>
-                  <a:srgbClr val="F5A623"/>
-                </a:solidFill>
-                <a:latin typeface="微软雅黑"/>
-                <a:ea typeface="微软雅黑"/>
-              </a:rPr>
-              <a:t>状态长什么样</a:t>
-            </a:r>
-            <a:endParaRPr sz="1600" b="1">
-              <a:solidFill>
-                <a:srgbClr val="F5A623"/>
-              </a:solidFill>
-              <a:latin typeface="微软雅黑"/>
-              <a:ea typeface="微软雅黑"/>
-            </a:endParaRPr>
-          </a:p>
-          <a:p>
-            <a:pPr algn="l">
-              <a:spcAft>
-                <a:spcPts val="1000"/>
-              </a:spcAft>
-            </a:pPr>
-            <a:r>
-              <a:rPr sz="1300" b="0">
-                <a:solidFill>
-                  <a:srgbClr val="EBEEF5"/>
-                </a:solidFill>
-                <a:latin typeface="微软雅黑"/>
-                <a:ea typeface="微软雅黑"/>
-              </a:rPr>
-              <a:t>▪  世界 = 嵌套 dict：tiles / boxes / inner_world 递归下去</a:t>
-            </a:r>
-            <a:endParaRPr sz="1300" b="0">
-              <a:solidFill>
-                <a:srgbClr val="EBEEF5"/>
-              </a:solidFill>
-              <a:latin typeface="微软雅黑"/>
-              <a:ea typeface="微软雅黑"/>
-            </a:endParaRPr>
-          </a:p>
-          <a:p>
-            <a:pPr algn="l">
-              <a:spcAft>
-                <a:spcPts val="1000"/>
-              </a:spcAft>
-            </a:pPr>
-            <a:r>
-              <a:rPr sz="1300" b="0">
-                <a:solidFill>
-                  <a:srgbClr val="EBEEF5"/>
-                </a:solidFill>
-                <a:latin typeface="微软雅黑"/>
-                <a:ea typeface="微软雅黑"/>
-              </a:rPr>
-              <a:t>▪  玩家只记“在哪一层 + 格子坐标”，路径就是层级</a:t>
-            </a:r>
-            <a:endParaRPr sz="1300" b="0">
-              <a:solidFill>
-                <a:srgbClr val="EBEEF5"/>
-              </a:solidFill>
-              <a:latin typeface="微软雅黑"/>
-              <a:ea typeface="微软雅黑"/>
-            </a:endParaRPr>
-          </a:p>
-          <a:p>
-            <a:pPr algn="l">
-              <a:spcAft>
-                <a:spcPts val="1000"/>
-              </a:spcAft>
-            </a:pPr>
-            <a:r>
-              <a:rPr sz="1300" b="0">
-                <a:solidFill>
-                  <a:srgbClr val="EBEEF5"/>
-                </a:solidFill>
-                <a:latin typeface="微软雅黑"/>
-                <a:ea typeface="微软雅黑"/>
-              </a:rPr>
-              <a:t>▪  层数由关卡数据决定，代码里没有任何写死的深度</a:t>
-            </a:r>
-            <a:endParaRPr sz="1300" b="0">
-              <a:solidFill>
-                <a:srgbClr val="EBEEF5"/>
-              </a:solidFill>
-              <a:latin typeface="微软雅黑"/>
-              <a:ea typeface="微软雅黑"/>
-            </a:endParaRPr>
-          </a:p>
-          <a:p>
-            <a:pPr algn="l">
-              <a:spcAft>
-                <a:spcPts val="1000"/>
-              </a:spcAft>
-            </a:pPr>
-            <a:r>
-              <a:rPr sz="1600" b="1">
-                <a:solidFill>
-                  <a:srgbClr val="F5A623"/>
-                </a:solidFill>
-                <a:latin typeface="微软雅黑"/>
-                <a:ea typeface="微软雅黑"/>
-              </a:rPr>
-              <a:t>撤销 / 重置为什么是白送的</a:t>
-            </a:r>
-            <a:endParaRPr sz="1600" b="1">
-              <a:solidFill>
-                <a:srgbClr val="F5A623"/>
-              </a:solidFill>
-              <a:latin typeface="微软雅黑"/>
-              <a:ea typeface="微软雅黑"/>
-            </a:endParaRPr>
-          </a:p>
-          <a:p>
-            <a:pPr algn="l">
-              <a:spcAft>
-                <a:spcPts val="1000"/>
-              </a:spcAft>
-            </a:pPr>
-            <a:r>
-              <a:rPr sz="1300" b="0">
-                <a:solidFill>
-                  <a:srgbClr val="EBEEF5"/>
-                </a:solidFill>
-                <a:latin typeface="微软雅黑"/>
-                <a:ea typeface="微软雅黑"/>
-              </a:rPr>
-              <a:t>▪  所有操作都是纯函数：不改传入状态，返回新状态</a:t>
-            </a:r>
-            <a:endParaRPr sz="1300" b="0">
-              <a:solidFill>
-                <a:srgbClr val="EBEEF5"/>
-              </a:solidFill>
-              <a:latin typeface="微软雅黑"/>
-              <a:ea typeface="微软雅黑"/>
-            </a:endParaRPr>
-          </a:p>
-          <a:p>
-            <a:pPr algn="l">
-              <a:spcAft>
-                <a:spcPts val="1000"/>
-              </a:spcAft>
-            </a:pPr>
-            <a:r>
-              <a:rPr sz="1300" b="0">
-                <a:solidFill>
-                  <a:srgbClr val="EBEEF5"/>
-                </a:solidFill>
-                <a:latin typeface="微软雅黑"/>
-                <a:ea typeface="微软雅黑"/>
-              </a:rPr>
-              <a:t>▪  撤销 = 弹一次快照；重置 = 回到初始快照</a:t>
-            </a:r>
-            <a:endParaRPr sz="1300" b="0">
-              <a:solidFill>
-                <a:srgbClr val="EBEEF5"/>
-              </a:solidFill>
-              <a:latin typeface="微软雅黑"/>
-              <a:ea typeface="微软雅黑"/>
-            </a:endParaRPr>
-          </a:p>
-          <a:p>
-            <a:pPr algn="l">
-              <a:spcAft>
-                <a:spcPts val="1000"/>
-              </a:spcAft>
-            </a:pPr>
-            <a:r>
-              <a:rPr sz="1300" b="0">
-                <a:solidFill>
-                  <a:srgbClr val="EBEEF5"/>
-                </a:solidFill>
-                <a:latin typeface="微软雅黑"/>
-                <a:ea typeface="微软雅黑"/>
-              </a:rPr>
-              <a:t>▪  一次按键只记一步（搬运路径曾重复计数，被测试抓出并修掉）</a:t>
-            </a:r>
-            <a:endParaRPr sz="1300" b="0">
-              <a:solidFill>
-                <a:srgbClr val="EBEEF5"/>
-              </a:solidFill>
-              <a:latin typeface="微软雅黑"/>
-              <a:ea typeface="微软雅黑"/>
-            </a:endParaRPr>
-          </a:p>
-        </p:txBody>
-      </p:sp>
-      <p:sp>
-        <p:nvSpPr>
-          <p:cNvPr id="7" name="Rectangle 6"/>
-          <p:cNvSpPr/>
-          <p:nvPr/>
-        </p:nvSpPr>
-        <p:spPr>
-          <a:xfrm>
-            <a:off x="6446520" y="1234440"/>
-            <a:ext cx="5257800" cy="3337560"/>
-          </a:xfrm>
-          <a:prstGeom prst="rect">
-            <a:avLst/>
-          </a:prstGeom>
           <a:solidFill>
-            <a:srgbClr val="1C2132"/>
+            <a:srgbClr val="262C42"/>
           </a:solidFill>
-          <a:ln>
-            <a:noFill/>
+          <a:ln w="9525">
+            <a:solidFill>
+              <a:srgbClr val="3E465E"/>
+            </a:solidFill>
           </a:ln>
           <a:effectLst/>
         </p:spPr>
@@ -4445,23 +4235,419 @@
           </a:fontRef>
         </p:style>
         <p:txBody>
-          <a:bodyPr rtlCol="0" anchor="ctr"/>
+          <a:bodyPr wrap="square" lIns="73152" tIns="18288" rIns="73152" bIns="18288" rtlCol="0" anchor="ctr"/>
           <a:lstStyle/>
           <a:p>
             <a:pPr algn="ctr"/>
-          </a:p>
-        </p:txBody>
-      </p:sp>
-      <p:sp>
-        <p:nvSpPr>
-          <p:cNvPr id="8" name="TextBox 7"/>
+            <a:r>
+              <a:rPr sz="1300" b="1">
+                <a:solidFill>
+                  <a:srgbClr val="EBEEF5"/>
+                </a:solidFill>
+                <a:latin typeface="微软雅黑"/>
+                <a:ea typeface="微软雅黑"/>
+              </a:rPr>
+              <a:t>问题</a:t>
+            </a:r>
+            <a:endParaRPr sz="1300" b="1">
+              <a:solidFill>
+                <a:srgbClr val="EBEEF5"/>
+              </a:solidFill>
+              <a:latin typeface="微软雅黑"/>
+              <a:ea typeface="微软雅黑"/>
+            </a:endParaRPr>
+          </a:p>
+        </p:txBody>
+      </p:sp>
+      <p:sp>
+        <p:nvSpPr>
+          <p:cNvPr id="7" name="Rectangle 6"/>
+          <p:cNvSpPr/>
+          <p:nvPr/>
+        </p:nvSpPr>
+        <p:spPr>
+          <a:xfrm>
+            <a:off x="2788920" y="1234440"/>
+            <a:ext cx="6263640" cy="411480"/>
+          </a:xfrm>
+          <a:prstGeom prst="rect">
+            <a:avLst/>
+          </a:prstGeom>
+          <a:solidFill>
+            <a:srgbClr val="262C42"/>
+          </a:solidFill>
+          <a:ln w="9525">
+            <a:solidFill>
+              <a:srgbClr val="3E465E"/>
+            </a:solidFill>
+          </a:ln>
+          <a:effectLst/>
+        </p:spPr>
+        <p:style>
+          <a:lnRef idx="1">
+            <a:schemeClr val="accent1"/>
+          </a:lnRef>
+          <a:fillRef idx="3">
+            <a:schemeClr val="accent1"/>
+          </a:fillRef>
+          <a:effectRef idx="2">
+            <a:schemeClr val="accent1"/>
+          </a:effectRef>
+          <a:fontRef idx="minor">
+            <a:schemeClr val="lt1"/>
+          </a:fontRef>
+        </p:style>
+        <p:txBody>
+          <a:bodyPr wrap="square" lIns="73152" tIns="18288" rIns="73152" bIns="18288" rtlCol="0" anchor="ctr"/>
+          <a:lstStyle/>
+          <a:p>
+            <a:pPr algn="ctr"/>
+            <a:r>
+              <a:rPr sz="1300" b="1">
+                <a:solidFill>
+                  <a:srgbClr val="EBEEF5"/>
+                </a:solidFill>
+                <a:latin typeface="微软雅黑"/>
+                <a:ea typeface="微软雅黑"/>
+              </a:rPr>
+              <a:t>定位与方案</a:t>
+            </a:r>
+            <a:endParaRPr sz="1300" b="1">
+              <a:solidFill>
+                <a:srgbClr val="EBEEF5"/>
+              </a:solidFill>
+              <a:latin typeface="微软雅黑"/>
+              <a:ea typeface="微软雅黑"/>
+            </a:endParaRPr>
+          </a:p>
+        </p:txBody>
+      </p:sp>
+      <p:sp>
+        <p:nvSpPr>
+          <p:cNvPr id="8" name="Rectangle 7"/>
+          <p:cNvSpPr/>
+          <p:nvPr/>
+        </p:nvSpPr>
+        <p:spPr>
+          <a:xfrm>
+            <a:off x="9052560" y="1234440"/>
+            <a:ext cx="2651760" cy="411480"/>
+          </a:xfrm>
+          <a:prstGeom prst="rect">
+            <a:avLst/>
+          </a:prstGeom>
+          <a:solidFill>
+            <a:srgbClr val="262C42"/>
+          </a:solidFill>
+          <a:ln w="9525">
+            <a:solidFill>
+              <a:srgbClr val="3E465E"/>
+            </a:solidFill>
+          </a:ln>
+          <a:effectLst/>
+        </p:spPr>
+        <p:style>
+          <a:lnRef idx="1">
+            <a:schemeClr val="accent1"/>
+          </a:lnRef>
+          <a:fillRef idx="3">
+            <a:schemeClr val="accent1"/>
+          </a:fillRef>
+          <a:effectRef idx="2">
+            <a:schemeClr val="accent1"/>
+          </a:effectRef>
+          <a:fontRef idx="minor">
+            <a:schemeClr val="lt1"/>
+          </a:fontRef>
+        </p:style>
+        <p:txBody>
+          <a:bodyPr wrap="square" lIns="73152" tIns="18288" rIns="73152" bIns="18288" rtlCol="0" anchor="ctr"/>
+          <a:lstStyle/>
+          <a:p>
+            <a:pPr algn="ctr"/>
+            <a:r>
+              <a:rPr sz="1300" b="1">
+                <a:solidFill>
+                  <a:srgbClr val="EBEEF5"/>
+                </a:solidFill>
+                <a:latin typeface="微软雅黑"/>
+                <a:ea typeface="微软雅黑"/>
+              </a:rPr>
+              <a:t>结果</a:t>
+            </a:r>
+            <a:endParaRPr sz="1300" b="1">
+              <a:solidFill>
+                <a:srgbClr val="EBEEF5"/>
+              </a:solidFill>
+              <a:latin typeface="微软雅黑"/>
+              <a:ea typeface="微软雅黑"/>
+            </a:endParaRPr>
+          </a:p>
+        </p:txBody>
+      </p:sp>
+      <p:sp>
+        <p:nvSpPr>
+          <p:cNvPr id="9" name="Rectangle 8"/>
+          <p:cNvSpPr/>
+          <p:nvPr/>
+        </p:nvSpPr>
+        <p:spPr>
+          <a:xfrm>
+            <a:off x="502920" y="1645920"/>
+            <a:ext cx="2286000" cy="640080"/>
+          </a:xfrm>
+          <a:prstGeom prst="rect">
+            <a:avLst/>
+          </a:prstGeom>
+          <a:solidFill>
+            <a:srgbClr val="1C2132"/>
+          </a:solidFill>
+          <a:ln w="9525">
+            <a:solidFill>
+              <a:srgbClr val="3E465E"/>
+            </a:solidFill>
+          </a:ln>
+          <a:effectLst/>
+        </p:spPr>
+        <p:style>
+          <a:lnRef idx="1">
+            <a:schemeClr val="accent1"/>
+          </a:lnRef>
+          <a:fillRef idx="3">
+            <a:schemeClr val="accent1"/>
+          </a:fillRef>
+          <a:effectRef idx="2">
+            <a:schemeClr val="accent1"/>
+          </a:effectRef>
+          <a:fontRef idx="minor">
+            <a:schemeClr val="lt1"/>
+          </a:fontRef>
+        </p:style>
+        <p:txBody>
+          <a:bodyPr wrap="square" lIns="128016" tIns="12700" rIns="137160" bIns="12700" rtlCol="0" anchor="ctr"/>
+          <a:lstStyle/>
+          <a:p>
+            <a:pPr algn="l"/>
+            <a:r>
+              <a:rPr sz="1100" b="1">
+                <a:solidFill>
+                  <a:srgbClr val="EBEEF5"/>
+                </a:solidFill>
+                <a:latin typeface="微软雅黑"/>
+              </a:rPr>
+              <a:t>退出落点歧义</a:t>
+            </a:r>
+            <a:endParaRPr sz="1300" b="1">
+              <a:solidFill>
+                <a:srgbClr val="EBEEF5"/>
+              </a:solidFill>
+              <a:latin typeface="微软雅黑"/>
+              <a:ea typeface="微软雅黑"/>
+            </a:endParaRPr>
+          </a:p>
+        </p:txBody>
+      </p:sp>
+      <p:sp>
+        <p:nvSpPr>
+          <p:cNvPr id="10" name="Rectangle 9"/>
+          <p:cNvSpPr/>
+          <p:nvPr/>
+        </p:nvSpPr>
+        <p:spPr>
+          <a:xfrm>
+            <a:off x="2788920" y="1645920"/>
+            <a:ext cx="6263640" cy="640080"/>
+          </a:xfrm>
+          <a:prstGeom prst="rect">
+            <a:avLst/>
+          </a:prstGeom>
+          <a:solidFill>
+            <a:srgbClr val="1C2132"/>
+          </a:solidFill>
+          <a:ln w="9525">
+            <a:solidFill>
+              <a:srgbClr val="3E465E"/>
+            </a:solidFill>
+          </a:ln>
+          <a:effectLst/>
+        </p:spPr>
+        <p:style>
+          <a:lnRef idx="1">
+            <a:schemeClr val="accent1"/>
+          </a:lnRef>
+          <a:fillRef idx="3">
+            <a:schemeClr val="accent1"/>
+          </a:fillRef>
+          <a:effectRef idx="2">
+            <a:schemeClr val="accent1"/>
+          </a:effectRef>
+          <a:fontRef idx="minor">
+            <a:schemeClr val="lt1"/>
+          </a:fontRef>
+        </p:style>
+        <p:txBody>
+          <a:bodyPr wrap="square" lIns="137160" tIns="12700" rIns="137160" bIns="12700" rtlCol="0" anchor="ctr"/>
+          <a:lstStyle/>
+          <a:p>
+            <a:pPr algn="l">
+              <a:spcAft>
+                <a:spcPts val="500"/>
+              </a:spcAft>
+            </a:pPr>
+            <a:r>
+              <a:rPr sz="1050" b="0">
+                <a:solidFill>
+                  <a:srgbClr val="EBEEF5"/>
+                </a:solidFill>
+                <a:latin typeface="微软雅黑"/>
+              </a:rPr>
+              <a:t>▪ 现象：“进入时的箱子位置”有两种读法，退出点算错</a:t>
+            </a:r>
+            <a:endParaRPr sz="1150" b="0">
+              <a:solidFill>
+                <a:srgbClr val="EBEEF5"/>
+              </a:solidFill>
+              <a:latin typeface="微软雅黑"/>
+              <a:ea typeface="微软雅黑"/>
+            </a:endParaRPr>
+          </a:p>
+          <a:p>
+            <a:pPr algn="l">
+              <a:spcAft>
+                <a:spcPts val="500"/>
+              </a:spcAft>
+            </a:pPr>
+            <a:r>
+              <a:rPr sz="1050" b="0">
+                <a:solidFill>
+                  <a:srgbClr val="EBEEF5"/>
+                </a:solidFill>
+                <a:latin typeface="微软雅黑"/>
+              </a:rPr>
+              <a:t>▪ 定位：一句话两种解释 → 先把术语定死</a:t>
+            </a:r>
+            <a:endParaRPr sz="1150" b="0">
+              <a:solidFill>
+                <a:srgbClr val="EBEEF5"/>
+              </a:solidFill>
+              <a:latin typeface="微软雅黑"/>
+            </a:endParaRPr>
+          </a:p>
+          <a:p>
+            <a:pPr algn="l">
+              <a:spcAft>
+                <a:spcPts val="500"/>
+              </a:spcAft>
+            </a:pPr>
+            <a:r>
+              <a:rPr sz="1050" b="0">
+                <a:solidFill>
+                  <a:srgbClr val="EBEEF5"/>
+                </a:solidFill>
+                <a:latin typeface="微软雅黑"/>
+              </a:rPr>
+              <a:t>▪ 方案：返回栈记 (world_ref, box_uid)，退出时现查位置</a:t>
+            </a:r>
+            <a:endParaRPr sz="1150" b="0">
+              <a:solidFill>
+                <a:srgbClr val="EBEEF5"/>
+              </a:solidFill>
+              <a:latin typeface="微软雅黑"/>
+            </a:endParaRPr>
+          </a:p>
+        </p:txBody>
+      </p:sp>
+      <p:sp>
+        <p:nvSpPr>
+          <p:cNvPr id="11" name="Rectangle 10"/>
+          <p:cNvSpPr/>
+          <p:nvPr/>
+        </p:nvSpPr>
+        <p:spPr>
+          <a:xfrm>
+            <a:off x="9052560" y="1645920"/>
+            <a:ext cx="2651760" cy="640080"/>
+          </a:xfrm>
+          <a:prstGeom prst="rect">
+            <a:avLst/>
+          </a:prstGeom>
+          <a:solidFill>
+            <a:srgbClr val="1C2132"/>
+          </a:solidFill>
+          <a:ln w="9525">
+            <a:solidFill>
+              <a:srgbClr val="3E465E"/>
+            </a:solidFill>
+          </a:ln>
+          <a:effectLst/>
+        </p:spPr>
+        <p:style>
+          <a:lnRef idx="1">
+            <a:schemeClr val="accent1"/>
+          </a:lnRef>
+          <a:fillRef idx="3">
+            <a:schemeClr val="accent1"/>
+          </a:fillRef>
+          <a:effectRef idx="2">
+            <a:schemeClr val="accent1"/>
+          </a:effectRef>
+          <a:fontRef idx="minor">
+            <a:schemeClr val="lt1"/>
+          </a:fontRef>
+        </p:style>
+        <p:txBody>
+          <a:bodyPr wrap="square" lIns="73152" tIns="12700" rIns="73152" bIns="12700" rtlCol="0" anchor="ctr"/>
+          <a:lstStyle/>
+          <a:p>
+            <a:pPr algn="ctr"/>
+            <a:r>
+              <a:rPr sz="1100" b="1">
+                <a:solidFill>
+                  <a:srgbClr val="6CC77A"/>
+                </a:solidFill>
+                <a:latin typeface="微软雅黑"/>
+              </a:rPr>
+              <a:t>✅ 术语定稿</a:t>
+            </a:r>
+            <a:endParaRPr sz="1250" b="1">
+              <a:solidFill>
+                <a:srgbClr val="6CC77A"/>
+              </a:solidFill>
+              <a:latin typeface="微软雅黑"/>
+              <a:ea typeface="微软雅黑"/>
+            </a:endParaRPr>
+          </a:p>
+          <a:p>
+            <a:pPr algn="ctr"/>
+            <a:r>
+              <a:rPr sz="1100" b="1">
+                <a:solidFill>
+                  <a:srgbClr val="6CC77A"/>
+                </a:solidFill>
+                <a:latin typeface="微软雅黑"/>
+              </a:rPr>
+              <a:t>+ 用例覆盖</a:t>
+            </a:r>
+            <a:endParaRPr sz="1250" b="1">
+              <a:solidFill>
+                <a:srgbClr val="6CC77A"/>
+              </a:solidFill>
+              <a:latin typeface="微软雅黑"/>
+              <a:ea typeface="微软雅黑"/>
+            </a:endParaRPr>
+          </a:p>
+        </p:txBody>
+      </p:sp>
+      <p:sp>
+        <p:nvSpPr>
+          <p:cNvPr id="22" name="TextBox 21"/>
           <p:cNvSpPr txBox="1"/>
           <p:nvPr/>
         </p:nvSpPr>
         <p:spPr>
           <a:xfrm>
-            <a:off x="6675120" y="1389888"/>
-            <a:ext cx="4754880" cy="365760"/>
+            <a:off x="502920" y="5413248"/>
+            <a:ext cx="1005840" cy="365760"/>
           </a:xfrm>
           <a:prstGeom prst="rect">
             <a:avLst/>
@@ -4480,202 +4666,41 @@
               </a:spcAft>
             </a:pPr>
             <a:r>
-              <a:rPr sz="1500" b="1">
+              <a:rPr sz="1300" b="1">
                 <a:solidFill>
                   <a:srgbClr val="EBEEF5"/>
                 </a:solidFill>
                 <a:latin typeface="微软雅黑"/>
                 <a:ea typeface="微软雅黑"/>
               </a:rPr>
-              <a:t>工程细节</a:t>
-            </a:r>
-            <a:endParaRPr sz="1500" b="1">
-              <a:solidFill>
-                <a:srgbClr val="EBEEF5"/>
-              </a:solidFill>
-              <a:latin typeface="微软雅黑"/>
-              <a:ea typeface="微软雅黑"/>
-            </a:endParaRPr>
-          </a:p>
-        </p:txBody>
-      </p:sp>
-      <p:sp>
-        <p:nvSpPr>
-          <p:cNvPr id="9" name="TextBox 8"/>
-          <p:cNvSpPr txBox="1"/>
-          <p:nvPr/>
-        </p:nvSpPr>
-        <p:spPr>
-          <a:xfrm>
-            <a:off x="6675120" y="1874519"/>
-            <a:ext cx="4846320" cy="200025"/>
-          </a:xfrm>
-          <a:prstGeom prst="rect">
-            <a:avLst/>
-          </a:prstGeom>
-          <a:noFill/>
-        </p:spPr>
-        <p:txBody>
-          <a:bodyPr wrap="square" lIns="0" tIns="0" rIns="0" bIns="0" anchor="t">
-            <a:spAutoFit/>
-          </a:bodyPr>
-          <a:lstStyle/>
-          <a:p>
-            <a:pPr algn="l">
-              <a:spcAft>
-                <a:spcPts val="600"/>
-              </a:spcAft>
-            </a:pPr>
-            <a:r>
-              <a:rPr sz="1300" b="1">
-                <a:solidFill>
-                  <a:srgbClr val="F5A623"/>
-                </a:solidFill>
-                <a:latin typeface="微软雅黑"/>
-                <a:ea typeface="微软雅黑"/>
-              </a:rPr>
-              <a:t>深拷贝快照　</a:t>
-            </a:r>
-            <a:r>
-              <a:rPr lang="zh-CN" sz="1300" b="1">
-                <a:solidFill>
-                  <a:srgbClr val="F5A623"/>
-                </a:solidFill>
-                <a:latin typeface="微软雅黑"/>
-                <a:ea typeface="微软雅黑"/>
-              </a:rPr>
-              <a:t>每步一份状态，撤销不需要额外逻辑</a:t>
-            </a:r>
-            <a:endParaRPr sz="1300" b="0">
-              <a:solidFill>
-                <a:srgbClr val="EBEEF5"/>
-              </a:solidFill>
-              <a:latin typeface="微软雅黑"/>
-              <a:ea typeface="微软雅黑"/>
-            </a:endParaRPr>
-          </a:p>
-        </p:txBody>
-      </p:sp>
-      <p:sp>
-        <p:nvSpPr>
-          <p:cNvPr id="10" name="TextBox 9"/>
-          <p:cNvSpPr txBox="1"/>
-          <p:nvPr/>
-        </p:nvSpPr>
-        <p:spPr>
-          <a:xfrm>
-            <a:off x="6675120" y="2395728"/>
-            <a:ext cx="4846320" cy="411480"/>
-          </a:xfrm>
-          <a:prstGeom prst="rect">
-            <a:avLst/>
-          </a:prstGeom>
-          <a:noFill/>
-        </p:spPr>
-        <p:txBody>
-          <a:bodyPr wrap="square" lIns="0" tIns="0" rIns="0" bIns="0" anchor="t">
-            <a:spAutoFit/>
-          </a:bodyPr>
-          <a:lstStyle/>
-          <a:p>
-            <a:pPr algn="l">
-              <a:spcAft>
-                <a:spcPts val="600"/>
-              </a:spcAft>
-            </a:pPr>
-            <a:r>
-              <a:rPr sz="1300" b="1">
-                <a:solidFill>
-                  <a:srgbClr val="569CD6"/>
-                </a:solidFill>
-                <a:latin typeface="微软雅黑"/>
-                <a:ea typeface="微软雅黑"/>
-              </a:rPr>
-              <a:t>渲染只读　</a:t>
-            </a:r>
-            <a:r>
-              <a:rPr sz="1300" b="0">
-                <a:solidFill>
-                  <a:srgbClr val="EBEEF5"/>
-                </a:solidFill>
-                <a:latin typeface="微软雅黑"/>
-                <a:ea typeface="微软雅黑"/>
-              </a:rPr>
-              <a:t>画完一帧后断言状态完全一致</a:t>
-            </a:r>
-            <a:endParaRPr sz="1300" b="0">
-              <a:solidFill>
-                <a:srgbClr val="EBEEF5"/>
-              </a:solidFill>
-              <a:latin typeface="微软雅黑"/>
-              <a:ea typeface="微软雅黑"/>
-            </a:endParaRPr>
-          </a:p>
-        </p:txBody>
-      </p:sp>
-      <p:sp>
-        <p:nvSpPr>
-          <p:cNvPr id="11" name="TextBox 10"/>
-          <p:cNvSpPr txBox="1"/>
-          <p:nvPr/>
-        </p:nvSpPr>
-        <p:spPr>
-          <a:xfrm>
-            <a:off x="6675120" y="2926080"/>
-            <a:ext cx="4754880" cy="184150"/>
-          </a:xfrm>
-          <a:prstGeom prst="rect">
-            <a:avLst/>
-          </a:prstGeom>
-          <a:noFill/>
-        </p:spPr>
-        <p:txBody>
-          <a:bodyPr wrap="square" lIns="0" tIns="0" rIns="0" bIns="0" anchor="t">
-            <a:spAutoFit/>
-          </a:bodyPr>
-          <a:lstStyle/>
-          <a:p>
-            <a:pPr algn="l">
-              <a:spcAft>
-                <a:spcPts val="600"/>
-              </a:spcAft>
-            </a:pPr>
-            <a:r>
-              <a:rPr sz="1200" b="1">
-                <a:solidFill>
-                  <a:srgbClr val="98A2B8"/>
-                </a:solidFill>
-                <a:latin typeface="微软雅黑"/>
-                <a:ea typeface="微软雅黑"/>
-              </a:rPr>
-              <a:t>关键词</a:t>
-            </a:r>
-            <a:endParaRPr sz="1200" b="1">
-              <a:solidFill>
-                <a:srgbClr val="98A2B8"/>
-              </a:solidFill>
-              <a:latin typeface="微软雅黑"/>
-              <a:ea typeface="微软雅黑"/>
-            </a:endParaRPr>
-          </a:p>
-        </p:txBody>
-      </p:sp>
-      <p:sp>
-        <p:nvSpPr>
-          <p:cNvPr id="12" name="Rounded Rectangle 11"/>
+              <a:t>四步法</a:t>
+            </a:r>
+            <a:endParaRPr sz="1300" b="1">
+              <a:solidFill>
+                <a:srgbClr val="EBEEF5"/>
+              </a:solidFill>
+              <a:latin typeface="微软雅黑"/>
+              <a:ea typeface="微软雅黑"/>
+            </a:endParaRPr>
+          </a:p>
+        </p:txBody>
+      </p:sp>
+      <p:sp>
+        <p:nvSpPr>
+          <p:cNvPr id="23" name="Rounded Rectangle 22"/>
           <p:cNvSpPr/>
           <p:nvPr/>
         </p:nvSpPr>
         <p:spPr>
           <a:xfrm>
-            <a:off x="6675120" y="3310128"/>
-            <a:ext cx="1133856" cy="457200"/>
+            <a:off x="1600200" y="5349240"/>
+            <a:ext cx="2286000" cy="457200"/>
           </a:xfrm>
           <a:prstGeom prst="roundRect">
             <a:avLst/>
           </a:prstGeom>
           <a:solidFill>
-            <a:srgbClr val="262C42"/>
+            <a:srgbClr val="1C2132"/>
           </a:solidFill>
           <a:ln w="12700">
             <a:solidFill>
@@ -4704,41 +4729,41 @@
           <a:p>
             <a:pPr algn="ctr"/>
             <a:r>
-              <a:rPr sz="1100" b="0">
+              <a:rPr sz="1150" b="0">
                 <a:solidFill>
                   <a:srgbClr val="EBEEF5"/>
                 </a:solidFill>
                 <a:latin typeface="微软雅黑"/>
                 <a:ea typeface="微软雅黑"/>
               </a:rPr>
-              <a:t>纯函数</a:t>
-            </a:r>
-            <a:endParaRPr sz="1100" b="0">
-              <a:solidFill>
-                <a:srgbClr val="EBEEF5"/>
-              </a:solidFill>
-              <a:latin typeface="微软雅黑"/>
-              <a:ea typeface="微软雅黑"/>
-            </a:endParaRPr>
-          </a:p>
-        </p:txBody>
-      </p:sp>
-      <p:sp>
-        <p:nvSpPr>
-          <p:cNvPr id="13" name="Rounded Rectangle 12"/>
+              <a:t>① 复现现象</a:t>
+            </a:r>
+            <a:endParaRPr sz="1150" b="0">
+              <a:solidFill>
+                <a:srgbClr val="EBEEF5"/>
+              </a:solidFill>
+              <a:latin typeface="微软雅黑"/>
+              <a:ea typeface="微软雅黑"/>
+            </a:endParaRPr>
+          </a:p>
+        </p:txBody>
+      </p:sp>
+      <p:sp>
+        <p:nvSpPr>
+          <p:cNvPr id="24" name="Rounded Rectangle 23"/>
           <p:cNvSpPr/>
           <p:nvPr/>
         </p:nvSpPr>
         <p:spPr>
           <a:xfrm>
-            <a:off x="7918704" y="3310128"/>
-            <a:ext cx="1133856" cy="457200"/>
+            <a:off x="4069080" y="5349240"/>
+            <a:ext cx="2286000" cy="457200"/>
           </a:xfrm>
           <a:prstGeom prst="roundRect">
             <a:avLst/>
           </a:prstGeom>
           <a:solidFill>
-            <a:srgbClr val="262C42"/>
+            <a:srgbClr val="1C2132"/>
           </a:solidFill>
           <a:ln w="12700">
             <a:solidFill>
@@ -4767,41 +4792,41 @@
           <a:p>
             <a:pPr algn="ctr"/>
             <a:r>
-              <a:rPr sz="1100" b="0">
+              <a:rPr sz="1150" b="0">
                 <a:solidFill>
                   <a:srgbClr val="EBEEF5"/>
                 </a:solidFill>
                 <a:latin typeface="微软雅黑"/>
                 <a:ea typeface="微软雅黑"/>
               </a:rPr>
-              <a:t>嵌套 dict</a:t>
-            </a:r>
-            <a:endParaRPr sz="1100" b="0">
-              <a:solidFill>
-                <a:srgbClr val="EBEEF5"/>
-              </a:solidFill>
-              <a:latin typeface="微软雅黑"/>
-              <a:ea typeface="微软雅黑"/>
-            </a:endParaRPr>
-          </a:p>
-        </p:txBody>
-      </p:sp>
-      <p:sp>
-        <p:nvSpPr>
-          <p:cNvPr id="14" name="Rounded Rectangle 13"/>
+              <a:t>② 定位根因</a:t>
+            </a:r>
+            <a:endParaRPr sz="1150" b="0">
+              <a:solidFill>
+                <a:srgbClr val="EBEEF5"/>
+              </a:solidFill>
+              <a:latin typeface="微软雅黑"/>
+              <a:ea typeface="微软雅黑"/>
+            </a:endParaRPr>
+          </a:p>
+        </p:txBody>
+      </p:sp>
+      <p:sp>
+        <p:nvSpPr>
+          <p:cNvPr id="25" name="Rounded Rectangle 24"/>
           <p:cNvSpPr/>
           <p:nvPr/>
         </p:nvSpPr>
         <p:spPr>
           <a:xfrm>
-            <a:off x="9162288" y="3310128"/>
-            <a:ext cx="1133856" cy="457200"/>
+            <a:off x="6537960" y="5349240"/>
+            <a:ext cx="2286000" cy="457200"/>
           </a:xfrm>
           <a:prstGeom prst="roundRect">
             <a:avLst/>
           </a:prstGeom>
           <a:solidFill>
-            <a:srgbClr val="262C42"/>
+            <a:srgbClr val="1C2132"/>
           </a:solidFill>
           <a:ln w="12700">
             <a:solidFill>
@@ -4830,41 +4855,41 @@
           <a:p>
             <a:pPr algn="ctr"/>
             <a:r>
-              <a:rPr sz="1100" b="0">
+              <a:rPr sz="1150" b="0">
                 <a:solidFill>
                   <a:srgbClr val="EBEEF5"/>
                 </a:solidFill>
                 <a:latin typeface="微软雅黑"/>
                 <a:ea typeface="微软雅黑"/>
               </a:rPr>
-              <a:t>快照撤销</a:t>
-            </a:r>
-            <a:endParaRPr sz="1100" b="0">
-              <a:solidFill>
-                <a:srgbClr val="EBEEF5"/>
-              </a:solidFill>
-              <a:latin typeface="微软雅黑"/>
-              <a:ea typeface="微软雅黑"/>
-            </a:endParaRPr>
-          </a:p>
-        </p:txBody>
-      </p:sp>
-      <p:sp>
-        <p:nvSpPr>
-          <p:cNvPr id="15" name="Rounded Rectangle 14"/>
+              <a:t>③ 定方案</a:t>
+            </a:r>
+            <a:endParaRPr sz="1150" b="0">
+              <a:solidFill>
+                <a:srgbClr val="EBEEF5"/>
+              </a:solidFill>
+              <a:latin typeface="微软雅黑"/>
+              <a:ea typeface="微软雅黑"/>
+            </a:endParaRPr>
+          </a:p>
+        </p:txBody>
+      </p:sp>
+      <p:sp>
+        <p:nvSpPr>
+          <p:cNvPr id="26" name="Rounded Rectangle 25"/>
           <p:cNvSpPr/>
           <p:nvPr/>
         </p:nvSpPr>
         <p:spPr>
           <a:xfrm>
-            <a:off x="10405872" y="3310128"/>
-            <a:ext cx="1133856" cy="457200"/>
+            <a:off x="9006840" y="5349240"/>
+            <a:ext cx="2286000" cy="457200"/>
           </a:xfrm>
           <a:prstGeom prst="roundRect">
             <a:avLst/>
           </a:prstGeom>
           <a:solidFill>
-            <a:srgbClr val="262C42"/>
+            <a:srgbClr val="1C2132"/>
           </a:solidFill>
           <a:ln w="12700">
             <a:solidFill>
@@ -4893,18 +4918,1068 @@
           <a:p>
             <a:pPr algn="ctr"/>
             <a:r>
-              <a:rPr lang="zh-CN" sz="1100" b="0">
+              <a:rPr sz="1150" b="0">
                 <a:solidFill>
                   <a:srgbClr val="EBEEF5"/>
                 </a:solidFill>
                 <a:latin typeface="微软雅黑"/>
                 <a:ea typeface="微软雅黑"/>
               </a:rPr>
-              <a:t>只读渲染</a:t>
-            </a:r>
-            <a:endParaRPr sz="1100" b="0">
-              <a:solidFill>
-                <a:srgbClr val="EBEEF5"/>
+              <a:t>④ 验证并固化</a:t>
+            </a:r>
+            <a:endParaRPr sz="1150" b="0">
+              <a:solidFill>
+                <a:srgbClr val="EBEEF5"/>
+              </a:solidFill>
+              <a:latin typeface="微软雅黑"/>
+              <a:ea typeface="微软雅黑"/>
+            </a:endParaRPr>
+          </a:p>
+        </p:txBody>
+      </p:sp>
+      <p:sp>
+        <p:nvSpPr>
+          <p:cNvPr id="9" name="Rectangle 8"/>
+          <p:cNvSpPr/>
+          <p:nvPr/>
+        </p:nvSpPr>
+        <p:spPr>
+          <a:xfrm>
+            <a:off x="502920" y="2340864"/>
+            <a:ext cx="2286000" cy="640080"/>
+          </a:xfrm>
+          <a:prstGeom prst="rect">
+            <a:avLst/>
+          </a:prstGeom>
+          <a:solidFill>
+            <a:srgbClr val="1C2132"/>
+          </a:solidFill>
+          <a:ln w="9525">
+            <a:solidFill>
+              <a:srgbClr val="3E465E"/>
+            </a:solidFill>
+          </a:ln>
+          <a:effectLst/>
+        </p:spPr>
+        <p:style>
+          <a:lnRef idx="1">
+            <a:schemeClr val="accent1"/>
+          </a:lnRef>
+          <a:fillRef idx="3">
+            <a:schemeClr val="accent1"/>
+          </a:fillRef>
+          <a:effectRef idx="2">
+            <a:schemeClr val="accent1"/>
+          </a:effectRef>
+          <a:fontRef idx="minor">
+            <a:schemeClr val="lt1"/>
+          </a:fontRef>
+        </p:style>
+        <p:txBody>
+          <a:bodyPr wrap="square" lIns="128016" tIns="12700" rIns="137160" bIns="12700" rtlCol="0" anchor="ctr"/>
+          <a:lstStyle/>
+          <a:p>
+            <a:pPr algn="l"/>
+            <a:r>
+              <a:rPr sz="1100" b="1">
+                <a:solidFill>
+                  <a:srgbClr val="EBEEF5"/>
+                </a:solidFill>
+                <a:latin typeface="微软雅黑"/>
+              </a:rPr>
+              <a:t>门的方向模型</a:t>
+            </a:r>
+            <a:endParaRPr sz="1300" b="1">
+              <a:solidFill>
+                <a:srgbClr val="EBEEF5"/>
+              </a:solidFill>
+              <a:latin typeface="微软雅黑"/>
+              <a:ea typeface="微软雅黑"/>
+            </a:endParaRPr>
+          </a:p>
+          <a:p>
+            <a:pPr algn="l"/>
+            <a:r>
+              <a:rPr sz="1100" b="1">
+                <a:solidFill>
+                  <a:srgbClr val="EBEEF5"/>
+                </a:solidFill>
+                <a:latin typeface="微软雅黑"/>
+              </a:rPr>
+              <a:t>表达力不足</a:t>
+            </a:r>
+            <a:endParaRPr sz="1300" b="1">
+              <a:solidFill>
+                <a:srgbClr val="EBEEF5"/>
+              </a:solidFill>
+              <a:latin typeface="微软雅黑"/>
+              <a:ea typeface="微软雅黑"/>
+            </a:endParaRPr>
+          </a:p>
+        </p:txBody>
+      </p:sp>
+      <p:sp>
+        <p:nvSpPr>
+          <p:cNvPr id="10" name="Rectangle 9"/>
+          <p:cNvSpPr/>
+          <p:nvPr/>
+        </p:nvSpPr>
+        <p:spPr>
+          <a:xfrm>
+            <a:off x="2788920" y="2340864"/>
+            <a:ext cx="6263640" cy="640080"/>
+          </a:xfrm>
+          <a:prstGeom prst="rect">
+            <a:avLst/>
+          </a:prstGeom>
+          <a:solidFill>
+            <a:srgbClr val="1C2132"/>
+          </a:solidFill>
+          <a:ln w="9525">
+            <a:solidFill>
+              <a:srgbClr val="3E465E"/>
+            </a:solidFill>
+          </a:ln>
+          <a:effectLst/>
+        </p:spPr>
+        <p:style>
+          <a:lnRef idx="1">
+            <a:schemeClr val="accent1"/>
+          </a:lnRef>
+          <a:fillRef idx="3">
+            <a:schemeClr val="accent1"/>
+          </a:fillRef>
+          <a:effectRef idx="2">
+            <a:schemeClr val="accent1"/>
+          </a:effectRef>
+          <a:fontRef idx="minor">
+            <a:schemeClr val="lt1"/>
+          </a:fontRef>
+        </p:style>
+        <p:txBody>
+          <a:bodyPr wrap="square" lIns="137160" tIns="12700" rIns="137160" bIns="12700" rtlCol="0" anchor="ctr"/>
+          <a:lstStyle/>
+          <a:p>
+            <a:pPr algn="l">
+              <a:spcAft>
+                <a:spcPts val="500"/>
+              </a:spcAft>
+            </a:pPr>
+            <a:r>
+              <a:rPr sz="1050" b="0">
+                <a:solidFill>
+                  <a:srgbClr val="EBEEF5"/>
+                </a:solidFill>
+                <a:latin typeface="微软雅黑"/>
+              </a:rPr>
+              <a:t>▪ 现象：箱子只有一条边能进出，其余边开着也进不去</a:t>
+            </a:r>
+            <a:endParaRPr sz="1150" b="0">
+              <a:solidFill>
+                <a:srgbClr val="EBEEF5"/>
+              </a:solidFill>
+              <a:latin typeface="微软雅黑"/>
+              <a:ea typeface="微软雅黑"/>
+            </a:endParaRPr>
+          </a:p>
+          <a:p>
+            <a:pPr algn="l">
+              <a:spcAft>
+                <a:spcPts val="500"/>
+              </a:spcAft>
+            </a:pPr>
+            <a:r>
+              <a:rPr sz="1050" b="0">
+                <a:solidFill>
+                  <a:srgbClr val="EBEEF5"/>
+                </a:solidFill>
+                <a:latin typeface="微软雅黑"/>
+              </a:rPr>
+              <a:t>▪ 定位：门是外挂的方向字段，和地图脱节</a:t>
+            </a:r>
+            <a:endParaRPr sz="1150" b="0">
+              <a:solidFill>
+                <a:srgbClr val="EBEEF5"/>
+              </a:solidFill>
+              <a:latin typeface="微软雅黑"/>
+            </a:endParaRPr>
+          </a:p>
+          <a:p>
+            <a:pPr algn="l">
+              <a:spcAft>
+                <a:spcPts val="500"/>
+              </a:spcAft>
+            </a:pPr>
+            <a:r>
+              <a:rPr sz="1050" b="0">
+                <a:solidFill>
+                  <a:srgbClr val="EBEEF5"/>
+                </a:solidFill>
+                <a:latin typeface="微软雅黑"/>
+              </a:rPr>
+              <a:t>▪ 方案：内层奇数尺寸，四边中心格即口位（是墙则无口）</a:t>
+            </a:r>
+            <a:endParaRPr sz="1150" b="0">
+              <a:solidFill>
+                <a:srgbClr val="EBEEF5"/>
+              </a:solidFill>
+              <a:latin typeface="微软雅黑"/>
+            </a:endParaRPr>
+          </a:p>
+        </p:txBody>
+      </p:sp>
+      <p:sp>
+        <p:nvSpPr>
+          <p:cNvPr id="11" name="Rectangle 10"/>
+          <p:cNvSpPr/>
+          <p:nvPr/>
+        </p:nvSpPr>
+        <p:spPr>
+          <a:xfrm>
+            <a:off x="9052560" y="2340864"/>
+            <a:ext cx="2651760" cy="640080"/>
+          </a:xfrm>
+          <a:prstGeom prst="rect">
+            <a:avLst/>
+          </a:prstGeom>
+          <a:solidFill>
+            <a:srgbClr val="1C2132"/>
+          </a:solidFill>
+          <a:ln w="9525">
+            <a:solidFill>
+              <a:srgbClr val="3E465E"/>
+            </a:solidFill>
+          </a:ln>
+          <a:effectLst/>
+        </p:spPr>
+        <p:style>
+          <a:lnRef idx="1">
+            <a:schemeClr val="accent1"/>
+          </a:lnRef>
+          <a:fillRef idx="3">
+            <a:schemeClr val="accent1"/>
+          </a:fillRef>
+          <a:effectRef idx="2">
+            <a:schemeClr val="accent1"/>
+          </a:effectRef>
+          <a:fontRef idx="minor">
+            <a:schemeClr val="lt1"/>
+          </a:fontRef>
+        </p:style>
+        <p:txBody>
+          <a:bodyPr wrap="square" lIns="73152" tIns="12700" rIns="73152" bIns="12700" rtlCol="0" anchor="ctr"/>
+          <a:lstStyle/>
+          <a:p>
+            <a:pPr algn="ctr"/>
+            <a:r>
+              <a:rPr sz="1100" b="1">
+                <a:solidFill>
+                  <a:srgbClr val="6CC77A"/>
+                </a:solidFill>
+                <a:latin typeface="微软雅黑"/>
+              </a:rPr>
+              <a:t>✅ 重构</a:t>
+            </a:r>
+            <a:endParaRPr sz="1250" b="1">
+              <a:solidFill>
+                <a:srgbClr val="6CC77A"/>
+              </a:solidFill>
+              <a:latin typeface="微软雅黑"/>
+              <a:ea typeface="微软雅黑"/>
+            </a:endParaRPr>
+          </a:p>
+          <a:p>
+            <a:pPr algn="ctr"/>
+            <a:r>
+              <a:rPr sz="1100" b="1">
+                <a:solidFill>
+                  <a:srgbClr val="6CC77A"/>
+                </a:solidFill>
+                <a:latin typeface="微软雅黑"/>
+              </a:rPr>
+              <a:t>+ 双向穿口</a:t>
+            </a:r>
+            <a:endParaRPr sz="1250" b="1">
+              <a:solidFill>
+                <a:srgbClr val="6CC77A"/>
+              </a:solidFill>
+              <a:latin typeface="微软雅黑"/>
+              <a:ea typeface="微软雅黑"/>
+            </a:endParaRPr>
+          </a:p>
+        </p:txBody>
+      </p:sp>
+      <p:sp>
+        <p:nvSpPr>
+          <p:cNvPr id="9" name="Rectangle 8"/>
+          <p:cNvSpPr/>
+          <p:nvPr/>
+        </p:nvSpPr>
+        <p:spPr>
+          <a:xfrm>
+            <a:off x="502920" y="3035808"/>
+            <a:ext cx="2286000" cy="640080"/>
+          </a:xfrm>
+          <a:prstGeom prst="rect">
+            <a:avLst/>
+          </a:prstGeom>
+          <a:solidFill>
+            <a:srgbClr val="1C2132"/>
+          </a:solidFill>
+          <a:ln w="9525">
+            <a:solidFill>
+              <a:srgbClr val="3E465E"/>
+            </a:solidFill>
+          </a:ln>
+          <a:effectLst/>
+        </p:spPr>
+        <p:style>
+          <a:lnRef idx="1">
+            <a:schemeClr val="accent1"/>
+          </a:lnRef>
+          <a:fillRef idx="3">
+            <a:schemeClr val="accent1"/>
+          </a:fillRef>
+          <a:effectRef idx="2">
+            <a:schemeClr val="accent1"/>
+          </a:effectRef>
+          <a:fontRef idx="minor">
+            <a:schemeClr val="lt1"/>
+          </a:fontRef>
+        </p:style>
+        <p:txBody>
+          <a:bodyPr wrap="square" lIns="128016" tIns="12700" rIns="137160" bIns="12700" rtlCol="0" anchor="ctr"/>
+          <a:lstStyle/>
+          <a:p>
+            <a:pPr algn="l"/>
+            <a:r>
+              <a:rPr sz="1100" b="1">
+                <a:solidFill>
+                  <a:srgbClr val="EBEEF5"/>
+                </a:solidFill>
+                <a:latin typeface="微软雅黑"/>
+              </a:rPr>
+              <a:t>「吞食01」</a:t>
+            </a:r>
+            <a:endParaRPr sz="1300" b="1">
+              <a:solidFill>
+                <a:srgbClr val="EBEEF5"/>
+              </a:solidFill>
+              <a:latin typeface="微软雅黑"/>
+              <a:ea typeface="微软雅黑"/>
+            </a:endParaRPr>
+          </a:p>
+          <a:p>
+            <a:pPr algn="l"/>
+            <a:r>
+              <a:rPr sz="1100" b="1">
+                <a:solidFill>
+                  <a:srgbClr val="EBEEF5"/>
+                </a:solidFill>
+                <a:latin typeface="微软雅黑"/>
+              </a:rPr>
+              <a:t>到底有没有解</a:t>
+            </a:r>
+            <a:endParaRPr sz="1300" b="1">
+              <a:solidFill>
+                <a:srgbClr val="EBEEF5"/>
+              </a:solidFill>
+              <a:latin typeface="微软雅黑"/>
+              <a:ea typeface="微软雅黑"/>
+            </a:endParaRPr>
+          </a:p>
+        </p:txBody>
+      </p:sp>
+      <p:sp>
+        <p:nvSpPr>
+          <p:cNvPr id="10" name="Rectangle 9"/>
+          <p:cNvSpPr/>
+          <p:nvPr/>
+        </p:nvSpPr>
+        <p:spPr>
+          <a:xfrm>
+            <a:off x="2788920" y="3035808"/>
+            <a:ext cx="6263640" cy="640080"/>
+          </a:xfrm>
+          <a:prstGeom prst="rect">
+            <a:avLst/>
+          </a:prstGeom>
+          <a:solidFill>
+            <a:srgbClr val="1C2132"/>
+          </a:solidFill>
+          <a:ln w="9525">
+            <a:solidFill>
+              <a:srgbClr val="3E465E"/>
+            </a:solidFill>
+          </a:ln>
+          <a:effectLst/>
+        </p:spPr>
+        <p:style>
+          <a:lnRef idx="1">
+            <a:schemeClr val="accent1"/>
+          </a:lnRef>
+          <a:fillRef idx="3">
+            <a:schemeClr val="accent1"/>
+          </a:fillRef>
+          <a:effectRef idx="2">
+            <a:schemeClr val="accent1"/>
+          </a:effectRef>
+          <a:fontRef idx="minor">
+            <a:schemeClr val="lt1"/>
+          </a:fontRef>
+        </p:style>
+        <p:txBody>
+          <a:bodyPr wrap="square" lIns="137160" tIns="12700" rIns="137160" bIns="12700" rtlCol="0" anchor="ctr"/>
+          <a:lstStyle/>
+          <a:p>
+            <a:pPr algn="l">
+              <a:spcAft>
+                <a:spcPts val="500"/>
+              </a:spcAft>
+            </a:pPr>
+            <a:r>
+              <a:rPr sz="1050" b="0">
+                <a:solidFill>
+                  <a:srgbClr val="EBEEF5"/>
+                </a:solidFill>
+                <a:latin typeface="微软雅黑"/>
+              </a:rPr>
+              <a:t>▪ 现象：肉眼分析判“无解”，被解算器直接推翻</a:t>
+            </a:r>
+            <a:endParaRPr sz="1150" b="0">
+              <a:solidFill>
+                <a:srgbClr val="EBEEF5"/>
+              </a:solidFill>
+              <a:latin typeface="微软雅黑"/>
+              <a:ea typeface="微软雅黑"/>
+            </a:endParaRPr>
+          </a:p>
+          <a:p>
+            <a:pPr algn="l">
+              <a:spcAft>
+                <a:spcPts val="500"/>
+              </a:spcAft>
+            </a:pPr>
+            <a:r>
+              <a:rPr sz="1050" b="0">
+                <a:solidFill>
+                  <a:srgbClr val="EBEEF5"/>
+                </a:solidFill>
+                <a:latin typeface="微软雅黑"/>
+              </a:rPr>
+              <a:t>▪ 方案：自研 BFS 解算器求最短解（状态哈希去重）</a:t>
+            </a:r>
+            <a:endParaRPr sz="1150" b="0">
+              <a:solidFill>
+                <a:srgbClr val="EBEEF5"/>
+              </a:solidFill>
+              <a:latin typeface="微软雅黑"/>
+            </a:endParaRPr>
+          </a:p>
+          <a:p>
+            <a:pPr algn="l">
+              <a:spcAft>
+                <a:spcPts val="500"/>
+              </a:spcAft>
+            </a:pPr>
+            <a:r>
+              <a:rPr sz="1050" b="0">
+                <a:solidFill>
+                  <a:srgbClr val="EBEEF5"/>
+                </a:solidFill>
+                <a:latin typeface="微软雅黑"/>
+              </a:rPr>
+              <a:t>▪ 顺带查出内层末行误加的口 → 改成必吞食解</a:t>
+            </a:r>
+            <a:endParaRPr sz="1150" b="0">
+              <a:solidFill>
+                <a:srgbClr val="EBEEF5"/>
+              </a:solidFill>
+              <a:latin typeface="微软雅黑"/>
+            </a:endParaRPr>
+          </a:p>
+        </p:txBody>
+      </p:sp>
+      <p:sp>
+        <p:nvSpPr>
+          <p:cNvPr id="11" name="Rectangle 10"/>
+          <p:cNvSpPr/>
+          <p:nvPr/>
+        </p:nvSpPr>
+        <p:spPr>
+          <a:xfrm>
+            <a:off x="9052560" y="3035808"/>
+            <a:ext cx="2651760" cy="640080"/>
+          </a:xfrm>
+          <a:prstGeom prst="rect">
+            <a:avLst/>
+          </a:prstGeom>
+          <a:solidFill>
+            <a:srgbClr val="1C2132"/>
+          </a:solidFill>
+          <a:ln w="9525">
+            <a:solidFill>
+              <a:srgbClr val="3E465E"/>
+            </a:solidFill>
+          </a:ln>
+          <a:effectLst/>
+        </p:spPr>
+        <p:style>
+          <a:lnRef idx="1">
+            <a:schemeClr val="accent1"/>
+          </a:lnRef>
+          <a:fillRef idx="3">
+            <a:schemeClr val="accent1"/>
+          </a:fillRef>
+          <a:effectRef idx="2">
+            <a:schemeClr val="accent1"/>
+          </a:effectRef>
+          <a:fontRef idx="minor">
+            <a:schemeClr val="lt1"/>
+          </a:fontRef>
+        </p:style>
+        <p:txBody>
+          <a:bodyPr wrap="square" lIns="73152" tIns="12700" rIns="73152" bIns="12700" rtlCol="0" anchor="ctr"/>
+          <a:lstStyle/>
+          <a:p>
+            <a:pPr algn="ctr"/>
+            <a:r>
+              <a:rPr sz="1100" b="1">
+                <a:solidFill>
+                  <a:srgbClr val="6CC77A"/>
+                </a:solidFill>
+                <a:latin typeface="微软雅黑"/>
+              </a:rPr>
+              <a:t>✅ 21 步 →</a:t>
+            </a:r>
+            <a:endParaRPr sz="1250" b="1">
+              <a:solidFill>
+                <a:srgbClr val="6CC77A"/>
+              </a:solidFill>
+              <a:latin typeface="微软雅黑"/>
+              <a:ea typeface="微软雅黑"/>
+            </a:endParaRPr>
+          </a:p>
+          <a:p>
+            <a:pPr algn="ctr"/>
+            <a:r>
+              <a:rPr sz="1100" b="1">
+                <a:solidFill>
+                  <a:srgbClr val="6CC77A"/>
+                </a:solidFill>
+                <a:latin typeface="微软雅黑"/>
+              </a:rPr>
+              <a:t>37 步</a:t>
+            </a:r>
+            <a:endParaRPr sz="1250" b="1">
+              <a:solidFill>
+                <a:srgbClr val="6CC77A"/>
+              </a:solidFill>
+              <a:latin typeface="微软雅黑"/>
+              <a:ea typeface="微软雅黑"/>
+            </a:endParaRPr>
+          </a:p>
+        </p:txBody>
+      </p:sp>
+      <p:sp>
+        <p:nvSpPr>
+          <p:cNvPr id="9" name="Rectangle 8"/>
+          <p:cNvSpPr/>
+          <p:nvPr/>
+        </p:nvSpPr>
+        <p:spPr>
+          <a:xfrm>
+            <a:off x="502920" y="3730752"/>
+            <a:ext cx="2286000" cy="640080"/>
+          </a:xfrm>
+          <a:prstGeom prst="rect">
+            <a:avLst/>
+          </a:prstGeom>
+          <a:solidFill>
+            <a:srgbClr val="1C2132"/>
+          </a:solidFill>
+          <a:ln w="9525">
+            <a:solidFill>
+              <a:srgbClr val="3E465E"/>
+            </a:solidFill>
+          </a:ln>
+          <a:effectLst/>
+        </p:spPr>
+        <p:style>
+          <a:lnRef idx="1">
+            <a:schemeClr val="accent1"/>
+          </a:lnRef>
+          <a:fillRef idx="3">
+            <a:schemeClr val="accent1"/>
+          </a:fillRef>
+          <a:effectRef idx="2">
+            <a:schemeClr val="accent1"/>
+          </a:effectRef>
+          <a:fontRef idx="minor">
+            <a:schemeClr val="lt1"/>
+          </a:fontRef>
+        </p:style>
+        <p:txBody>
+          <a:bodyPr wrap="square" lIns="128016" tIns="12700" rIns="137160" bIns="12700" rtlCol="0" anchor="ctr"/>
+          <a:lstStyle/>
+          <a:p>
+            <a:pPr algn="l"/>
+            <a:r>
+              <a:rPr sz="1100" b="1">
+                <a:solidFill>
+                  <a:srgbClr val="EBEEF5"/>
+                </a:solidFill>
+                <a:latin typeface="微软雅黑"/>
+              </a:rPr>
+              <a:t>37 步显示成 39 步</a:t>
+            </a:r>
+            <a:endParaRPr sz="1300" b="1">
+              <a:solidFill>
+                <a:srgbClr val="EBEEF5"/>
+              </a:solidFill>
+              <a:latin typeface="微软雅黑"/>
+              <a:ea typeface="微软雅黑"/>
+            </a:endParaRPr>
+          </a:p>
+        </p:txBody>
+      </p:sp>
+      <p:sp>
+        <p:nvSpPr>
+          <p:cNvPr id="10" name="Rectangle 9"/>
+          <p:cNvSpPr/>
+          <p:nvPr/>
+        </p:nvSpPr>
+        <p:spPr>
+          <a:xfrm>
+            <a:off x="2788920" y="3730752"/>
+            <a:ext cx="6263640" cy="640080"/>
+          </a:xfrm>
+          <a:prstGeom prst="rect">
+            <a:avLst/>
+          </a:prstGeom>
+          <a:solidFill>
+            <a:srgbClr val="1C2132"/>
+          </a:solidFill>
+          <a:ln w="9525">
+            <a:solidFill>
+              <a:srgbClr val="3E465E"/>
+            </a:solidFill>
+          </a:ln>
+          <a:effectLst/>
+        </p:spPr>
+        <p:style>
+          <a:lnRef idx="1">
+            <a:schemeClr val="accent1"/>
+          </a:lnRef>
+          <a:fillRef idx="3">
+            <a:schemeClr val="accent1"/>
+          </a:fillRef>
+          <a:effectRef idx="2">
+            <a:schemeClr val="accent1"/>
+          </a:effectRef>
+          <a:fontRef idx="minor">
+            <a:schemeClr val="lt1"/>
+          </a:fontRef>
+        </p:style>
+        <p:txBody>
+          <a:bodyPr wrap="square" lIns="137160" tIns="12700" rIns="137160" bIns="12700" rtlCol="0" anchor="ctr"/>
+          <a:lstStyle/>
+          <a:p>
+            <a:pPr algn="l">
+              <a:spcAft>
+                <a:spcPts val="500"/>
+              </a:spcAft>
+            </a:pPr>
+            <a:r>
+              <a:rPr sz="1050" b="0">
+                <a:solidFill>
+                  <a:srgbClr val="EBEEF5"/>
+                </a:solidFill>
+                <a:latin typeface="微软雅黑"/>
+              </a:rPr>
+              <a:t>▪ 现象：回归测试断言 moves == 37 直接失败</a:t>
+            </a:r>
+            <a:endParaRPr sz="1150" b="0">
+              <a:solidFill>
+                <a:srgbClr val="EBEEF5"/>
+              </a:solidFill>
+              <a:latin typeface="微软雅黑"/>
+              <a:ea typeface="微软雅黑"/>
+            </a:endParaRPr>
+          </a:p>
+          <a:p>
+            <a:pPr algn="l">
+              <a:spcAft>
+                <a:spcPts val="500"/>
+              </a:spcAft>
+            </a:pPr>
+            <a:r>
+              <a:rPr sz="1050" b="0">
+                <a:solidFill>
+                  <a:srgbClr val="EBEEF5"/>
+                </a:solidFill>
+                <a:latin typeface="微软雅黑"/>
+              </a:rPr>
+              <a:t>▪ 定位：搬运 / 推出路径上 nested 与 logic 各计一次</a:t>
+            </a:r>
+            <a:endParaRPr sz="1150" b="0">
+              <a:solidFill>
+                <a:srgbClr val="EBEEF5"/>
+              </a:solidFill>
+              <a:latin typeface="微软雅黑"/>
+            </a:endParaRPr>
+          </a:p>
+          <a:p>
+            <a:pPr algn="l">
+              <a:spcAft>
+                <a:spcPts val="500"/>
+              </a:spcAft>
+            </a:pPr>
+            <a:r>
+              <a:rPr sz="1050" b="0">
+                <a:solidFill>
+                  <a:srgbClr val="EBEEF5"/>
+                </a:solidFill>
+                <a:latin typeface="微软雅黑"/>
+              </a:rPr>
+              <a:t>▪ 方案：计数只由 logic.move() 的 _accepted() 负责</a:t>
+            </a:r>
+            <a:endParaRPr sz="1150" b="0">
+              <a:solidFill>
+                <a:srgbClr val="EBEEF5"/>
+              </a:solidFill>
+              <a:latin typeface="微软雅黑"/>
+            </a:endParaRPr>
+          </a:p>
+        </p:txBody>
+      </p:sp>
+      <p:sp>
+        <p:nvSpPr>
+          <p:cNvPr id="11" name="Rectangle 10"/>
+          <p:cNvSpPr/>
+          <p:nvPr/>
+        </p:nvSpPr>
+        <p:spPr>
+          <a:xfrm>
+            <a:off x="9052560" y="3730752"/>
+            <a:ext cx="2651760" cy="640080"/>
+          </a:xfrm>
+          <a:prstGeom prst="rect">
+            <a:avLst/>
+          </a:prstGeom>
+          <a:solidFill>
+            <a:srgbClr val="1C2132"/>
+          </a:solidFill>
+          <a:ln w="9525">
+            <a:solidFill>
+              <a:srgbClr val="3E465E"/>
+            </a:solidFill>
+          </a:ln>
+          <a:effectLst/>
+        </p:spPr>
+        <p:style>
+          <a:lnRef idx="1">
+            <a:schemeClr val="accent1"/>
+          </a:lnRef>
+          <a:fillRef idx="3">
+            <a:schemeClr val="accent1"/>
+          </a:fillRef>
+          <a:effectRef idx="2">
+            <a:schemeClr val="accent1"/>
+          </a:effectRef>
+          <a:fontRef idx="minor">
+            <a:schemeClr val="lt1"/>
+          </a:fontRef>
+        </p:style>
+        <p:txBody>
+          <a:bodyPr wrap="square" lIns="73152" tIns="12700" rIns="73152" bIns="12700" rtlCol="0" anchor="ctr"/>
+          <a:lstStyle/>
+          <a:p>
+            <a:pPr algn="ctr"/>
+            <a:r>
+              <a:rPr sz="1100" b="1">
+                <a:solidFill>
+                  <a:srgbClr val="6CC77A"/>
+                </a:solidFill>
+                <a:latin typeface="微软雅黑"/>
+              </a:rPr>
+              <a:t>✅ 修复</a:t>
+            </a:r>
+            <a:endParaRPr sz="1250" b="1">
+              <a:solidFill>
+                <a:srgbClr val="6CC77A"/>
+              </a:solidFill>
+              <a:latin typeface="微软雅黑"/>
+              <a:ea typeface="微软雅黑"/>
+            </a:endParaRPr>
+          </a:p>
+          <a:p>
+            <a:pPr algn="ctr"/>
+            <a:r>
+              <a:rPr sz="1100" b="1">
+                <a:solidFill>
+                  <a:srgbClr val="6CC77A"/>
+                </a:solidFill>
+                <a:latin typeface="微软雅黑"/>
+              </a:rPr>
+              <a:t>+ 回归用例</a:t>
+            </a:r>
+            <a:endParaRPr sz="1250" b="1">
+              <a:solidFill>
+                <a:srgbClr val="6CC77A"/>
+              </a:solidFill>
+              <a:latin typeface="微软雅黑"/>
+              <a:ea typeface="微软雅黑"/>
+            </a:endParaRPr>
+          </a:p>
+        </p:txBody>
+      </p:sp>
+      <p:sp>
+        <p:nvSpPr>
+          <p:cNvPr id="9" name="Rectangle 8"/>
+          <p:cNvSpPr/>
+          <p:nvPr/>
+        </p:nvSpPr>
+        <p:spPr>
+          <a:xfrm>
+            <a:off x="502920" y="4425696"/>
+            <a:ext cx="2286000" cy="640080"/>
+          </a:xfrm>
+          <a:prstGeom prst="rect">
+            <a:avLst/>
+          </a:prstGeom>
+          <a:solidFill>
+            <a:srgbClr val="1C2132"/>
+          </a:solidFill>
+          <a:ln w="9525">
+            <a:solidFill>
+              <a:srgbClr val="3E465E"/>
+            </a:solidFill>
+          </a:ln>
+          <a:effectLst/>
+        </p:spPr>
+        <p:style>
+          <a:lnRef idx="1">
+            <a:schemeClr val="accent1"/>
+          </a:lnRef>
+          <a:fillRef idx="3">
+            <a:schemeClr val="accent1"/>
+          </a:fillRef>
+          <a:effectRef idx="2">
+            <a:schemeClr val="accent1"/>
+          </a:effectRef>
+          <a:fontRef idx="minor">
+            <a:schemeClr val="lt1"/>
+          </a:fontRef>
+        </p:style>
+        <p:txBody>
+          <a:bodyPr wrap="square" lIns="128016" tIns="12700" rIns="137160" bIns="12700" rtlCol="0" anchor="ctr"/>
+          <a:lstStyle/>
+          <a:p>
+            <a:pPr algn="l"/>
+            <a:r>
+              <a:rPr sz="1100" b="1">
+                <a:solidFill>
+                  <a:srgbClr val="EBEEF5"/>
+                </a:solidFill>
+                <a:latin typeface="微软雅黑"/>
+              </a:rPr>
+              <a:t>渲染没法人工验收</a:t>
+            </a:r>
+            <a:endParaRPr sz="1300" b="1">
+              <a:solidFill>
+                <a:srgbClr val="EBEEF5"/>
+              </a:solidFill>
+              <a:latin typeface="微软雅黑"/>
+              <a:ea typeface="微软雅黑"/>
+            </a:endParaRPr>
+          </a:p>
+        </p:txBody>
+      </p:sp>
+      <p:sp>
+        <p:nvSpPr>
+          <p:cNvPr id="10" name="Rectangle 9"/>
+          <p:cNvSpPr/>
+          <p:nvPr/>
+        </p:nvSpPr>
+        <p:spPr>
+          <a:xfrm>
+            <a:off x="2788920" y="4425696"/>
+            <a:ext cx="6263640" cy="640080"/>
+          </a:xfrm>
+          <a:prstGeom prst="rect">
+            <a:avLst/>
+          </a:prstGeom>
+          <a:solidFill>
+            <a:srgbClr val="1C2132"/>
+          </a:solidFill>
+          <a:ln w="9525">
+            <a:solidFill>
+              <a:srgbClr val="3E465E"/>
+            </a:solidFill>
+          </a:ln>
+          <a:effectLst/>
+        </p:spPr>
+        <p:style>
+          <a:lnRef idx="1">
+            <a:schemeClr val="accent1"/>
+          </a:lnRef>
+          <a:fillRef idx="3">
+            <a:schemeClr val="accent1"/>
+          </a:fillRef>
+          <a:effectRef idx="2">
+            <a:schemeClr val="accent1"/>
+          </a:effectRef>
+          <a:fontRef idx="minor">
+            <a:schemeClr val="lt1"/>
+          </a:fontRef>
+        </p:style>
+        <p:txBody>
+          <a:bodyPr wrap="square" lIns="137160" tIns="12700" rIns="137160" bIns="12700" rtlCol="0" anchor="ctr"/>
+          <a:lstStyle/>
+          <a:p>
+            <a:pPr algn="l">
+              <a:spcAft>
+                <a:spcPts val="500"/>
+              </a:spcAft>
+            </a:pPr>
+            <a:r>
+              <a:rPr sz="1050" b="0">
+                <a:solidFill>
+                  <a:srgbClr val="EBEEF5"/>
+                </a:solidFill>
+                <a:latin typeface="微软雅黑"/>
+              </a:rPr>
+              <a:t>▪ 现象：AI 看不到画面，无法判断“好不好看”</a:t>
+            </a:r>
+            <a:endParaRPr sz="1150" b="0">
+              <a:solidFill>
+                <a:srgbClr val="EBEEF5"/>
+              </a:solidFill>
+              <a:latin typeface="微软雅黑"/>
+              <a:ea typeface="微软雅黑"/>
+            </a:endParaRPr>
+          </a:p>
+          <a:p>
+            <a:pPr algn="l">
+              <a:spcAft>
+                <a:spcPts val="500"/>
+              </a:spcAft>
+            </a:pPr>
+            <a:r>
+              <a:rPr sz="1050" b="0">
+                <a:solidFill>
+                  <a:srgbClr val="EBEEF5"/>
+                </a:solidFill>
+                <a:latin typeface="微软雅黑"/>
+              </a:rPr>
+              <a:t>▪ 方案：对比度阈值 + 色板与文档逐值比对</a:t>
+            </a:r>
+            <a:endParaRPr sz="1150" b="0">
+              <a:solidFill>
+                <a:srgbClr val="EBEEF5"/>
+              </a:solidFill>
+              <a:latin typeface="微软雅黑"/>
+            </a:endParaRPr>
+          </a:p>
+          <a:p>
+            <a:pPr algn="l">
+              <a:spcAft>
+                <a:spcPts val="500"/>
+              </a:spcAft>
+            </a:pPr>
+            <a:r>
+              <a:rPr sz="1050" b="0">
+                <a:solidFill>
+                  <a:srgbClr val="EBEEF5"/>
+                </a:solidFill>
+                <a:latin typeface="微软雅黑"/>
+              </a:rPr>
+              <a:t>▪ 补程序生成的预览图，人只看最终观感</a:t>
+            </a:r>
+            <a:endParaRPr sz="1150" b="0">
+              <a:solidFill>
+                <a:srgbClr val="EBEEF5"/>
+              </a:solidFill>
+              <a:latin typeface="微软雅黑"/>
+            </a:endParaRPr>
+          </a:p>
+        </p:txBody>
+      </p:sp>
+      <p:sp>
+        <p:nvSpPr>
+          <p:cNvPr id="11" name="Rectangle 10"/>
+          <p:cNvSpPr/>
+          <p:nvPr/>
+        </p:nvSpPr>
+        <p:spPr>
+          <a:xfrm>
+            <a:off x="9052560" y="4425696"/>
+            <a:ext cx="2651760" cy="640080"/>
+          </a:xfrm>
+          <a:prstGeom prst="rect">
+            <a:avLst/>
+          </a:prstGeom>
+          <a:solidFill>
+            <a:srgbClr val="1C2132"/>
+          </a:solidFill>
+          <a:ln w="9525">
+            <a:solidFill>
+              <a:srgbClr val="3E465E"/>
+            </a:solidFill>
+          </a:ln>
+          <a:effectLst/>
+        </p:spPr>
+        <p:style>
+          <a:lnRef idx="1">
+            <a:schemeClr val="accent1"/>
+          </a:lnRef>
+          <a:fillRef idx="3">
+            <a:schemeClr val="accent1"/>
+          </a:fillRef>
+          <a:effectRef idx="2">
+            <a:schemeClr val="accent1"/>
+          </a:effectRef>
+          <a:fontRef idx="minor">
+            <a:schemeClr val="lt1"/>
+          </a:fontRef>
+        </p:style>
+        <p:txBody>
+          <a:bodyPr wrap="square" lIns="73152" tIns="12700" rIns="73152" bIns="12700" rtlCol="0" anchor="ctr"/>
+          <a:lstStyle/>
+          <a:p>
+            <a:pPr algn="ctr"/>
+            <a:r>
+              <a:rPr sz="1100" b="1">
+                <a:solidFill>
+                  <a:srgbClr val="6CC77A"/>
+                </a:solidFill>
+                <a:latin typeface="微软雅黑"/>
+              </a:rPr>
+              <a:t>✅ 自动化</a:t>
+            </a:r>
+            <a:endParaRPr sz="1250" b="1">
+              <a:solidFill>
+                <a:srgbClr val="6CC77A"/>
+              </a:solidFill>
+              <a:latin typeface="微软雅黑"/>
+              <a:ea typeface="微软雅黑"/>
+            </a:endParaRPr>
+          </a:p>
+          <a:p>
+            <a:pPr algn="ctr"/>
+            <a:r>
+              <a:rPr sz="1100" b="1">
+                <a:solidFill>
+                  <a:srgbClr val="6CC77A"/>
+                </a:solidFill>
+                <a:latin typeface="微软雅黑"/>
+              </a:rPr>
+              <a:t>+ 人工确认</a:t>
+            </a:r>
+            <a:endParaRPr sz="1250" b="1">
+              <a:solidFill>
+                <a:srgbClr val="6CC77A"/>
               </a:solidFill>
               <a:latin typeface="微软雅黑"/>
               <a:ea typeface="微软雅黑"/>
@@ -4973,7 +6048,7 @@
                 <a:latin typeface="微软雅黑"/>
                 <a:ea typeface="微软雅黑"/>
               </a:rPr>
-              <a:t>关键实现 ③ · 验证与自动化</a:t>
+              <a:t>问题解决案例 ① · 门由内层地图边缘决定</a:t>
             </a:r>
             <a:endParaRPr sz="2600" b="1">
               <a:solidFill>
@@ -5111,7 +6186,7 @@
                 <a:latin typeface="微软雅黑"/>
                 <a:ea typeface="微软雅黑"/>
               </a:rPr>
-              <a:t>7 / 10</a:t>
+              <a:t>7 / 13</a:t>
             </a:r>
             <a:endParaRPr sz="900" b="0">
               <a:solidFill>
@@ -5151,14 +6226,14 @@
               </a:spcAft>
             </a:pPr>
             <a:r>
-              <a:rPr sz="1600" b="1">
+              <a:rPr sz="1350" b="1">
                 <a:solidFill>
                   <a:srgbClr val="F5A623"/>
                 </a:solidFill>
                 <a:latin typeface="微软雅黑"/>
                 <a:ea typeface="微软雅黑"/>
               </a:rPr>
-              <a:t>108 个自动化测试（1043 行）</a:t>
+              <a:t>现象</a:t>
             </a:r>
             <a:endParaRPr sz="1600" b="1">
               <a:solidFill>
@@ -5175,14 +6250,14 @@
               </a:spcAft>
             </a:pPr>
             <a:r>
-              <a:rPr sz="1300" b="0">
+              <a:rPr sz="1250" b="0">
                 <a:solidFill>
                   <a:srgbClr val="EBEEF5"/>
                 </a:solidFill>
                 <a:latin typeface="微软雅黑"/>
                 <a:ea typeface="微软雅黑"/>
               </a:rPr>
-              <a:t>▪  规则 41：推箱 / 链推动 / 吸入 / 进出 / 双向穿口 / 自引用 / 胜判</a:t>
+              <a:t>▪  测试时发现：箱子只有一条边能进出，别的边空着也进不去</a:t>
             </a:r>
             <a:endParaRPr sz="1300" b="0">
               <a:solidFill>
@@ -5199,14 +6274,14 @@
               </a:spcAft>
             </a:pPr>
             <a:r>
-              <a:rPr sz="1300" b="0">
+              <a:rPr sz="1250" b="0">
                 <a:solidFill>
                   <a:srgbClr val="EBEEF5"/>
                 </a:solidFill>
                 <a:latin typeface="微软雅黑"/>
                 <a:ea typeface="微软雅黑"/>
               </a:rPr>
-              <a:t>▪  数据 44：关卡解析与非法数据 / 口规则 / 嵌套校验 / 目标点统计</a:t>
+              <a:t>▪  期望：哪条边能进，应该由内层地图自己说，而不是外挂字段</a:t>
             </a:r>
             <a:endParaRPr sz="1300" b="0">
               <a:solidFill>
@@ -5223,14 +6298,62 @@
               </a:spcAft>
             </a:pPr>
             <a:r>
-              <a:rPr sz="1300" b="0">
+              <a:rPr sz="1350" b="1">
+                <a:solidFill>
+                  <a:srgbClr val="F5A623"/>
+                </a:solidFill>
+                <a:latin typeface="微软雅黑"/>
+                <a:ea typeface="微软雅黑"/>
+              </a:rPr>
+              <a:t>定位与方案</a:t>
+            </a:r>
+            <a:endParaRPr sz="1300" b="0">
+              <a:solidFill>
+                <a:srgbClr val="EBEEF5"/>
+              </a:solidFill>
+              <a:latin typeface="微软雅黑"/>
+              <a:ea typeface="微软雅黑"/>
+            </a:endParaRPr>
+          </a:p>
+          <a:p>
+            <a:pPr algn="l">
+              <a:spcAft>
+                <a:spcPts val="1000"/>
+              </a:spcAft>
+            </a:pPr>
+            <a:r>
+              <a:rPr sz="1250" b="1">
+                <a:solidFill>
+                  <a:srgbClr val="F5A623"/>
+                </a:solidFill>
+                <a:latin typeface="微软雅黑"/>
+                <a:ea typeface="微软雅黑"/>
+              </a:rPr>
+              <a:t>▪  根因：门是数据里的方向字段，和地图脱节，改地图还要同步改字段</a:t>
+            </a:r>
+            <a:endParaRPr sz="1600" b="1">
+              <a:solidFill>
+                <a:srgbClr val="F5A623"/>
+              </a:solidFill>
+              <a:latin typeface="微软雅黑"/>
+              <a:ea typeface="微软雅黑"/>
+            </a:endParaRPr>
+          </a:p>
+          <a:p>
+            <a:pPr algn="l">
+              <a:spcAft>
+                <a:spcPts val="1000"/>
+              </a:spcAft>
+            </a:pPr>
+            <a:r>
+              <a:rPr sz="1250" b="0">
                 <a:solidFill>
                   <a:srgbClr val="EBEEF5"/>
                 </a:solidFill>
                 <a:latin typeface="微软雅黑"/>
                 <a:ea typeface="微软雅黑"/>
               </a:rPr>
-              <a:t>▪  渲染 23：色板与文档一致 / 对比度 / 缩略图几何 / 渲染只读 / 选关</a:t>
+              <a:t>▪  方案：内层宽高必须为奇数，四条边的中心格就是口位；是墙就没口</a:t>
             </a:r>
             <a:endParaRPr sz="1300" b="0">
               <a:solidFill>
@@ -5247,18 +6370,42 @@
               </a:spcAft>
             </a:pPr>
             <a:r>
-              <a:rPr sz="1600" b="1">
+              <a:rPr sz="1250" b="0">
+                <a:solidFill>
+                  <a:srgbClr val="EBEEF5"/>
+                </a:solidFill>
+                <a:latin typeface="微软雅黑"/>
+                <a:ea typeface="微软雅黑"/>
+              </a:rPr>
+              <a:t>▪  顺带补上双向穿口：箱子能被推进别人的口，也能从内部推出来</a:t>
+            </a:r>
+            <a:endParaRPr sz="1300" b="0">
+              <a:solidFill>
+                <a:srgbClr val="EBEEF5"/>
+              </a:solidFill>
+              <a:latin typeface="微软雅黑"/>
+              <a:ea typeface="微软雅黑"/>
+            </a:endParaRPr>
+          </a:p>
+          <a:p>
+            <a:pPr algn="l">
+              <a:spcAft>
+                <a:spcPts val="1000"/>
+              </a:spcAft>
+            </a:pPr>
+            <a:r>
+              <a:rPr sz="1350" b="1">
                 <a:solidFill>
                   <a:srgbClr val="F5A623"/>
                 </a:solidFill>
                 <a:latin typeface="微软雅黑"/>
                 <a:ea typeface="微软雅黑"/>
               </a:rPr>
-              <a:t>自研 BFS 解算器</a:t>
-            </a:r>
-            <a:endParaRPr sz="1600" b="1">
-              <a:solidFill>
-                <a:srgbClr val="F5A623"/>
+              <a:t>验证</a:t>
+            </a:r>
+            <a:endParaRPr sz="1300" b="0">
+              <a:solidFill>
+                <a:srgbClr val="EBEEF5"/>
               </a:solidFill>
               <a:latin typeface="微软雅黑"/>
               <a:ea typeface="微软雅黑"/>
@@ -5271,62 +6418,14 @@
               </a:spcAft>
             </a:pPr>
             <a:r>
-              <a:rPr sz="1300" b="0">
+              <a:rPr sz="1250" b="0">
                 <a:solidFill>
                   <a:srgbClr val="EBEEF5"/>
                 </a:solidFill>
                 <a:latin typeface="微软雅黑"/>
                 <a:ea typeface="微软雅黑"/>
               </a:rPr>
-              <a:t>▪  自动判定“有解 / 无解”并求出最短步数</a:t>
-            </a:r>
-            <a:endParaRPr sz="1300" b="0">
-              <a:solidFill>
-                <a:srgbClr val="EBEEF5"/>
-              </a:solidFill>
-              <a:latin typeface="微软雅黑"/>
-              <a:ea typeface="微软雅黑"/>
-            </a:endParaRPr>
-          </a:p>
-          <a:p>
-            <a:pPr algn="l">
-              <a:spcAft>
-                <a:spcPts val="1000"/>
-              </a:spcAft>
-            </a:pPr>
-            <a:r>
-              <a:rPr sz="1300" b="0">
-                <a:solidFill>
-                  <a:srgbClr val="EBEEF5"/>
-                </a:solidFill>
-                <a:latin typeface="微软雅黑"/>
-                <a:ea typeface="微软雅黑"/>
-              </a:rPr>
-              <a:t>▪  吞食01：先算出 21 步“隧道解”（绕过吞食）→ 查出误加的底边口</a:t>
-            </a:r>
-            <a:endParaRPr sz="1300" b="0">
-              <a:solidFill>
-                <a:srgbClr val="EBEEF5"/>
-              </a:solidFill>
-              <a:latin typeface="微软雅黑"/>
-              <a:ea typeface="微软雅黑"/>
-            </a:endParaRPr>
-          </a:p>
-          <a:p>
-            <a:pPr algn="l">
-              <a:spcAft>
-                <a:spcPts val="1000"/>
-              </a:spcAft>
-            </a:pPr>
-            <a:r>
-              <a:rPr sz="1300" b="0">
-                <a:solidFill>
-                  <a:srgbClr val="EBEEF5"/>
-                </a:solidFill>
-                <a:latin typeface="微软雅黑"/>
-                <a:ea typeface="微软雅黑"/>
-              </a:rPr>
-              <a:t>▪  修正后是 37 步必吞食解；两关解法都固化成回归测试</a:t>
+              <a:t>▪  两个口 21 步可过 vs 只留一个口 37 步（解算器实测）→ 吞食成为必经</a:t>
             </a:r>
             <a:endParaRPr sz="1300" b="0">
               <a:solidFill>
@@ -5417,7 +6516,7 @@
                 <a:latin typeface="微软雅黑"/>
                 <a:ea typeface="微软雅黑"/>
               </a:rPr>
-              <a:t>验证结果</a:t>
+              <a:t>为什么改成边缘墙</a:t>
             </a:r>
             <a:endParaRPr sz="1500" b="1">
               <a:solidFill>
@@ -5438,7 +6537,7 @@
         <p:spPr>
           <a:xfrm>
             <a:off x="6675120" y="1874519"/>
-            <a:ext cx="4846320" cy="200025"/>
+            <a:ext cx="4846320" cy="502920"/>
           </a:xfrm>
           <a:prstGeom prst="rect">
             <a:avLst/>
@@ -5464,7 +6563,7 @@
                 <a:latin typeface="微软雅黑"/>
                 <a:ea typeface="微软雅黑"/>
               </a:rPr>
-              <a:t>测试　</a:t>
+              <a:t>所见即所得　</a:t>
             </a:r>
             <a:r>
               <a:rPr lang="zh-CN" sz="1300" b="1">
@@ -5474,7 +6573,7 @@
                 <a:latin typeface="微软雅黑"/>
                 <a:ea typeface="微软雅黑"/>
               </a:rPr>
-              <a:t>108 / 108 通过；系统 Python 下渲染用例自动跳过</a:t>
+              <a:t>墙上的缺口就是门，玩家不用猜</a:t>
             </a:r>
             <a:endParaRPr sz="1300" b="0">
               <a:solidFill>
@@ -5494,8 +6593,8 @@
         </p:nvSpPr>
         <p:spPr>
           <a:xfrm>
-            <a:off x="6675120" y="2395728"/>
-            <a:ext cx="4846320" cy="411480"/>
+            <a:off x="6675120" y="2468880"/>
+            <a:ext cx="4846320" cy="685800"/>
           </a:xfrm>
           <a:prstGeom prst="rect">
             <a:avLst/>
@@ -5521,7 +6620,7 @@
                 <a:latin typeface="微软雅黑"/>
                 <a:ea typeface="微软雅黑"/>
               </a:rPr>
-              <a:t>可解性　</a:t>
+              <a:t>校验前置　</a:t>
             </a:r>
             <a:r>
               <a:rPr sz="1300" b="0">
@@ -5531,7 +6630,7 @@
                 <a:latin typeface="微软雅黑"/>
                 <a:ea typeface="微软雅黑"/>
               </a:rPr>
-              <a:t>两关都有最短解测试，改坏立刻报红</a:t>
+              <a:t>奇数尺寸 + 边缘除中心格外必须是墙，解析期报错</a:t>
             </a:r>
             <a:endParaRPr sz="1300" b="0">
               <a:solidFill>
@@ -5551,8 +6650,8 @@
         </p:nvSpPr>
         <p:spPr>
           <a:xfrm>
-            <a:off x="6675120" y="2926080"/>
-            <a:ext cx="4754880" cy="184150"/>
+            <a:off x="6675120" y="3246120"/>
+            <a:ext cx="4754880" cy="182880"/>
           </a:xfrm>
           <a:prstGeom prst="rect">
             <a:avLst/>
@@ -5598,7 +6697,7 @@
         </p:nvSpPr>
         <p:spPr>
           <a:xfrm>
-            <a:off x="6675120" y="3310128"/>
+            <a:off x="6675120" y="3611880"/>
             <a:ext cx="1133856" cy="457200"/>
           </a:xfrm>
           <a:prstGeom prst="roundRect">
@@ -5641,7 +6740,7 @@
                 <a:latin typeface="微软雅黑"/>
                 <a:ea typeface="微软雅黑"/>
               </a:rPr>
-              <a:t>解算器</a:t>
+              <a:t>中心格</a:t>
             </a:r>
             <a:endParaRPr sz="1100" b="0">
               <a:solidFill>
@@ -5661,7 +6760,7 @@
         </p:nvSpPr>
         <p:spPr>
           <a:xfrm>
-            <a:off x="7918704" y="3310128"/>
+            <a:off x="7918704" y="3611880"/>
             <a:ext cx="1133856" cy="457200"/>
           </a:xfrm>
           <a:prstGeom prst="roundRect">
@@ -5704,7 +6803,7 @@
                 <a:latin typeface="微软雅黑"/>
                 <a:ea typeface="微软雅黑"/>
               </a:rPr>
-              <a:t>最短步数</a:t>
+              <a:t>双向穿口</a:t>
             </a:r>
             <a:endParaRPr sz="1100" b="0">
               <a:solidFill>
@@ -5724,7 +6823,7 @@
         </p:nvSpPr>
         <p:spPr>
           <a:xfrm>
-            <a:off x="9162288" y="3310128"/>
+            <a:off x="9162288" y="3611880"/>
             <a:ext cx="1133856" cy="457200"/>
           </a:xfrm>
           <a:prstGeom prst="roundRect">
@@ -5767,7 +6866,7 @@
                 <a:latin typeface="微软雅黑"/>
                 <a:ea typeface="微软雅黑"/>
               </a:rPr>
-              <a:t>回归测试</a:t>
+              <a:t>吞食</a:t>
             </a:r>
             <a:endParaRPr sz="1100" b="0">
               <a:solidFill>
@@ -5787,7 +6886,7 @@
         </p:nvSpPr>
         <p:spPr>
           <a:xfrm>
-            <a:off x="10405872" y="3310128"/>
+            <a:off x="10405872" y="3611880"/>
             <a:ext cx="1133856" cy="457200"/>
           </a:xfrm>
           <a:prstGeom prst="roundRect">
@@ -5830,7 +6929,7 @@
                 <a:latin typeface="微软雅黑"/>
                 <a:ea typeface="微软雅黑"/>
               </a:rPr>
-              <a:t>文档一致性</a:t>
+              <a:t>对照实验</a:t>
             </a:r>
             <a:endParaRPr sz="1100" b="0">
               <a:solidFill>
@@ -5903,7 +7002,7 @@
                 <a:latin typeface="微软雅黑"/>
                 <a:ea typeface="微软雅黑"/>
               </a:rPr>
-              <a:t>项目目标达成情况</a:t>
+              <a:t>问题解决案例 ② · 可解性交给解算器</a:t>
             </a:r>
             <a:endParaRPr sz="2600" b="1">
               <a:solidFill>
@@ -6041,7 +7140,7 @@
                 <a:latin typeface="微软雅黑"/>
                 <a:ea typeface="微软雅黑"/>
               </a:rPr>
-              <a:t>8 / 10</a:t>
+              <a:t>8 / 13</a:t>
             </a:r>
             <a:endParaRPr sz="900" b="0">
               <a:solidFill>
@@ -6055,25 +7154,262 @@
       </p:sp>
       <p:sp>
         <p:nvSpPr>
-          <p:cNvPr id="6" name="Rectangle 5"/>
+          <p:cNvPr id="6" name="TextBox 5"/>
+          <p:cNvSpPr txBox="1"/>
+          <p:nvPr/>
+        </p:nvSpPr>
+        <p:spPr>
+          <a:xfrm>
+            <a:off x="502920" y="1234440"/>
+            <a:ext cx="5577840" cy="2590165"/>
+          </a:xfrm>
+          <a:prstGeom prst="rect">
+            <a:avLst/>
+          </a:prstGeom>
+          <a:noFill/>
+        </p:spPr>
+        <p:txBody>
+          <a:bodyPr wrap="square" lIns="0" tIns="0" rIns="0" bIns="0" anchor="t">
+            <a:spAutoFit/>
+          </a:bodyPr>
+          <a:lstStyle/>
+          <a:p>
+            <a:pPr algn="l">
+              <a:spcAft>
+                <a:spcPts val="1000"/>
+              </a:spcAft>
+            </a:pPr>
+            <a:r>
+              <a:rPr sz="1350" b="1">
+                <a:solidFill>
+                  <a:srgbClr val="F5A623"/>
+                </a:solidFill>
+                <a:latin typeface="微软雅黑"/>
+                <a:ea typeface="微软雅黑"/>
+              </a:rPr>
+              <a:t>现象</a:t>
+            </a:r>
+            <a:endParaRPr sz="1600" b="1">
+              <a:solidFill>
+                <a:srgbClr val="F5A623"/>
+              </a:solidFill>
+              <a:latin typeface="微软雅黑"/>
+              <a:ea typeface="微软雅黑"/>
+            </a:endParaRPr>
+          </a:p>
+          <a:p>
+            <a:pPr algn="l">
+              <a:spcAft>
+                <a:spcPts val="1000"/>
+              </a:spcAft>
+            </a:pPr>
+            <a:r>
+              <a:rPr sz="1250" b="0">
+                <a:solidFill>
+                  <a:srgbClr val="EBEEF5"/>
+                </a:solidFill>
+                <a:latin typeface="微软雅黑"/>
+                <a:ea typeface="微软雅黑"/>
+              </a:rPr>
+              <a:t>▪  「吞食01」我肉眼分析：箱子推到 (3,4) 后玩家被切断 → 判“无解”</a:t>
+            </a:r>
+            <a:endParaRPr sz="1300" b="0">
+              <a:solidFill>
+                <a:srgbClr val="EBEEF5"/>
+              </a:solidFill>
+              <a:latin typeface="微软雅黑"/>
+              <a:ea typeface="微软雅黑"/>
+            </a:endParaRPr>
+          </a:p>
+          <a:p>
+            <a:pPr algn="l">
+              <a:spcAft>
+                <a:spcPts val="1000"/>
+              </a:spcAft>
+            </a:pPr>
+            <a:r>
+              <a:rPr sz="1250" b="0">
+                <a:solidFill>
+                  <a:srgbClr val="EBEEF5"/>
+                </a:solidFill>
+                <a:latin typeface="微软雅黑"/>
+                <a:ea typeface="微软雅黑"/>
+              </a:rPr>
+              <a:t>▪  但 A 脚下还压着一个 g，胜负条件和我以为的不一样</a:t>
+            </a:r>
+            <a:endParaRPr sz="1300" b="0">
+              <a:solidFill>
+                <a:srgbClr val="EBEEF5"/>
+              </a:solidFill>
+              <a:latin typeface="微软雅黑"/>
+              <a:ea typeface="微软雅黑"/>
+            </a:endParaRPr>
+          </a:p>
+          <a:p>
+            <a:pPr algn="l">
+              <a:spcAft>
+                <a:spcPts val="1000"/>
+              </a:spcAft>
+            </a:pPr>
+            <a:r>
+              <a:rPr sz="1350" b="1">
+                <a:solidFill>
+                  <a:srgbClr val="F5A623"/>
+                </a:solidFill>
+                <a:latin typeface="微软雅黑"/>
+                <a:ea typeface="微软雅黑"/>
+              </a:rPr>
+              <a:t>做法</a:t>
+            </a:r>
+            <a:endParaRPr sz="1300" b="0">
+              <a:solidFill>
+                <a:srgbClr val="EBEEF5"/>
+              </a:solidFill>
+              <a:latin typeface="微软雅黑"/>
+              <a:ea typeface="微软雅黑"/>
+            </a:endParaRPr>
+          </a:p>
+          <a:p>
+            <a:pPr algn="l">
+              <a:spcAft>
+                <a:spcPts val="1000"/>
+              </a:spcAft>
+            </a:pPr>
+            <a:r>
+              <a:rPr sz="1250" b="1">
+                <a:solidFill>
+                  <a:srgbClr val="F5A623"/>
+                </a:solidFill>
+                <a:latin typeface="微软雅黑"/>
+                <a:ea typeface="微软雅黑"/>
+              </a:rPr>
+              <a:t>▪  手解失败 → 写 BFS 解算器：状态哈希去重，逐层搜最短解</a:t>
+            </a:r>
+            <a:endParaRPr sz="1600" b="1">
+              <a:solidFill>
+                <a:srgbClr val="F5A623"/>
+              </a:solidFill>
+              <a:latin typeface="微软雅黑"/>
+              <a:ea typeface="微软雅黑"/>
+            </a:endParaRPr>
+          </a:p>
+          <a:p>
+            <a:pPr algn="l">
+              <a:spcAft>
+                <a:spcPts val="1000"/>
+              </a:spcAft>
+            </a:pPr>
+            <a:r>
+              <a:rPr sz="1250" b="0">
+                <a:solidFill>
+                  <a:srgbClr val="EBEEF5"/>
+                </a:solidFill>
+                <a:latin typeface="微软雅黑"/>
+                <a:ea typeface="微软雅黑"/>
+              </a:rPr>
+              <a:t>▪  解算器给出 21 步解，而且完全绕开“吞食”→ 设计意图没达成</a:t>
+            </a:r>
+            <a:endParaRPr sz="1300" b="0">
+              <a:solidFill>
+                <a:srgbClr val="EBEEF5"/>
+              </a:solidFill>
+              <a:latin typeface="微软雅黑"/>
+              <a:ea typeface="微软雅黑"/>
+            </a:endParaRPr>
+          </a:p>
+          <a:p>
+            <a:pPr algn="l">
+              <a:spcAft>
+                <a:spcPts val="1000"/>
+              </a:spcAft>
+            </a:pPr>
+            <a:r>
+              <a:rPr sz="1250" b="0">
+                <a:solidFill>
+                  <a:srgbClr val="EBEEF5"/>
+                </a:solidFill>
+                <a:latin typeface="微软雅黑"/>
+                <a:ea typeface="微软雅黑"/>
+              </a:rPr>
+              <a:t>▪  顺着这条解追查，发现内层最后一行多了一个口（误加）</a:t>
+            </a:r>
+            <a:endParaRPr sz="1300" b="0">
+              <a:solidFill>
+                <a:srgbClr val="EBEEF5"/>
+              </a:solidFill>
+              <a:latin typeface="微软雅黑"/>
+              <a:ea typeface="微软雅黑"/>
+            </a:endParaRPr>
+          </a:p>
+          <a:p>
+            <a:pPr algn="l">
+              <a:spcAft>
+                <a:spcPts val="1000"/>
+              </a:spcAft>
+            </a:pPr>
+            <a:r>
+              <a:rPr sz="1350" b="1">
+                <a:solidFill>
+                  <a:srgbClr val="F5A623"/>
+                </a:solidFill>
+                <a:latin typeface="微软雅黑"/>
+                <a:ea typeface="微软雅黑"/>
+              </a:rPr>
+              <a:t>结论</a:t>
+            </a:r>
+            <a:endParaRPr sz="1300" b="0">
+              <a:solidFill>
+                <a:srgbClr val="EBEEF5"/>
+              </a:solidFill>
+              <a:latin typeface="微软雅黑"/>
+              <a:ea typeface="微软雅黑"/>
+            </a:endParaRPr>
+          </a:p>
+          <a:p>
+            <a:pPr algn="l">
+              <a:spcAft>
+                <a:spcPts val="1000"/>
+              </a:spcAft>
+            </a:pPr>
+            <a:r>
+              <a:rPr sz="1250" b="0">
+                <a:solidFill>
+                  <a:srgbClr val="EBEEF5"/>
+                </a:solidFill>
+                <a:latin typeface="微软雅黑"/>
+                <a:ea typeface="微软雅黑"/>
+              </a:rPr>
+              <a:t>▪  去掉那个口 → 37 步必吞食解；最短解固化成回归测试</a:t>
+            </a:r>
+            <a:endParaRPr sz="1300" b="0">
+              <a:solidFill>
+                <a:srgbClr val="EBEEF5"/>
+              </a:solidFill>
+              <a:latin typeface="微软雅黑"/>
+              <a:ea typeface="微软雅黑"/>
+            </a:endParaRPr>
+          </a:p>
+        </p:txBody>
+      </p:sp>
+      <p:sp>
+        <p:nvSpPr>
+          <p:cNvPr id="7" name="Rectangle 6"/>
           <p:cNvSpPr/>
           <p:nvPr/>
         </p:nvSpPr>
         <p:spPr>
           <a:xfrm>
-            <a:off x="502920" y="1234440"/>
-            <a:ext cx="2286000" cy="411480"/>
+            <a:off x="6446520" y="1234440"/>
+            <a:ext cx="5257800" cy="3337560"/>
           </a:xfrm>
           <a:prstGeom prst="rect">
             <a:avLst/>
           </a:prstGeom>
           <a:solidFill>
-            <a:srgbClr val="262C42"/>
+            <a:srgbClr val="1C2132"/>
           </a:solidFill>
-          <a:ln w="9525">
-            <a:solidFill>
-              <a:srgbClr val="3E465E"/>
-            </a:solidFill>
+          <a:ln>
+            <a:noFill/>
           </a:ln>
           <a:effectLst/>
         </p:spPr>
@@ -6092,489 +7428,23 @@
           </a:fontRef>
         </p:style>
         <p:txBody>
-          <a:bodyPr wrap="square" lIns="73152" tIns="18288" rIns="73152" bIns="18288" rtlCol="0" anchor="ctr"/>
+          <a:bodyPr rtlCol="0" anchor="ctr"/>
           <a:lstStyle/>
           <a:p>
             <a:pPr algn="ctr"/>
-            <a:r>
-              <a:rPr sz="1300" b="1">
-                <a:solidFill>
-                  <a:srgbClr val="EBEEF5"/>
-                </a:solidFill>
-                <a:latin typeface="微软雅黑"/>
-                <a:ea typeface="微软雅黑"/>
-              </a:rPr>
-              <a:t>目标</a:t>
-            </a:r>
-            <a:endParaRPr sz="1300" b="1">
-              <a:solidFill>
-                <a:srgbClr val="EBEEF5"/>
-              </a:solidFill>
-              <a:latin typeface="微软雅黑"/>
-              <a:ea typeface="微软雅黑"/>
-            </a:endParaRPr>
-          </a:p>
-        </p:txBody>
-      </p:sp>
-      <p:sp>
-        <p:nvSpPr>
-          <p:cNvPr id="7" name="Rectangle 6"/>
-          <p:cNvSpPr/>
-          <p:nvPr/>
-        </p:nvSpPr>
-        <p:spPr>
-          <a:xfrm>
-            <a:off x="2788920" y="1234440"/>
-            <a:ext cx="6263640" cy="411480"/>
-          </a:xfrm>
-          <a:prstGeom prst="rect">
-            <a:avLst/>
-          </a:prstGeom>
-          <a:solidFill>
-            <a:srgbClr val="262C42"/>
-          </a:solidFill>
-          <a:ln w="9525">
-            <a:solidFill>
-              <a:srgbClr val="3E465E"/>
-            </a:solidFill>
-          </a:ln>
-          <a:effectLst/>
-        </p:spPr>
-        <p:style>
-          <a:lnRef idx="1">
-            <a:schemeClr val="accent1"/>
-          </a:lnRef>
-          <a:fillRef idx="3">
-            <a:schemeClr val="accent1"/>
-          </a:fillRef>
-          <a:effectRef idx="2">
-            <a:schemeClr val="accent1"/>
-          </a:effectRef>
-          <a:fontRef idx="minor">
-            <a:schemeClr val="lt1"/>
-          </a:fontRef>
-        </p:style>
-        <p:txBody>
-          <a:bodyPr wrap="square" lIns="73152" tIns="18288" rIns="73152" bIns="18288" rtlCol="0" anchor="ctr"/>
-          <a:lstStyle/>
-          <a:p>
-            <a:pPr algn="ctr"/>
-            <a:r>
-              <a:rPr sz="1300" b="1">
-                <a:solidFill>
-                  <a:srgbClr val="EBEEF5"/>
-                </a:solidFill>
-                <a:latin typeface="微软雅黑"/>
-                <a:ea typeface="微软雅黑"/>
-              </a:rPr>
-              <a:t>内容</a:t>
-            </a:r>
-            <a:endParaRPr sz="1300" b="1">
-              <a:solidFill>
-                <a:srgbClr val="EBEEF5"/>
-              </a:solidFill>
-              <a:latin typeface="微软雅黑"/>
-              <a:ea typeface="微软雅黑"/>
-            </a:endParaRPr>
-          </a:p>
-        </p:txBody>
-      </p:sp>
-      <p:sp>
-        <p:nvSpPr>
-          <p:cNvPr id="8" name="Rectangle 7"/>
-          <p:cNvSpPr/>
-          <p:nvPr/>
-        </p:nvSpPr>
-        <p:spPr>
-          <a:xfrm>
-            <a:off x="9052560" y="1234440"/>
-            <a:ext cx="2651760" cy="411480"/>
-          </a:xfrm>
-          <a:prstGeom prst="rect">
-            <a:avLst/>
-          </a:prstGeom>
-          <a:solidFill>
-            <a:srgbClr val="262C42"/>
-          </a:solidFill>
-          <a:ln w="9525">
-            <a:solidFill>
-              <a:srgbClr val="3E465E"/>
-            </a:solidFill>
-          </a:ln>
-          <a:effectLst/>
-        </p:spPr>
-        <p:style>
-          <a:lnRef idx="1">
-            <a:schemeClr val="accent1"/>
-          </a:lnRef>
-          <a:fillRef idx="3">
-            <a:schemeClr val="accent1"/>
-          </a:fillRef>
-          <a:effectRef idx="2">
-            <a:schemeClr val="accent1"/>
-          </a:effectRef>
-          <a:fontRef idx="minor">
-            <a:schemeClr val="lt1"/>
-          </a:fontRef>
-        </p:style>
-        <p:txBody>
-          <a:bodyPr wrap="square" lIns="73152" tIns="18288" rIns="73152" bIns="18288" rtlCol="0" anchor="ctr"/>
-          <a:lstStyle/>
-          <a:p>
-            <a:pPr algn="ctr"/>
-            <a:r>
-              <a:rPr sz="1300" b="1">
-                <a:solidFill>
-                  <a:srgbClr val="EBEEF5"/>
-                </a:solidFill>
-                <a:latin typeface="微软雅黑"/>
-                <a:ea typeface="微软雅黑"/>
-              </a:rPr>
-              <a:t>状态</a:t>
-            </a:r>
-            <a:endParaRPr sz="1300" b="1">
-              <a:solidFill>
-                <a:srgbClr val="EBEEF5"/>
-              </a:solidFill>
-              <a:latin typeface="微软雅黑"/>
-              <a:ea typeface="微软雅黑"/>
-            </a:endParaRPr>
-          </a:p>
-        </p:txBody>
-      </p:sp>
-      <p:sp>
-        <p:nvSpPr>
-          <p:cNvPr id="9" name="Rectangle 8"/>
-          <p:cNvSpPr/>
-          <p:nvPr/>
-        </p:nvSpPr>
-        <p:spPr>
-          <a:xfrm>
-            <a:off x="502920" y="1645920"/>
-            <a:ext cx="2286000" cy="868680"/>
-          </a:xfrm>
-          <a:prstGeom prst="rect">
-            <a:avLst/>
-          </a:prstGeom>
-          <a:solidFill>
-            <a:srgbClr val="1C2132"/>
-          </a:solidFill>
-          <a:ln w="9525">
-            <a:solidFill>
-              <a:srgbClr val="3E465E"/>
-            </a:solidFill>
-          </a:ln>
-          <a:effectLst/>
-        </p:spPr>
-        <p:style>
-          <a:lnRef idx="1">
-            <a:schemeClr val="accent1"/>
-          </a:lnRef>
-          <a:fillRef idx="3">
-            <a:schemeClr val="accent1"/>
-          </a:fillRef>
-          <a:effectRef idx="2">
-            <a:schemeClr val="accent1"/>
-          </a:effectRef>
-          <a:fontRef idx="minor">
-            <a:schemeClr val="lt1"/>
-          </a:fontRef>
-        </p:style>
-        <p:txBody>
-          <a:bodyPr wrap="square" lIns="128016" tIns="18288" rIns="137160" bIns="18288" rtlCol="0" anchor="ctr"/>
-          <a:lstStyle/>
-          <a:p>
-            <a:pPr algn="l"/>
-            <a:r>
-              <a:rPr sz="1600" b="1">
-                <a:solidFill>
-                  <a:srgbClr val="EBEEF5"/>
-                </a:solidFill>
-                <a:latin typeface="微软雅黑"/>
-              </a:rPr>
-              <a:t>必做 · 开题承诺</a:t>
-            </a:r>
-            <a:endParaRPr sz="1300" b="1">
-              <a:solidFill>
-                <a:srgbClr val="EBEEF5"/>
-              </a:solidFill>
-              <a:latin typeface="微软雅黑"/>
-              <a:ea typeface="微软雅黑"/>
-            </a:endParaRPr>
-          </a:p>
-          <a:p>
-            <a:pPr algn="l"/>
-            <a:r>
-              <a:rPr sz="1050" b="0">
-                <a:solidFill>
-                  <a:srgbClr val="98A2B8"/>
-                </a:solidFill>
-                <a:latin typeface="微软雅黑"/>
-              </a:rPr>
-              <a:t>4 / 4</a:t>
-            </a:r>
-            <a:endParaRPr sz="1100" b="0">
-              <a:solidFill>
-                <a:srgbClr val="98A2B8"/>
-              </a:solidFill>
-              <a:latin typeface="微软雅黑"/>
-            </a:endParaRPr>
-          </a:p>
-        </p:txBody>
-      </p:sp>
-      <p:sp>
-        <p:nvSpPr>
-          <p:cNvPr id="10" name="Rectangle 9"/>
-          <p:cNvSpPr/>
-          <p:nvPr/>
-        </p:nvSpPr>
-        <p:spPr>
-          <a:xfrm>
-            <a:off x="2788920" y="1645920"/>
-            <a:ext cx="6263640" cy="868680"/>
-          </a:xfrm>
-          <a:prstGeom prst="rect">
-            <a:avLst/>
-          </a:prstGeom>
-          <a:solidFill>
-            <a:srgbClr val="1C2132"/>
-          </a:solidFill>
-          <a:ln w="9525">
-            <a:solidFill>
-              <a:srgbClr val="3E465E"/>
-            </a:solidFill>
-          </a:ln>
-          <a:effectLst/>
-        </p:spPr>
-        <p:style>
-          <a:lnRef idx="1">
-            <a:schemeClr val="accent1"/>
-          </a:lnRef>
-          <a:fillRef idx="3">
-            <a:schemeClr val="accent1"/>
-          </a:fillRef>
-          <a:effectRef idx="2">
-            <a:schemeClr val="accent1"/>
-          </a:effectRef>
-          <a:fontRef idx="minor">
-            <a:schemeClr val="lt1"/>
-          </a:fontRef>
-        </p:style>
-        <p:txBody>
-          <a:bodyPr wrap="square" lIns="137160" tIns="18288" rIns="137160" bIns="18288" rtlCol="0" anchor="ctr"/>
-          <a:lstStyle/>
-          <a:p>
-            <a:pPr algn="l">
-              <a:spcAft>
-                <a:spcPts val="500"/>
-              </a:spcAft>
-            </a:pPr>
-            <a:r>
-              <a:rPr sz="1100" b="0">
-                <a:solidFill>
-                  <a:srgbClr val="EBEEF5"/>
-                </a:solidFill>
-                <a:latin typeface="微软雅黑"/>
-              </a:rPr>
-              <a:t>▪ 推箱子移动 + 箱子链推动</a:t>
-            </a:r>
-            <a:endParaRPr sz="1150" b="0">
-              <a:solidFill>
-                <a:srgbClr val="EBEEF5"/>
-              </a:solidFill>
-              <a:latin typeface="微软雅黑"/>
-              <a:ea typeface="微软雅黑"/>
-            </a:endParaRPr>
-          </a:p>
-          <a:p>
-            <a:pPr algn="l">
-              <a:spcAft>
-                <a:spcPts val="500"/>
-              </a:spcAft>
-            </a:pPr>
-            <a:r>
-              <a:rPr sz="1100" b="0">
-                <a:solidFill>
-                  <a:srgbClr val="EBEEF5"/>
-                </a:solidFill>
-                <a:latin typeface="微软雅黑"/>
-              </a:rPr>
-              <a:t>▪ 嵌套世界进出（口由内层边缘决定）</a:t>
-            </a:r>
-            <a:endParaRPr sz="1150" b="0">
-              <a:solidFill>
-                <a:srgbClr val="EBEEF5"/>
-              </a:solidFill>
-              <a:latin typeface="微软雅黑"/>
-            </a:endParaRPr>
-          </a:p>
-          <a:p>
-            <a:pPr algn="l">
-              <a:spcAft>
-                <a:spcPts val="500"/>
-              </a:spcAft>
-            </a:pPr>
-            <a:r>
-              <a:rPr sz="1100" b="0">
-                <a:solidFill>
-                  <a:srgbClr val="EBEEF5"/>
-                </a:solidFill>
-                <a:latin typeface="微软雅黑"/>
-              </a:rPr>
-              <a:t>▪ 胜利判定：所有 g 被箱子盖住 + 玩家站上 G</a:t>
-            </a:r>
-            <a:endParaRPr sz="1150" b="0">
-              <a:solidFill>
-                <a:srgbClr val="EBEEF5"/>
-              </a:solidFill>
-              <a:latin typeface="微软雅黑"/>
-            </a:endParaRPr>
-          </a:p>
-        </p:txBody>
-      </p:sp>
-      <p:sp>
-        <p:nvSpPr>
-          <p:cNvPr id="11" name="Rectangle 10"/>
-          <p:cNvSpPr/>
-          <p:nvPr/>
-        </p:nvSpPr>
-        <p:spPr>
-          <a:xfrm>
-            <a:off x="9052560" y="1645920"/>
-            <a:ext cx="2651760" cy="868680"/>
-          </a:xfrm>
-          <a:prstGeom prst="rect">
-            <a:avLst/>
-          </a:prstGeom>
-          <a:solidFill>
-            <a:srgbClr val="1C2132"/>
-          </a:solidFill>
-          <a:ln w="9525">
-            <a:solidFill>
-              <a:srgbClr val="3E465E"/>
-            </a:solidFill>
-          </a:ln>
-          <a:effectLst/>
-        </p:spPr>
-        <p:style>
-          <a:lnRef idx="1">
-            <a:schemeClr val="accent1"/>
-          </a:lnRef>
-          <a:fillRef idx="3">
-            <a:schemeClr val="accent1"/>
-          </a:fillRef>
-          <a:effectRef idx="2">
-            <a:schemeClr val="accent1"/>
-          </a:effectRef>
-          <a:fontRef idx="minor">
-            <a:schemeClr val="lt1"/>
-          </a:fontRef>
-        </p:style>
-        <p:txBody>
-          <a:bodyPr wrap="square" lIns="73152" tIns="18288" rIns="73152" bIns="18288" rtlCol="0" anchor="ctr"/>
-          <a:lstStyle/>
-          <a:p>
-            <a:pPr algn="ctr"/>
-            <a:r>
-              <a:rPr sz="1400" b="1">
-                <a:solidFill>
-                  <a:srgbClr val="6CC77A"/>
-                </a:solidFill>
-                <a:latin typeface="微软雅黑"/>
-              </a:rPr>
-              <a:t>✅ 达成</a:t>
-            </a:r>
-            <a:endParaRPr sz="1250" b="1">
-              <a:solidFill>
-                <a:srgbClr val="6CC77A"/>
-              </a:solidFill>
-              <a:latin typeface="微软雅黑"/>
-              <a:ea typeface="微软雅黑"/>
-            </a:endParaRPr>
-          </a:p>
-        </p:txBody>
-      </p:sp>
-      <p:sp>
-        <p:nvSpPr>
-          <p:cNvPr id="21" name="Rounded Rectangle 20"/>
-          <p:cNvSpPr/>
-          <p:nvPr/>
-        </p:nvSpPr>
-        <p:spPr>
-          <a:xfrm>
-            <a:off x="502920" y="4434840"/>
-            <a:ext cx="11201400" cy="685800"/>
-          </a:xfrm>
-          <a:prstGeom prst="roundRect">
-            <a:avLst/>
-          </a:prstGeom>
-          <a:solidFill>
-            <a:srgbClr val="262C42"/>
-          </a:solidFill>
-          <a:ln>
-            <a:noFill/>
-          </a:ln>
-          <a:effectLst/>
-        </p:spPr>
-        <p:style>
-          <a:lnRef idx="1">
-            <a:schemeClr val="accent1"/>
-          </a:lnRef>
-          <a:fillRef idx="3">
-            <a:schemeClr val="accent1"/>
-          </a:fillRef>
-          <a:effectRef idx="2">
-            <a:schemeClr val="accent1"/>
-          </a:effectRef>
-          <a:fontRef idx="minor">
-            <a:schemeClr val="lt1"/>
-          </a:fontRef>
-        </p:style>
-        <p:txBody>
-          <a:bodyPr wrap="square" lIns="256032" tIns="18288" rIns="256032" bIns="18288" rtlCol="0" anchor="ctr"/>
-          <a:lstStyle/>
-          <a:p>
-            <a:pPr algn="l"/>
-            <a:r>
-              <a:rPr sz="1400" b="1">
-                <a:solidFill>
-                  <a:srgbClr val="F5A623"/>
-                </a:solidFill>
-                <a:latin typeface="微软雅黑"/>
-                <a:ea typeface="微软雅黑"/>
-              </a:rPr>
-              <a:t>结论　</a:t>
-            </a:r>
-            <a:r>
-              <a:rPr sz="1300" b="0">
-                <a:solidFill>
-                  <a:srgbClr val="EBEEF5"/>
-                </a:solidFill>
-                <a:latin typeface="微软雅黑"/>
-                <a:ea typeface="微软雅黑"/>
-              </a:rPr>
-              <a:t>开题承诺的必做项全部达成；选做完成 1 项，其余与动画、更多关卡一起列为后续方向</a:t>
-            </a:r>
-            <a:endParaRPr sz="1300" b="0">
-              <a:solidFill>
-                <a:srgbClr val="EBEEF5"/>
-              </a:solidFill>
-              <a:latin typeface="微软雅黑"/>
-              <a:ea typeface="微软雅黑"/>
-            </a:endParaRPr>
-          </a:p>
-        </p:txBody>
-      </p:sp>
-      <p:sp>
-        <p:nvSpPr>
-          <p:cNvPr id="22" name="TextBox 21"/>
+          </a:p>
+        </p:txBody>
+      </p:sp>
+      <p:sp>
+        <p:nvSpPr>
+          <p:cNvPr id="8" name="TextBox 7"/>
           <p:cNvSpPr txBox="1"/>
           <p:nvPr/>
         </p:nvSpPr>
         <p:spPr>
           <a:xfrm>
-            <a:off x="502920" y="5413248"/>
-            <a:ext cx="1005840" cy="365760"/>
+            <a:off x="6675120" y="1389888"/>
+            <a:ext cx="4754880" cy="365760"/>
           </a:xfrm>
           <a:prstGeom prst="rect">
             <a:avLst/>
@@ -6593,41 +7463,202 @@
               </a:spcAft>
             </a:pPr>
             <a:r>
+              <a:rPr sz="1500" b="1">
+                <a:solidFill>
+                  <a:srgbClr val="EBEEF5"/>
+                </a:solidFill>
+                <a:latin typeface="微软雅黑"/>
+                <a:ea typeface="微软雅黑"/>
+              </a:rPr>
+              <a:t>为什么不再信“我觉得”</a:t>
+            </a:r>
+            <a:endParaRPr sz="1500" b="1">
+              <a:solidFill>
+                <a:srgbClr val="EBEEF5"/>
+              </a:solidFill>
+              <a:latin typeface="微软雅黑"/>
+              <a:ea typeface="微软雅黑"/>
+            </a:endParaRPr>
+          </a:p>
+        </p:txBody>
+      </p:sp>
+      <p:sp>
+        <p:nvSpPr>
+          <p:cNvPr id="9" name="TextBox 8"/>
+          <p:cNvSpPr txBox="1"/>
+          <p:nvPr/>
+        </p:nvSpPr>
+        <p:spPr>
+          <a:xfrm>
+            <a:off x="6675120" y="1874519"/>
+            <a:ext cx="4846320" cy="502920"/>
+          </a:xfrm>
+          <a:prstGeom prst="rect">
+            <a:avLst/>
+          </a:prstGeom>
+          <a:noFill/>
+        </p:spPr>
+        <p:txBody>
+          <a:bodyPr wrap="square" lIns="0" tIns="0" rIns="0" bIns="0" anchor="t">
+            <a:spAutoFit/>
+          </a:bodyPr>
+          <a:lstStyle/>
+          <a:p>
+            <a:pPr algn="l">
+              <a:spcAft>
+                <a:spcPts val="600"/>
+              </a:spcAft>
+            </a:pPr>
+            <a:r>
               <a:rPr sz="1300" b="1">
                 <a:solidFill>
+                  <a:srgbClr val="F5A623"/>
+                </a:solidFill>
+                <a:latin typeface="微软雅黑"/>
+                <a:ea typeface="微软雅黑"/>
+              </a:rPr>
+              <a:t>解算器会算　</a:t>
+            </a:r>
+            <a:r>
+              <a:rPr lang="zh-CN" sz="1300" b="1">
+                <a:solidFill>
+                  <a:srgbClr val="F5A623"/>
+                </a:solidFill>
+                <a:latin typeface="微软雅黑"/>
+                <a:ea typeface="微软雅黑"/>
+              </a:rPr>
+              <a:t>有解 / 无解 + 最短步数，两关实测 5 步 / 37 步</a:t>
+            </a:r>
+            <a:endParaRPr sz="1300" b="0">
+              <a:solidFill>
+                <a:srgbClr val="EBEEF5"/>
+              </a:solidFill>
+              <a:latin typeface="微软雅黑"/>
+              <a:ea typeface="微软雅黑"/>
+            </a:endParaRPr>
+          </a:p>
+        </p:txBody>
+      </p:sp>
+      <p:sp>
+        <p:nvSpPr>
+          <p:cNvPr id="10" name="TextBox 9"/>
+          <p:cNvSpPr txBox="1"/>
+          <p:nvPr/>
+        </p:nvSpPr>
+        <p:spPr>
+          <a:xfrm>
+            <a:off x="6675120" y="2468880"/>
+            <a:ext cx="4846320" cy="685800"/>
+          </a:xfrm>
+          <a:prstGeom prst="rect">
+            <a:avLst/>
+          </a:prstGeom>
+          <a:noFill/>
+        </p:spPr>
+        <p:txBody>
+          <a:bodyPr wrap="square" lIns="0" tIns="0" rIns="0" bIns="0" anchor="t">
+            <a:spAutoFit/>
+          </a:bodyPr>
+          <a:lstStyle/>
+          <a:p>
+            <a:pPr algn="l">
+              <a:spcAft>
+                <a:spcPts val="600"/>
+              </a:spcAft>
+            </a:pPr>
+            <a:r>
+              <a:rPr sz="1300" b="1">
+                <a:solidFill>
+                  <a:srgbClr val="569CD6"/>
+                </a:solidFill>
+                <a:latin typeface="微软雅黑"/>
+                <a:ea typeface="微软雅黑"/>
+              </a:rPr>
+              <a:t>它还会挑错　</a:t>
+            </a:r>
+            <a:r>
+              <a:rPr sz="1300" b="0">
+                <a:solidFill>
                   <a:srgbClr val="EBEEF5"/>
                 </a:solidFill>
                 <a:latin typeface="微软雅黑"/>
                 <a:ea typeface="微软雅黑"/>
               </a:rPr>
-              <a:t>项目数据</a:t>
-            </a:r>
-            <a:endParaRPr sz="1300" b="1">
-              <a:solidFill>
-                <a:srgbClr val="EBEEF5"/>
-              </a:solidFill>
-              <a:latin typeface="微软雅黑"/>
-              <a:ea typeface="微软雅黑"/>
-            </a:endParaRPr>
-          </a:p>
-        </p:txBody>
-      </p:sp>
-      <p:sp>
-        <p:nvSpPr>
-          <p:cNvPr id="23" name="Rounded Rectangle 22"/>
+              <a:t>21 步“隧道解”说明吞食不是必经，暴露口的设计问题</a:t>
+            </a:r>
+            <a:endParaRPr sz="1300" b="0">
+              <a:solidFill>
+                <a:srgbClr val="EBEEF5"/>
+              </a:solidFill>
+              <a:latin typeface="微软雅黑"/>
+              <a:ea typeface="微软雅黑"/>
+            </a:endParaRPr>
+          </a:p>
+        </p:txBody>
+      </p:sp>
+      <p:sp>
+        <p:nvSpPr>
+          <p:cNvPr id="11" name="TextBox 10"/>
+          <p:cNvSpPr txBox="1"/>
+          <p:nvPr/>
+        </p:nvSpPr>
+        <p:spPr>
+          <a:xfrm>
+            <a:off x="6675120" y="3246120"/>
+            <a:ext cx="4754880" cy="182880"/>
+          </a:xfrm>
+          <a:prstGeom prst="rect">
+            <a:avLst/>
+          </a:prstGeom>
+          <a:noFill/>
+        </p:spPr>
+        <p:txBody>
+          <a:bodyPr wrap="square" lIns="0" tIns="0" rIns="0" bIns="0" anchor="t">
+            <a:spAutoFit/>
+          </a:bodyPr>
+          <a:lstStyle/>
+          <a:p>
+            <a:pPr algn="l">
+              <a:spcAft>
+                <a:spcPts val="600"/>
+              </a:spcAft>
+            </a:pPr>
+            <a:r>
+              <a:rPr sz="1200" b="1">
+                <a:solidFill>
+                  <a:srgbClr val="98A2B8"/>
+                </a:solidFill>
+                <a:latin typeface="微软雅黑"/>
+                <a:ea typeface="微软雅黑"/>
+              </a:rPr>
+              <a:t>关键词</a:t>
+            </a:r>
+            <a:endParaRPr sz="1200" b="1">
+              <a:solidFill>
+                <a:srgbClr val="98A2B8"/>
+              </a:solidFill>
+              <a:latin typeface="微软雅黑"/>
+              <a:ea typeface="微软雅黑"/>
+            </a:endParaRPr>
+          </a:p>
+        </p:txBody>
+      </p:sp>
+      <p:sp>
+        <p:nvSpPr>
+          <p:cNvPr id="12" name="Rounded Rectangle 11"/>
           <p:cNvSpPr/>
           <p:nvPr/>
         </p:nvSpPr>
         <p:spPr>
           <a:xfrm>
-            <a:off x="1600200" y="5349240"/>
-            <a:ext cx="2286000" cy="457200"/>
+            <a:off x="6675120" y="3611880"/>
+            <a:ext cx="1133856" cy="457200"/>
           </a:xfrm>
           <a:prstGeom prst="roundRect">
             <a:avLst/>
           </a:prstGeom>
           <a:solidFill>
-            <a:srgbClr val="1C2132"/>
+            <a:srgbClr val="262C42"/>
           </a:solidFill>
           <a:ln w="12700">
             <a:solidFill>
@@ -6656,41 +7687,41 @@
           <a:p>
             <a:pPr algn="ctr"/>
             <a:r>
-              <a:rPr sz="1150" b="0">
+              <a:rPr sz="1100" b="0">
                 <a:solidFill>
                   <a:srgbClr val="EBEEF5"/>
                 </a:solidFill>
                 <a:latin typeface="微软雅黑"/>
                 <a:ea typeface="微软雅黑"/>
               </a:rPr>
-              <a:t>7 个模块</a:t>
-            </a:r>
-            <a:endParaRPr sz="1150" b="0">
-              <a:solidFill>
-                <a:srgbClr val="EBEEF5"/>
-              </a:solidFill>
-              <a:latin typeface="微软雅黑"/>
-              <a:ea typeface="微软雅黑"/>
-            </a:endParaRPr>
-          </a:p>
-        </p:txBody>
-      </p:sp>
-      <p:sp>
-        <p:nvSpPr>
-          <p:cNvPr id="24" name="Rounded Rectangle 23"/>
+              <a:t>BFS</a:t>
+            </a:r>
+            <a:endParaRPr sz="1100" b="0">
+              <a:solidFill>
+                <a:srgbClr val="EBEEF5"/>
+              </a:solidFill>
+              <a:latin typeface="微软雅黑"/>
+              <a:ea typeface="微软雅黑"/>
+            </a:endParaRPr>
+          </a:p>
+        </p:txBody>
+      </p:sp>
+      <p:sp>
+        <p:nvSpPr>
+          <p:cNvPr id="13" name="Rounded Rectangle 12"/>
           <p:cNvSpPr/>
           <p:nvPr/>
         </p:nvSpPr>
         <p:spPr>
           <a:xfrm>
-            <a:off x="4069080" y="5349240"/>
-            <a:ext cx="2286000" cy="457200"/>
+            <a:off x="7918704" y="3611880"/>
+            <a:ext cx="1133856" cy="457200"/>
           </a:xfrm>
           <a:prstGeom prst="roundRect">
             <a:avLst/>
           </a:prstGeom>
           <a:solidFill>
-            <a:srgbClr val="1C2132"/>
+            <a:srgbClr val="262C42"/>
           </a:solidFill>
           <a:ln w="12700">
             <a:solidFill>
@@ -6719,41 +7750,41 @@
           <a:p>
             <a:pPr algn="ctr"/>
             <a:r>
-              <a:rPr sz="1150" b="0">
+              <a:rPr sz="1100" b="0">
                 <a:solidFill>
                   <a:srgbClr val="EBEEF5"/>
                 </a:solidFill>
                 <a:latin typeface="微软雅黑"/>
                 <a:ea typeface="微软雅黑"/>
               </a:rPr>
-              <a:t>1326 行源码</a:t>
-            </a:r>
-            <a:endParaRPr sz="1150" b="0">
-              <a:solidFill>
-                <a:srgbClr val="EBEEF5"/>
-              </a:solidFill>
-              <a:latin typeface="微软雅黑"/>
-              <a:ea typeface="微软雅黑"/>
-            </a:endParaRPr>
-          </a:p>
-        </p:txBody>
-      </p:sp>
-      <p:sp>
-        <p:nvSpPr>
-          <p:cNvPr id="25" name="Rounded Rectangle 24"/>
+              <a:t>状态去重</a:t>
+            </a:r>
+            <a:endParaRPr sz="1100" b="0">
+              <a:solidFill>
+                <a:srgbClr val="EBEEF5"/>
+              </a:solidFill>
+              <a:latin typeface="微软雅黑"/>
+              <a:ea typeface="微软雅黑"/>
+            </a:endParaRPr>
+          </a:p>
+        </p:txBody>
+      </p:sp>
+      <p:sp>
+        <p:nvSpPr>
+          <p:cNvPr id="14" name="Rounded Rectangle 13"/>
           <p:cNvSpPr/>
           <p:nvPr/>
         </p:nvSpPr>
         <p:spPr>
           <a:xfrm>
-            <a:off x="6537960" y="5349240"/>
-            <a:ext cx="2286000" cy="457200"/>
+            <a:off x="9162288" y="3611880"/>
+            <a:ext cx="1133856" cy="457200"/>
           </a:xfrm>
           <a:prstGeom prst="roundRect">
             <a:avLst/>
           </a:prstGeom>
           <a:solidFill>
-            <a:srgbClr val="1C2132"/>
+            <a:srgbClr val="262C42"/>
           </a:solidFill>
           <a:ln w="12700">
             <a:solidFill>
@@ -6782,41 +7813,41 @@
           <a:p>
             <a:pPr algn="ctr"/>
             <a:r>
-              <a:rPr sz="1150" b="0">
+              <a:rPr sz="1100" b="0">
                 <a:solidFill>
                   <a:srgbClr val="EBEEF5"/>
                 </a:solidFill>
                 <a:latin typeface="微软雅黑"/>
                 <a:ea typeface="微软雅黑"/>
               </a:rPr>
-              <a:t>108 个测试</a:t>
-            </a:r>
-            <a:endParaRPr sz="1150" b="0">
-              <a:solidFill>
-                <a:srgbClr val="EBEEF5"/>
-              </a:solidFill>
-              <a:latin typeface="微软雅黑"/>
-              <a:ea typeface="微软雅黑"/>
-            </a:endParaRPr>
-          </a:p>
-        </p:txBody>
-      </p:sp>
-      <p:sp>
-        <p:nvSpPr>
-          <p:cNvPr id="26" name="Rounded Rectangle 25"/>
+              <a:t>最短步数</a:t>
+            </a:r>
+            <a:endParaRPr sz="1100" b="0">
+              <a:solidFill>
+                <a:srgbClr val="EBEEF5"/>
+              </a:solidFill>
+              <a:latin typeface="微软雅黑"/>
+              <a:ea typeface="微软雅黑"/>
+            </a:endParaRPr>
+          </a:p>
+        </p:txBody>
+      </p:sp>
+      <p:sp>
+        <p:nvSpPr>
+          <p:cNvPr id="15" name="Rounded Rectangle 14"/>
           <p:cNvSpPr/>
           <p:nvPr/>
         </p:nvSpPr>
         <p:spPr>
           <a:xfrm>
-            <a:off x="9006840" y="5349240"/>
-            <a:ext cx="2286000" cy="457200"/>
+            <a:off x="10405872" y="3611880"/>
+            <a:ext cx="1133856" cy="457200"/>
           </a:xfrm>
           <a:prstGeom prst="roundRect">
             <a:avLst/>
           </a:prstGeom>
           <a:solidFill>
-            <a:srgbClr val="1C2132"/>
+            <a:srgbClr val="262C42"/>
           </a:solidFill>
           <a:ln w="12700">
             <a:solidFill>
@@ -6845,522 +7876,18 @@
           <a:p>
             <a:pPr algn="ctr"/>
             <a:r>
-              <a:rPr sz="1150" b="0">
+              <a:rPr lang="zh-CN" sz="1100" b="0">
                 <a:solidFill>
                   <a:srgbClr val="EBEEF5"/>
                 </a:solidFill>
                 <a:latin typeface="微软雅黑"/>
                 <a:ea typeface="微软雅黑"/>
               </a:rPr>
-              <a:t>2 个关卡</a:t>
-            </a:r>
-            <a:endParaRPr sz="1150" b="0">
-              <a:solidFill>
-                <a:srgbClr val="EBEEF5"/>
-              </a:solidFill>
-              <a:latin typeface="微软雅黑"/>
-              <a:ea typeface="微软雅黑"/>
-            </a:endParaRPr>
-          </a:p>
-        </p:txBody>
-      </p:sp>
-      <p:sp>
-        <p:nvSpPr>
-          <p:cNvPr id="9" name="Rectangle 8"/>
-          <p:cNvSpPr/>
-          <p:nvPr/>
-        </p:nvSpPr>
-        <p:spPr>
-          <a:xfrm>
-            <a:off x="502920" y="2578608"/>
-            <a:ext cx="2286000" cy="868680"/>
-          </a:xfrm>
-          <a:prstGeom prst="rect">
-            <a:avLst/>
-          </a:prstGeom>
-          <a:solidFill>
-            <a:srgbClr val="1C2132"/>
-          </a:solidFill>
-          <a:ln w="9525">
-            <a:solidFill>
-              <a:srgbClr val="3E465E"/>
-            </a:solidFill>
-          </a:ln>
-          <a:effectLst/>
-        </p:spPr>
-        <p:style>
-          <a:lnRef idx="1">
-            <a:schemeClr val="accent1"/>
-          </a:lnRef>
-          <a:fillRef idx="3">
-            <a:schemeClr val="accent1"/>
-          </a:fillRef>
-          <a:effectRef idx="2">
-            <a:schemeClr val="accent1"/>
-          </a:effectRef>
-          <a:fontRef idx="minor">
-            <a:schemeClr val="lt1"/>
-          </a:fontRef>
-        </p:style>
-        <p:txBody>
-          <a:bodyPr wrap="square" lIns="128016" tIns="18288" rIns="137160" bIns="18288" rtlCol="0" anchor="ctr"/>
-          <a:lstStyle/>
-          <a:p>
-            <a:pPr algn="l"/>
-            <a:r>
-              <a:rPr sz="1600" b="1">
-                <a:solidFill>
-                  <a:srgbClr val="EBEEF5"/>
-                </a:solidFill>
-                <a:latin typeface="微软雅黑"/>
-              </a:rPr>
-              <a:t>选做</a:t>
-            </a:r>
-            <a:endParaRPr sz="1300" b="1">
-              <a:solidFill>
-                <a:srgbClr val="EBEEF5"/>
-              </a:solidFill>
-              <a:latin typeface="微软雅黑"/>
-              <a:ea typeface="微软雅黑"/>
-            </a:endParaRPr>
-          </a:p>
-          <a:p>
-            <a:pPr algn="l"/>
-            <a:r>
-              <a:rPr sz="1050" b="0">
-                <a:solidFill>
-                  <a:srgbClr val="98A2B8"/>
-                </a:solidFill>
-                <a:latin typeface="微软雅黑"/>
-              </a:rPr>
-              <a:t>1 / 3</a:t>
+              <a:t>回归测试</a:t>
             </a:r>
             <a:endParaRPr sz="1100" b="0">
               <a:solidFill>
-                <a:srgbClr val="98A2B8"/>
-              </a:solidFill>
-              <a:latin typeface="微软雅黑"/>
-            </a:endParaRPr>
-          </a:p>
-        </p:txBody>
-      </p:sp>
-      <p:sp>
-        <p:nvSpPr>
-          <p:cNvPr id="10" name="Rectangle 9"/>
-          <p:cNvSpPr/>
-          <p:nvPr/>
-        </p:nvSpPr>
-        <p:spPr>
-          <a:xfrm>
-            <a:off x="2788920" y="2578608"/>
-            <a:ext cx="6263640" cy="868680"/>
-          </a:xfrm>
-          <a:prstGeom prst="rect">
-            <a:avLst/>
-          </a:prstGeom>
-          <a:solidFill>
-            <a:srgbClr val="1C2132"/>
-          </a:solidFill>
-          <a:ln w="9525">
-            <a:solidFill>
-              <a:srgbClr val="3E465E"/>
-            </a:solidFill>
-          </a:ln>
-          <a:effectLst/>
-        </p:spPr>
-        <p:style>
-          <a:lnRef idx="1">
-            <a:schemeClr val="accent1"/>
-          </a:lnRef>
-          <a:fillRef idx="3">
-            <a:schemeClr val="accent1"/>
-          </a:fillRef>
-          <a:effectRef idx="2">
-            <a:schemeClr val="accent1"/>
-          </a:effectRef>
-          <a:fontRef idx="minor">
-            <a:schemeClr val="lt1"/>
-          </a:fontRef>
-        </p:style>
-        <p:txBody>
-          <a:bodyPr wrap="square" lIns="137160" tIns="18288" rIns="137160" bIns="18288" rtlCol="0" anchor="ctr"/>
-          <a:lstStyle/>
-          <a:p>
-            <a:pPr algn="l">
-              <a:spcAft>
-                <a:spcPts val="500"/>
-              </a:spcAft>
-            </a:pPr>
-            <a:r>
-              <a:rPr sz="1100" b="0">
-                <a:solidFill>
-                  <a:srgbClr val="EBEEF5"/>
-                </a:solidFill>
-                <a:latin typeface="微软雅黑"/>
-              </a:rPr>
-              <a:t>▪ 撤销 / 重置 —— ✅ 提前完成</a:t>
-            </a:r>
-            <a:endParaRPr sz="1150" b="0">
-              <a:solidFill>
-                <a:srgbClr val="EBEEF5"/>
-              </a:solidFill>
-              <a:latin typeface="微软雅黑"/>
-              <a:ea typeface="微软雅黑"/>
-            </a:endParaRPr>
-          </a:p>
-          <a:p>
-            <a:pPr algn="l">
-              <a:spcAft>
-                <a:spcPts val="500"/>
-              </a:spcAft>
-            </a:pPr>
-            <a:r>
-              <a:rPr sz="1100" b="0">
-                <a:solidFill>
-                  <a:srgbClr val="EBEEF5"/>
-                </a:solidFill>
-                <a:latin typeface="微软雅黑"/>
-              </a:rPr>
-              <a:t>▪ 通关计时 —— 未做</a:t>
-            </a:r>
-            <a:endParaRPr sz="1150" b="0">
-              <a:solidFill>
-                <a:srgbClr val="EBEEF5"/>
-              </a:solidFill>
-              <a:latin typeface="微软雅黑"/>
-            </a:endParaRPr>
-          </a:p>
-          <a:p>
-            <a:pPr algn="l">
-              <a:spcAft>
-                <a:spcPts val="500"/>
-              </a:spcAft>
-            </a:pPr>
-            <a:r>
-              <a:rPr sz="1100" b="0">
-                <a:solidFill>
-                  <a:srgbClr val="EBEEF5"/>
-                </a:solidFill>
-                <a:latin typeface="微软雅黑"/>
-              </a:rPr>
-              <a:t>▪ 简单音效 —— 未做</a:t>
-            </a:r>
-            <a:endParaRPr sz="1150" b="0">
-              <a:solidFill>
-                <a:srgbClr val="EBEEF5"/>
-              </a:solidFill>
-              <a:latin typeface="微软雅黑"/>
-            </a:endParaRPr>
-          </a:p>
-        </p:txBody>
-      </p:sp>
-      <p:sp>
-        <p:nvSpPr>
-          <p:cNvPr id="11" name="Rectangle 10"/>
-          <p:cNvSpPr/>
-          <p:nvPr/>
-        </p:nvSpPr>
-        <p:spPr>
-          <a:xfrm>
-            <a:off x="9052560" y="2578608"/>
-            <a:ext cx="2651760" cy="868680"/>
-          </a:xfrm>
-          <a:prstGeom prst="rect">
-            <a:avLst/>
-          </a:prstGeom>
-          <a:solidFill>
-            <a:srgbClr val="1C2132"/>
-          </a:solidFill>
-          <a:ln w="9525">
-            <a:solidFill>
-              <a:srgbClr val="3E465E"/>
-            </a:solidFill>
-          </a:ln>
-          <a:effectLst/>
-        </p:spPr>
-        <p:style>
-          <a:lnRef idx="1">
-            <a:schemeClr val="accent1"/>
-          </a:lnRef>
-          <a:fillRef idx="3">
-            <a:schemeClr val="accent1"/>
-          </a:fillRef>
-          <a:effectRef idx="2">
-            <a:schemeClr val="accent1"/>
-          </a:effectRef>
-          <a:fontRef idx="minor">
-            <a:schemeClr val="lt1"/>
-          </a:fontRef>
-        </p:style>
-        <p:txBody>
-          <a:bodyPr wrap="square" lIns="73152" tIns="18288" rIns="73152" bIns="18288" rtlCol="0" anchor="ctr"/>
-          <a:lstStyle/>
-          <a:p>
-            <a:pPr algn="ctr"/>
-            <a:r>
-              <a:rPr sz="1400" b="1">
-                <a:solidFill>
-                  <a:srgbClr val="6CC77A"/>
-                </a:solidFill>
-                <a:latin typeface="微软雅黑"/>
-              </a:rPr>
-              <a:t>✅ 1 / 3</a:t>
-            </a:r>
-            <a:endParaRPr sz="1250" b="1">
-              <a:solidFill>
-                <a:srgbClr val="6CC77A"/>
-              </a:solidFill>
-              <a:latin typeface="微软雅黑"/>
-              <a:ea typeface="微软雅黑"/>
-            </a:endParaRPr>
-          </a:p>
-        </p:txBody>
-      </p:sp>
-      <p:sp>
-        <p:nvSpPr>
-          <p:cNvPr id="9" name="Rectangle 8"/>
-          <p:cNvSpPr/>
-          <p:nvPr/>
-        </p:nvSpPr>
-        <p:spPr>
-          <a:xfrm>
-            <a:off x="502920" y="3511296"/>
-            <a:ext cx="2286000" cy="868680"/>
-          </a:xfrm>
-          <a:prstGeom prst="rect">
-            <a:avLst/>
-          </a:prstGeom>
-          <a:solidFill>
-            <a:srgbClr val="1C2132"/>
-          </a:solidFill>
-          <a:ln w="9525">
-            <a:solidFill>
-              <a:srgbClr val="3E465E"/>
-            </a:solidFill>
-          </a:ln>
-          <a:effectLst/>
-        </p:spPr>
-        <p:style>
-          <a:lnRef idx="1">
-            <a:schemeClr val="accent1"/>
-          </a:lnRef>
-          <a:fillRef idx="3">
-            <a:schemeClr val="accent1"/>
-          </a:fillRef>
-          <a:effectRef idx="2">
-            <a:schemeClr val="accent1"/>
-          </a:effectRef>
-          <a:fontRef idx="minor">
-            <a:schemeClr val="lt1"/>
-          </a:fontRef>
-        </p:style>
-        <p:txBody>
-          <a:bodyPr wrap="square" lIns="128016" tIns="18288" rIns="137160" bIns="18288" rtlCol="0" anchor="ctr"/>
-          <a:lstStyle/>
-          <a:p>
-            <a:pPr algn="l"/>
-            <a:r>
-              <a:rPr sz="1600" b="1">
-                <a:solidFill>
-                  <a:srgbClr val="EBEEF5"/>
-                </a:solidFill>
-                <a:latin typeface="微软雅黑"/>
-              </a:rPr>
-              <a:t>超出开题预期</a:t>
-            </a:r>
-            <a:endParaRPr sz="1300" b="1">
-              <a:solidFill>
-                <a:srgbClr val="EBEEF5"/>
-              </a:solidFill>
-              <a:latin typeface="微软雅黑"/>
-              <a:ea typeface="微软雅黑"/>
-            </a:endParaRPr>
-          </a:p>
-          <a:p>
-            <a:pPr algn="l"/>
-            <a:r>
-              <a:rPr sz="1050" b="0">
-                <a:solidFill>
-                  <a:srgbClr val="98A2B8"/>
-                </a:solidFill>
-                <a:latin typeface="微软雅黑"/>
-              </a:rPr>
-              <a:t>6 项</a:t>
-            </a:r>
-            <a:endParaRPr sz="1100" b="0">
-              <a:solidFill>
-                <a:srgbClr val="98A2B8"/>
-              </a:solidFill>
-              <a:latin typeface="微软雅黑"/>
-            </a:endParaRPr>
-          </a:p>
-        </p:txBody>
-      </p:sp>
-      <p:sp>
-        <p:nvSpPr>
-          <p:cNvPr id="10" name="Rectangle 9"/>
-          <p:cNvSpPr/>
-          <p:nvPr/>
-        </p:nvSpPr>
-        <p:spPr>
-          <a:xfrm>
-            <a:off x="2788920" y="3511296"/>
-            <a:ext cx="6263640" cy="868680"/>
-          </a:xfrm>
-          <a:prstGeom prst="rect">
-            <a:avLst/>
-          </a:prstGeom>
-          <a:solidFill>
-            <a:srgbClr val="1C2132"/>
-          </a:solidFill>
-          <a:ln w="9525">
-            <a:solidFill>
-              <a:srgbClr val="3E465E"/>
-            </a:solidFill>
-          </a:ln>
-          <a:effectLst/>
-        </p:spPr>
-        <p:style>
-          <a:lnRef idx="1">
-            <a:schemeClr val="accent1"/>
-          </a:lnRef>
-          <a:fillRef idx="3">
-            <a:schemeClr val="accent1"/>
-          </a:fillRef>
-          <a:effectRef idx="2">
-            <a:schemeClr val="accent1"/>
-          </a:effectRef>
-          <a:fontRef idx="minor">
-            <a:schemeClr val="lt1"/>
-          </a:fontRef>
-        </p:style>
-        <p:txBody>
-          <a:bodyPr wrap="square" lIns="137160" tIns="18288" rIns="137160" bIns="18288" rtlCol="0" anchor="ctr"/>
-          <a:lstStyle/>
-          <a:p>
-            <a:pPr algn="l">
-              <a:spcAft>
-                <a:spcPts val="500"/>
-              </a:spcAft>
-            </a:pPr>
-            <a:r>
-              <a:rPr sz="1100" b="0">
-                <a:solidFill>
-                  <a:srgbClr val="EBEEF5"/>
-                </a:solidFill>
-                <a:latin typeface="微软雅黑"/>
-              </a:rPr>
-              <a:t>▪ 嵌套不限层数 + 自引用校验 / 双向穿口与吞食</a:t>
-            </a:r>
-            <a:endParaRPr sz="1150" b="0">
-              <a:solidFill>
-                <a:srgbClr val="EBEEF5"/>
-              </a:solidFill>
-              <a:latin typeface="微软雅黑"/>
-              <a:ea typeface="微软雅黑"/>
-            </a:endParaRPr>
-          </a:p>
-          <a:p>
-            <a:pPr algn="l">
-              <a:spcAft>
-                <a:spcPts val="500"/>
-              </a:spcAft>
-            </a:pPr>
-            <a:r>
-              <a:rPr sz="1100" b="0">
-                <a:solidFill>
-                  <a:srgbClr val="EBEEF5"/>
-                </a:solidFill>
-                <a:latin typeface="微软雅黑"/>
-              </a:rPr>
-              <a:t>▪ 双条件判定点（箱子 g + 玩家 G）</a:t>
-            </a:r>
-            <a:endParaRPr sz="1150" b="0">
-              <a:solidFill>
-                <a:srgbClr val="EBEEF5"/>
-              </a:solidFill>
-              <a:latin typeface="微软雅黑"/>
-            </a:endParaRPr>
-          </a:p>
-          <a:p>
-            <a:pPr algn="l">
-              <a:spcAft>
-                <a:spcPts val="500"/>
-              </a:spcAft>
-            </a:pPr>
-            <a:r>
-              <a:rPr sz="1100" b="0">
-                <a:solidFill>
-                  <a:srgbClr val="EBEEF5"/>
-                </a:solidFill>
-                <a:latin typeface="微软雅黑"/>
-              </a:rPr>
-              <a:t>▪ BFS 解算器 + 108 个自动化测试</a:t>
-            </a:r>
-            <a:endParaRPr sz="1150" b="0">
-              <a:solidFill>
-                <a:srgbClr val="EBEEF5"/>
-              </a:solidFill>
-              <a:latin typeface="微软雅黑"/>
-            </a:endParaRPr>
-          </a:p>
-        </p:txBody>
-      </p:sp>
-      <p:sp>
-        <p:nvSpPr>
-          <p:cNvPr id="11" name="Rectangle 10"/>
-          <p:cNvSpPr/>
-          <p:nvPr/>
-        </p:nvSpPr>
-        <p:spPr>
-          <a:xfrm>
-            <a:off x="9052560" y="3511296"/>
-            <a:ext cx="2651760" cy="868680"/>
-          </a:xfrm>
-          <a:prstGeom prst="rect">
-            <a:avLst/>
-          </a:prstGeom>
-          <a:solidFill>
-            <a:srgbClr val="1C2132"/>
-          </a:solidFill>
-          <a:ln w="9525">
-            <a:solidFill>
-              <a:srgbClr val="3E465E"/>
-            </a:solidFill>
-          </a:ln>
-          <a:effectLst/>
-        </p:spPr>
-        <p:style>
-          <a:lnRef idx="1">
-            <a:schemeClr val="accent1"/>
-          </a:lnRef>
-          <a:fillRef idx="3">
-            <a:schemeClr val="accent1"/>
-          </a:fillRef>
-          <a:effectRef idx="2">
-            <a:schemeClr val="accent1"/>
-          </a:effectRef>
-          <a:fontRef idx="minor">
-            <a:schemeClr val="lt1"/>
-          </a:fontRef>
-        </p:style>
-        <p:txBody>
-          <a:bodyPr wrap="square" lIns="73152" tIns="18288" rIns="73152" bIns="18288" rtlCol="0" anchor="ctr"/>
-          <a:lstStyle/>
-          <a:p>
-            <a:pPr algn="ctr"/>
-            <a:r>
-              <a:rPr sz="1400" b="1">
-                <a:solidFill>
-                  <a:srgbClr val="6CC77A"/>
-                </a:solidFill>
-                <a:latin typeface="微软雅黑"/>
-              </a:rPr>
-              <a:t>⭐ 加分</a:t>
-            </a:r>
-            <a:endParaRPr sz="1250" b="1">
-              <a:solidFill>
-                <a:srgbClr val="6CC77A"/>
+                <a:srgbClr val="EBEEF5"/>
               </a:solidFill>
               <a:latin typeface="微软雅黑"/>
               <a:ea typeface="微软雅黑"/>
@@ -7429,7 +7956,7 @@
                 <a:latin typeface="微软雅黑"/>
                 <a:ea typeface="微软雅黑"/>
               </a:rPr>
-              <a:t>人员分工</a:t>
+              <a:t>问题解决案例 ③ · 一个缺陷与一次流程事故</a:t>
             </a:r>
             <a:endParaRPr sz="2600" b="1">
               <a:solidFill>
@@ -7567,7 +8094,7 @@
                 <a:latin typeface="微软雅黑"/>
                 <a:ea typeface="微软雅黑"/>
               </a:rPr>
-              <a:t>9 / 10</a:t>
+              <a:t>9 / 13</a:t>
             </a:r>
             <a:endParaRPr sz="900" b="0">
               <a:solidFill>
@@ -7607,14 +8134,14 @@
               </a:spcAft>
             </a:pPr>
             <a:r>
-              <a:rPr sz="1600" b="1">
+              <a:rPr sz="1350" b="1">
                 <a:solidFill>
                   <a:srgbClr val="F5A623"/>
                 </a:solidFill>
                 <a:latin typeface="微软雅黑"/>
                 <a:ea typeface="微软雅黑"/>
               </a:rPr>
-              <a:t>单人项目：完成人 董长坤</a:t>
+              <a:t>缺陷：37 步的通关记成了 39 步</a:t>
             </a:r>
             <a:endParaRPr sz="1600" b="1">
               <a:solidFill>
@@ -7631,14 +8158,14 @@
               </a:spcAft>
             </a:pPr>
             <a:r>
-              <a:rPr sz="1300" b="0">
+              <a:rPr sz="1250" b="0">
                 <a:solidFill>
                   <a:srgbClr val="EBEEF5"/>
                 </a:solidFill>
                 <a:latin typeface="微软雅黑"/>
                 <a:ea typeface="微软雅黑"/>
               </a:rPr>
-              <a:t>▪  需求调研、机制设计、编码、测试、文档、演示全部独立完成</a:t>
+              <a:t>▪  回归测试断言 moves == 37 直接失败，失败信息把位置指了出来</a:t>
             </a:r>
             <a:endParaRPr sz="1300" b="0">
               <a:solidFill>
@@ -7655,14 +8182,14 @@
               </a:spcAft>
             </a:pPr>
             <a:r>
-              <a:rPr sz="1300" b="0">
+              <a:rPr sz="1250" b="0">
                 <a:solidFill>
                   <a:srgbClr val="EBEEF5"/>
                 </a:solidFill>
                 <a:latin typeface="微软雅黑"/>
                 <a:ea typeface="微软雅黑"/>
               </a:rPr>
-              <a:t>▪  两周内交付 2 个关卡 + 7 个模块 + 108 个测试 + 4 份机制文档</a:t>
+              <a:t>▪  根因：搬运 / 推出路径上 nested.py 与 logic.py 各加了一次步数</a:t>
             </a:r>
             <a:endParaRPr sz="1300" b="0">
               <a:solidFill>
@@ -7679,14 +8206,14 @@
               </a:spcAft>
             </a:pPr>
             <a:r>
-              <a:rPr sz="1300" b="0">
+              <a:rPr sz="1250" b="0">
                 <a:solidFill>
                   <a:srgbClr val="EBEEF5"/>
                 </a:solidFill>
                 <a:latin typeface="微软雅黑"/>
                 <a:ea typeface="微软雅黑"/>
               </a:rPr>
-              <a:t>▪  精力分配：机制与文档约 40%，实现约 35%，测试与验证约 25%</a:t>
+              <a:t>▪  修法：计数只由 logic.move() 的 _accepted() 负责，补对应用例</a:t>
             </a:r>
             <a:endParaRPr sz="1300" b="0">
               <a:solidFill>
@@ -7703,14 +8230,14 @@
               </a:spcAft>
             </a:pPr>
             <a:r>
-              <a:rPr sz="1600" b="1">
+              <a:rPr sz="1350" b="1">
                 <a:solidFill>
                   <a:srgbClr val="F5A623"/>
                 </a:solidFill>
                 <a:latin typeface="微软雅黑"/>
                 <a:ea typeface="微软雅黑"/>
               </a:rPr>
-              <a:t>AI 辅助的边界</a:t>
+              <a:t>事故：测试红了，提交却成功了</a:t>
             </a:r>
             <a:endParaRPr sz="1600" b="1">
               <a:solidFill>
@@ -7727,14 +8254,14 @@
               </a:spcAft>
             </a:pPr>
             <a:r>
-              <a:rPr sz="1300" b="0">
+              <a:rPr sz="1250" b="0">
                 <a:solidFill>
                   <a:srgbClr val="EBEEF5"/>
                 </a:solidFill>
                 <a:latin typeface="微软雅黑"/>
                 <a:ea typeface="微软雅黑"/>
               </a:rPr>
-              <a:t>▪  用法：代码生成、文档校对、解算器原型、关卡数据转换</a:t>
+              <a:t>▪  “改代码 → 跑测试 → 提交”串成一条命令，测试退出码被管道吞掉</a:t>
             </a:r>
             <a:endParaRPr sz="1300" b="0">
               <a:solidFill>
@@ -7751,14 +8278,14 @@
               </a:spcAft>
             </a:pPr>
             <a:r>
-              <a:rPr sz="1300" b="0">
+              <a:rPr sz="1250" b="0">
                 <a:solidFill>
                   <a:srgbClr val="EBEEF5"/>
                 </a:solidFill>
                 <a:latin typeface="微软雅黑"/>
                 <a:ea typeface="微软雅黑"/>
               </a:rPr>
-              <a:t>▪  边界：机制不得自行扩展（RULE.md §二），取舍与验收由本人负责</a:t>
+              <a:t>▪  结果提交了一个不一致的状态 → 立刻 git commit --amend 补正</a:t>
             </a:r>
             <a:endParaRPr sz="1300" b="0">
               <a:solidFill>
@@ -7775,14 +8302,14 @@
               </a:spcAft>
             </a:pPr>
             <a:r>
-              <a:rPr sz="1300" b="0">
+              <a:rPr sz="1250" b="0">
                 <a:solidFill>
                   <a:srgbClr val="EBEEF5"/>
                 </a:solidFill>
                 <a:latin typeface="微软雅黑"/>
                 <a:ea typeface="微软雅黑"/>
               </a:rPr>
-              <a:t>▪  所有改动都有测试与 git 记录，可追溯、可回退</a:t>
+              <a:t>▪  教训：验收与提交分开执行，退出码必须看（现在手动分步跑）</a:t>
             </a:r>
             <a:endParaRPr sz="1300" b="0">
               <a:solidFill>
@@ -7873,7 +8400,7 @@
                 <a:latin typeface="微软雅黑"/>
                 <a:ea typeface="微软雅黑"/>
               </a:rPr>
-              <a:t>怎么保证质量</a:t>
+              <a:t>沉淀下来的习惯</a:t>
             </a:r>
             <a:endParaRPr sz="1500" b="1">
               <a:solidFill>
@@ -7894,7 +8421,7 @@
         <p:spPr>
           <a:xfrm>
             <a:off x="6675120" y="1874519"/>
-            <a:ext cx="4846320" cy="200025"/>
+            <a:ext cx="4846320" cy="502920"/>
           </a:xfrm>
           <a:prstGeom prst="rect">
             <a:avLst/>
@@ -7920,7 +8447,7 @@
                 <a:latin typeface="微软雅黑"/>
                 <a:ea typeface="微软雅黑"/>
               </a:rPr>
-              <a:t>规则先行　</a:t>
+              <a:t>断言要具体　</a:t>
             </a:r>
             <a:r>
               <a:rPr lang="zh-CN" sz="1300" b="1">
@@ -7930,7 +8457,7 @@
                 <a:latin typeface="微软雅黑"/>
                 <a:ea typeface="微软雅黑"/>
               </a:rPr>
-              <a:t>机制先写进 SKILL.md，再写代码</a:t>
+              <a:t>写清步数与坐标，失败时能直接定位根因</a:t>
             </a:r>
             <a:endParaRPr sz="1300" b="0">
               <a:solidFill>
@@ -7950,8 +8477,8 @@
         </p:nvSpPr>
         <p:spPr>
           <a:xfrm>
-            <a:off x="6675120" y="2395728"/>
-            <a:ext cx="4846320" cy="411480"/>
+            <a:off x="6675120" y="2468880"/>
+            <a:ext cx="4846320" cy="685800"/>
           </a:xfrm>
           <a:prstGeom prst="rect">
             <a:avLst/>
@@ -7977,7 +8504,7 @@
                 <a:latin typeface="微软雅黑"/>
                 <a:ea typeface="微软雅黑"/>
               </a:rPr>
-              <a:t>测试兜底　</a:t>
+              <a:t>流水线要有断点　</a:t>
             </a:r>
             <a:r>
               <a:rPr sz="1300" b="0">
@@ -7987,7 +8514,7 @@
                 <a:latin typeface="微软雅黑"/>
                 <a:ea typeface="微软雅黑"/>
               </a:rPr>
-              <a:t>改完必跑测试；文档与实现由测试校验</a:t>
+              <a:t>跑测试和提交分开，退出码为 0 才算过</a:t>
             </a:r>
             <a:endParaRPr sz="1300" b="0">
               <a:solidFill>
@@ -8007,8 +8534,8 @@
         </p:nvSpPr>
         <p:spPr>
           <a:xfrm>
-            <a:off x="6675120" y="2926080"/>
-            <a:ext cx="4754880" cy="184150"/>
+            <a:off x="6675120" y="3246120"/>
+            <a:ext cx="4754880" cy="182880"/>
           </a:xfrm>
           <a:prstGeom prst="rect">
             <a:avLst/>
@@ -8054,7 +8581,7 @@
         </p:nvSpPr>
         <p:spPr>
           <a:xfrm>
-            <a:off x="6675120" y="3310128"/>
+            <a:off x="6675120" y="3611880"/>
             <a:ext cx="1133856" cy="457200"/>
           </a:xfrm>
           <a:prstGeom prst="roundRect">
@@ -8097,7 +8624,7 @@
                 <a:latin typeface="微软雅黑"/>
                 <a:ea typeface="微软雅黑"/>
               </a:rPr>
-              <a:t>独立完成</a:t>
+              <a:t>回归用例</a:t>
             </a:r>
             <a:endParaRPr sz="1100" b="0">
               <a:solidFill>
@@ -8117,7 +8644,7 @@
         </p:nvSpPr>
         <p:spPr>
           <a:xfrm>
-            <a:off x="7918704" y="3310128"/>
+            <a:off x="7918704" y="3611880"/>
             <a:ext cx="1133856" cy="457200"/>
           </a:xfrm>
           <a:prstGeom prst="roundRect">
@@ -8160,7 +8687,7 @@
                 <a:latin typeface="微软雅黑"/>
                 <a:ea typeface="微软雅黑"/>
               </a:rPr>
-              <a:t>AI 辅助</a:t>
+              <a:t>退出码</a:t>
             </a:r>
             <a:endParaRPr sz="1100" b="0">
               <a:solidFill>
@@ -8180,7 +8707,7 @@
         </p:nvSpPr>
         <p:spPr>
           <a:xfrm>
-            <a:off x="9162288" y="3310128"/>
+            <a:off x="9162288" y="3611880"/>
             <a:ext cx="1133856" cy="457200"/>
           </a:xfrm>
           <a:prstGeom prst="roundRect">
@@ -8223,7 +8750,7 @@
                 <a:latin typeface="微软雅黑"/>
                 <a:ea typeface="微软雅黑"/>
               </a:rPr>
-              <a:t>人工验收</a:t>
+              <a:t>小步提交</a:t>
             </a:r>
             <a:endParaRPr sz="1100" b="0">
               <a:solidFill>
@@ -8243,7 +8770,7 @@
         </p:nvSpPr>
         <p:spPr>
           <a:xfrm>
-            <a:off x="10405872" y="3310128"/>
+            <a:off x="10405872" y="3611880"/>
             <a:ext cx="1133856" cy="457200"/>
           </a:xfrm>
           <a:prstGeom prst="roundRect">
@@ -8286,7 +8813,7 @@
                 <a:latin typeface="微软雅黑"/>
                 <a:ea typeface="微软雅黑"/>
               </a:rPr>
-              <a:t>可追溯</a:t>
+              <a:t>amend 修正</a:t>
             </a:r>
             <a:endParaRPr sz="1100" b="0">
               <a:solidFill>
@@ -8359,7 +8886,7 @@
                 <a:latin typeface="微软雅黑"/>
                 <a:ea typeface="微软雅黑"/>
               </a:rPr>
-              <a:t>演示环节与总结</a:t>
+              <a:t>关键算法 · 一次按键的完整判定</a:t>
             </a:r>
             <a:endParaRPr sz="2600" b="1">
               <a:solidFill>
@@ -8497,226 +9024,11 @@
                 <a:latin typeface="微软雅黑"/>
                 <a:ea typeface="微软雅黑"/>
               </a:rPr>
-              <a:t>10 / 10</a:t>
+              <a:t>10 / 13</a:t>
             </a:r>
             <a:endParaRPr sz="900" b="0">
               <a:solidFill>
                 <a:srgbClr val="98A2B8"/>
-              </a:solidFill>
-              <a:latin typeface="微软雅黑"/>
-              <a:ea typeface="微软雅黑"/>
-            </a:endParaRPr>
-          </a:p>
-        </p:txBody>
-      </p:sp>
-      <p:sp>
-        <p:nvSpPr>
-          <p:cNvPr id="6" name="TextBox 5"/>
-          <p:cNvSpPr txBox="1"/>
-          <p:nvPr/>
-        </p:nvSpPr>
-        <p:spPr>
-          <a:xfrm>
-            <a:off x="502920" y="1234440"/>
-            <a:ext cx="5577840" cy="2590165"/>
-          </a:xfrm>
-          <a:prstGeom prst="rect">
-            <a:avLst/>
-          </a:prstGeom>
-          <a:noFill/>
-        </p:spPr>
-        <p:txBody>
-          <a:bodyPr wrap="square" lIns="0" tIns="0" rIns="0" bIns="0" anchor="t">
-            <a:spAutoFit/>
-          </a:bodyPr>
-          <a:lstStyle/>
-          <a:p>
-            <a:pPr algn="l">
-              <a:spcAft>
-                <a:spcPts val="1000"/>
-              </a:spcAft>
-            </a:pPr>
-            <a:r>
-              <a:rPr sz="1600" b="1">
-                <a:solidFill>
-                  <a:srgbClr val="F5A623"/>
-                </a:solidFill>
-                <a:latin typeface="微软雅黑"/>
-                <a:ea typeface="微软雅黑"/>
-              </a:rPr>
-              <a:t>现场演示</a:t>
-            </a:r>
-            <a:endParaRPr sz="1600" b="1">
-              <a:solidFill>
-                <a:srgbClr val="F5A623"/>
-              </a:solidFill>
-              <a:latin typeface="微软雅黑"/>
-              <a:ea typeface="微软雅黑"/>
-            </a:endParaRPr>
-          </a:p>
-          <a:p>
-            <a:pPr algn="l">
-              <a:spcAft>
-                <a:spcPts val="1000"/>
-              </a:spcAft>
-            </a:pPr>
-            <a:r>
-              <a:rPr sz="1300" b="0">
-                <a:solidFill>
-                  <a:srgbClr val="EBEEF5"/>
-                </a:solidFill>
-                <a:latin typeface="微软雅黑"/>
-                <a:ea typeface="微软雅黑"/>
-              </a:rPr>
-              <a:t>▪  启动：python main.py → 选关界面（两关）</a:t>
-            </a:r>
-            <a:endParaRPr sz="1300" b="0">
-              <a:solidFill>
-                <a:srgbClr val="EBEEF5"/>
-              </a:solidFill>
-              <a:latin typeface="微软雅黑"/>
-              <a:ea typeface="微软雅黑"/>
-            </a:endParaRPr>
-          </a:p>
-          <a:p>
-            <a:pPr algn="l">
-              <a:spcAft>
-                <a:spcPts val="1000"/>
-              </a:spcAft>
-            </a:pPr>
-            <a:r>
-              <a:rPr sz="1300" b="0">
-                <a:solidFill>
-                  <a:srgbClr val="EBEEF5"/>
-                </a:solidFill>
-                <a:latin typeface="微软雅黑"/>
-                <a:ea typeface="微软雅黑"/>
-              </a:rPr>
-              <a:t>▪  「测试」5 步：推箱 → 从口钻进箱子 → 在内层推箱通关</a:t>
-            </a:r>
-            <a:endParaRPr sz="1300" b="0">
-              <a:solidFill>
-                <a:srgbClr val="EBEEF5"/>
-              </a:solidFill>
-              <a:latin typeface="微软雅黑"/>
-              <a:ea typeface="微软雅黑"/>
-            </a:endParaRPr>
-          </a:p>
-          <a:p>
-            <a:pPr algn="l">
-              <a:spcAft>
-                <a:spcPts val="1000"/>
-              </a:spcAft>
-            </a:pPr>
-            <a:r>
-              <a:rPr sz="1300" b="0">
-                <a:solidFill>
-                  <a:srgbClr val="EBEEF5"/>
-                </a:solidFill>
-                <a:latin typeface="微软雅黑"/>
-                <a:ea typeface="微软雅黑"/>
-              </a:rPr>
-              <a:t>▪  「吞食01」37 步：把箱子推进 A 的口，再进 A 把它推出来</a:t>
-            </a:r>
-            <a:endParaRPr sz="1300" b="0">
-              <a:solidFill>
-                <a:srgbClr val="EBEEF5"/>
-              </a:solidFill>
-              <a:latin typeface="微软雅黑"/>
-              <a:ea typeface="微软雅黑"/>
-            </a:endParaRPr>
-          </a:p>
-          <a:p>
-            <a:pPr algn="l">
-              <a:spcAft>
-                <a:spcPts val="1000"/>
-              </a:spcAft>
-            </a:pPr>
-            <a:r>
-              <a:rPr sz="1600" b="1">
-                <a:solidFill>
-                  <a:srgbClr val="F5A623"/>
-                </a:solidFill>
-                <a:latin typeface="微软雅黑"/>
-                <a:ea typeface="微软雅黑"/>
-              </a:rPr>
-              <a:t>看点</a:t>
-            </a:r>
-            <a:endParaRPr sz="1600" b="1">
-              <a:solidFill>
-                <a:srgbClr val="F5A623"/>
-              </a:solidFill>
-              <a:latin typeface="微软雅黑"/>
-              <a:ea typeface="微软雅黑"/>
-            </a:endParaRPr>
-          </a:p>
-          <a:p>
-            <a:pPr algn="l">
-              <a:spcAft>
-                <a:spcPts val="1000"/>
-              </a:spcAft>
-            </a:pPr>
-            <a:r>
-              <a:rPr sz="1300" b="0">
-                <a:solidFill>
-                  <a:srgbClr val="EBEEF5"/>
-                </a:solidFill>
-                <a:latin typeface="微软雅黑"/>
-                <a:ea typeface="微软雅黑"/>
-              </a:rPr>
-              <a:t>▪  进箱子后整片地面变深黄，一眼知道自己在哪一层</a:t>
-            </a:r>
-            <a:endParaRPr sz="1300" b="0">
-              <a:solidFill>
-                <a:srgbClr val="EBEEF5"/>
-              </a:solidFill>
-              <a:latin typeface="微软雅黑"/>
-              <a:ea typeface="微软雅黑"/>
-            </a:endParaRPr>
-          </a:p>
-          <a:p>
-            <a:pPr algn="l">
-              <a:spcAft>
-                <a:spcPts val="1000"/>
-              </a:spcAft>
-            </a:pPr>
-            <a:r>
-              <a:rPr sz="1300" b="0">
-                <a:solidFill>
-                  <a:srgbClr val="EBEEF5"/>
-                </a:solidFill>
-                <a:latin typeface="微软雅黑"/>
-                <a:ea typeface="微软雅黑"/>
-              </a:rPr>
-              <a:t>▪  方块压在判定点上描边发亮；玩家站上 G 时外圈亮环</a:t>
-            </a:r>
-            <a:endParaRPr sz="1300" b="0">
-              <a:solidFill>
-                <a:srgbClr val="EBEEF5"/>
-              </a:solidFill>
-              <a:latin typeface="微软雅黑"/>
-              <a:ea typeface="微软雅黑"/>
-            </a:endParaRPr>
-          </a:p>
-          <a:p>
-            <a:pPr algn="l">
-              <a:spcAft>
-                <a:spcPts val="1000"/>
-              </a:spcAft>
-            </a:pPr>
-            <a:r>
-              <a:rPr sz="1300" b="0">
-                <a:solidFill>
-                  <a:srgbClr val="EBEEF5"/>
-                </a:solidFill>
-                <a:latin typeface="微软雅黑"/>
-                <a:ea typeface="微软雅黑"/>
-              </a:rPr>
-              <a:t>▪  若现场不便演示，播放 3 分钟录屏视频</a:t>
-            </a:r>
-            <a:endParaRPr sz="1300" b="0">
-              <a:solidFill>
-                <a:srgbClr val="EBEEF5"/>
               </a:solidFill>
               <a:latin typeface="微软雅黑"/>
               <a:ea typeface="微软雅黑"/>
@@ -8732,8 +9044,8 @@
         </p:nvSpPr>
         <p:spPr>
           <a:xfrm>
-            <a:off x="6446520" y="1234440"/>
-            <a:ext cx="5257800" cy="3337560"/>
+            <a:off x="8522208" y="1225296"/>
+            <a:ext cx="3182112" cy="3017520"/>
           </a:xfrm>
           <a:prstGeom prst="rect">
             <a:avLst/>
@@ -8776,8 +9088,8 @@
         </p:nvSpPr>
         <p:spPr>
           <a:xfrm>
-            <a:off x="6675120" y="1389888"/>
-            <a:ext cx="4754880" cy="365760"/>
+            <a:off x="8686800" y="1335024"/>
+            <a:ext cx="2834640" cy="365760"/>
           </a:xfrm>
           <a:prstGeom prst="rect">
             <a:avLst/>
@@ -8803,7 +9115,7 @@
                 <a:latin typeface="微软雅黑"/>
                 <a:ea typeface="微软雅黑"/>
               </a:rPr>
-              <a:t>已知限制与后续</a:t>
+              <a:t>分支顺序 = 规则优先级</a:t>
             </a:r>
             <a:endParaRPr sz="1500" b="1">
               <a:solidFill>
@@ -8823,8 +9135,8 @@
         </p:nvSpPr>
         <p:spPr>
           <a:xfrm>
-            <a:off x="6675120" y="1874519"/>
-            <a:ext cx="4846320" cy="200025"/>
+            <a:off x="8686800" y="1783080"/>
+            <a:ext cx="2852928" cy="777240"/>
           </a:xfrm>
           <a:prstGeom prst="rect">
             <a:avLst/>
@@ -8850,7 +9162,7 @@
                 <a:latin typeface="微软雅黑"/>
                 <a:ea typeface="微软雅黑"/>
               </a:rPr>
-              <a:t>暂未实现　</a:t>
+              <a:t>先判口　</a:t>
             </a:r>
             <a:r>
               <a:rPr lang="zh-CN" sz="1300" b="1">
@@ -8860,7 +9172,7 @@
                 <a:latin typeface="微软雅黑"/>
                 <a:ea typeface="微软雅黑"/>
               </a:rPr>
-              <a:t>音效、通关计时、死局提示</a:t>
+              <a:t>站在口格朝外走 = 退出内层</a:t>
             </a:r>
             <a:endParaRPr sz="1300" b="0">
               <a:solidFill>
@@ -8880,8 +9192,8 @@
         </p:nvSpPr>
         <p:spPr>
           <a:xfrm>
-            <a:off x="6675120" y="2395728"/>
-            <a:ext cx="4846320" cy="411480"/>
+            <a:off x="8686800" y="2606040"/>
+            <a:ext cx="2852928" cy="777240"/>
           </a:xfrm>
           <a:prstGeom prst="rect">
             <a:avLst/>
@@ -8907,7 +9219,7 @@
                 <a:latin typeface="微软雅黑"/>
                 <a:ea typeface="微软雅黑"/>
               </a:rPr>
-              <a:t>后续方向　</a:t>
+              <a:t>再判碰撞　</a:t>
             </a:r>
             <a:r>
               <a:rPr sz="1300" b="0">
@@ -8917,7 +9229,7 @@
                 <a:latin typeface="微软雅黑"/>
                 <a:ea typeface="微软雅黑"/>
               </a:rPr>
-              <a:t>解算器工具化、动画补间、更多关卡</a:t>
+              <a:t>墙 → 不动；空格 → 走一格</a:t>
             </a:r>
             <a:endParaRPr sz="1300" b="0">
               <a:solidFill>
@@ -8937,8 +9249,8 @@
         </p:nvSpPr>
         <p:spPr>
           <a:xfrm>
-            <a:off x="6675120" y="2926080"/>
-            <a:ext cx="4754880" cy="184150"/>
+            <a:off x="8686800" y="3310128"/>
+            <a:ext cx="2834640" cy="274320"/>
           </a:xfrm>
           <a:prstGeom prst="rect">
             <a:avLst/>
@@ -8964,7 +9276,7 @@
                 <a:latin typeface="微软雅黑"/>
                 <a:ea typeface="微软雅黑"/>
               </a:rPr>
-              <a:t>关键词</a:t>
+              <a:t>被拒绝的操作</a:t>
             </a:r>
             <a:endParaRPr sz="1200" b="1">
               <a:solidFill>
@@ -8984,8 +9296,8 @@
         </p:nvSpPr>
         <p:spPr>
           <a:xfrm>
-            <a:off x="6675120" y="3310128"/>
-            <a:ext cx="1133856" cy="457200"/>
+            <a:off x="8686800" y="3611880"/>
+            <a:ext cx="1170432" cy="411480"/>
           </a:xfrm>
           <a:prstGeom prst="roundRect">
             <a:avLst/>
@@ -9027,7 +9339,7 @@
                 <a:latin typeface="微软雅黑"/>
                 <a:ea typeface="微软雅黑"/>
               </a:rPr>
-              <a:t>现场演示</a:t>
+              <a:t>不记步数</a:t>
             </a:r>
             <a:endParaRPr sz="1100" b="0">
               <a:solidFill>
@@ -9047,8 +9359,8 @@
         </p:nvSpPr>
         <p:spPr>
           <a:xfrm>
-            <a:off x="7918704" y="3310128"/>
-            <a:ext cx="1133856" cy="457200"/>
+            <a:off x="9966960" y="3611880"/>
+            <a:ext cx="1170432" cy="411480"/>
           </a:xfrm>
           <a:prstGeom prst="roundRect">
             <a:avLst/>
@@ -9090,7 +9402,7 @@
                 <a:latin typeface="微软雅黑"/>
                 <a:ea typeface="微软雅黑"/>
               </a:rPr>
-              <a:t>录屏备份</a:t>
+              <a:t>不进撤销</a:t>
             </a:r>
             <a:endParaRPr sz="1100" b="0">
               <a:solidFill>
@@ -9110,8 +9422,8 @@
         </p:nvSpPr>
         <p:spPr>
           <a:xfrm>
-            <a:off x="9162288" y="3310128"/>
-            <a:ext cx="1133856" cy="457200"/>
+            <a:off x="8686800" y="4087368"/>
+            <a:ext cx="1170432" cy="411480"/>
           </a:xfrm>
           <a:prstGeom prst="roundRect">
             <a:avLst/>
@@ -9153,7 +9465,7 @@
                 <a:latin typeface="微软雅黑"/>
                 <a:ea typeface="微软雅黑"/>
               </a:rPr>
-              <a:t>纯色美术</a:t>
+              <a:t>状态不变</a:t>
             </a:r>
             <a:endParaRPr sz="1100" b="0">
               <a:solidFill>
@@ -9173,8 +9485,8 @@
         </p:nvSpPr>
         <p:spPr>
           <a:xfrm>
-            <a:off x="10405872" y="3310128"/>
-            <a:ext cx="1133856" cy="457200"/>
+            <a:off x="9966960" y="4087368"/>
+            <a:ext cx="1170432" cy="411480"/>
           </a:xfrm>
           <a:prstGeom prst="roundRect">
             <a:avLst/>
@@ -9216,7 +9528,3584 @@
                 <a:latin typeface="微软雅黑"/>
                 <a:ea typeface="微软雅黑"/>
               </a:rPr>
-              <a:t>可扩展</a:t>
+              <a:t>可重试</a:t>
+            </a:r>
+            <a:endParaRPr sz="1100" b="0">
+              <a:solidFill>
+                <a:srgbClr val="EBEEF5"/>
+              </a:solidFill>
+              <a:latin typeface="微软雅黑"/>
+              <a:ea typeface="微软雅黑"/>
+            </a:endParaRPr>
+          </a:p>
+        </p:txBody>
+      </p:sp>
+      <p:sp>
+        <p:nvSpPr>
+          <p:cNvPr id="11" name="TextBox 10"/>
+          <p:cNvSpPr txBox="1"/>
+          <p:nvPr/>
+        </p:nvSpPr>
+        <p:spPr>
+          <a:xfrm>
+            <a:off x="8686800" y="4846320"/>
+            <a:ext cx="2880360" cy="1078992"/>
+          </a:xfrm>
+          <a:prstGeom prst="rect">
+            <a:avLst/>
+          </a:prstGeom>
+          <a:noFill/>
+        </p:spPr>
+        <p:txBody>
+          <a:bodyPr wrap="square" lIns="0" tIns="0" rIns="0" bIns="0" anchor="t">
+            <a:spAutoFit/>
+          </a:bodyPr>
+          <a:lstStyle/>
+          <a:p>
+            <a:pPr algn="l">
+              <a:spcAft>
+                <a:spcPts val="600"/>
+              </a:spcAft>
+            </a:pPr>
+            <a:r>
+              <a:rPr sz="1150" b="1">
+                <a:solidFill>
+                  <a:srgbClr val="F5A623"/>
+                </a:solidFill>
+                <a:latin typeface="微软雅黑"/>
+                <a:ea typeface="微软雅黑"/>
+              </a:rPr>
+              <a:t>六条分支全部有单元测试覆盖</a:t>
+            </a:r>
+            <a:endParaRPr sz="1200" b="1">
+              <a:solidFill>
+                <a:srgbClr val="98A2B8"/>
+              </a:solidFill>
+              <a:latin typeface="微软雅黑"/>
+              <a:ea typeface="微软雅黑"/>
+            </a:endParaRPr>
+          </a:p>
+          <a:p>
+            <a:pPr algn="l">
+              <a:spcAft>
+                <a:spcPts val="600"/>
+              </a:spcAft>
+            </a:pPr>
+            <a:r>
+              <a:rPr sz="1100" b="1">
+                <a:solidFill>
+                  <a:srgbClr val="98A2B8"/>
+                </a:solidFill>
+                <a:latin typeface="微软雅黑"/>
+                <a:ea typeface="微软雅黑"/>
+              </a:rPr>
+              <a:t>① 退出内层 ② 撞墙 ③ 走一格</a:t>
+            </a:r>
+            <a:endParaRPr sz="1200" b="1">
+              <a:solidFill>
+                <a:srgbClr val="98A2B8"/>
+              </a:solidFill>
+              <a:latin typeface="微软雅黑"/>
+              <a:ea typeface="微软雅黑"/>
+            </a:endParaRPr>
+          </a:p>
+          <a:p>
+            <a:pPr algn="l">
+              <a:spcAft>
+                <a:spcPts val="600"/>
+              </a:spcAft>
+            </a:pPr>
+            <a:r>
+              <a:rPr sz="1100" b="1">
+                <a:solidFill>
+                  <a:srgbClr val="98A2B8"/>
+                </a:solidFill>
+                <a:latin typeface="微软雅黑"/>
+                <a:ea typeface="微软雅黑"/>
+              </a:rPr>
+              <a:t>④ 整链前进 ⑤ 吸入 ⑥ 进入箱子</a:t>
+            </a:r>
+            <a:endParaRPr sz="1200" b="1">
+              <a:solidFill>
+                <a:srgbClr val="98A2B8"/>
+              </a:solidFill>
+              <a:latin typeface="微软雅黑"/>
+              <a:ea typeface="微软雅黑"/>
+            </a:endParaRPr>
+          </a:p>
+          <a:p>
+            <a:pPr algn="l">
+              <a:spcAft>
+                <a:spcPts val="600"/>
+              </a:spcAft>
+            </a:pPr>
+            <a:r>
+              <a:rPr sz="1100" b="1">
+                <a:solidFill>
+                  <a:srgbClr val="98A2B8"/>
+                </a:solidFill>
+                <a:latin typeface="微软雅黑"/>
+                <a:ea typeface="微软雅黑"/>
+              </a:rPr>
+              <a:t>⑦ 否则状态不变（操作被拒绝）</a:t>
+            </a:r>
+            <a:endParaRPr sz="1200" b="1">
+              <a:solidFill>
+                <a:srgbClr val="98A2B8"/>
+              </a:solidFill>
+              <a:latin typeface="微软雅黑"/>
+              <a:ea typeface="微软雅黑"/>
+            </a:endParaRPr>
+          </a:p>
+        </p:txBody>
+      </p:sp>
+      <p:pic>
+        <p:nvPicPr>
+          <p:cNvPr id="16" name="Picture 15" descr="flow_move.png"/>
+          <p:cNvPicPr>
+            <a:picLocks noChangeAspect="1"/>
+          </p:cNvPicPr>
+          <p:nvPr/>
+        </p:nvPicPr>
+        <p:blipFill>
+          <a:blip r:embed="rId2"/>
+          <a:stretch>
+            <a:fillRect/>
+          </a:stretch>
+        </p:blipFill>
+        <p:spPr>
+          <a:xfrm>
+            <a:off x="384048" y="1188720"/>
+            <a:ext cx="7882127" cy="4926329"/>
+          </a:xfrm>
+          <a:prstGeom prst="rect">
+            <a:avLst/>
+          </a:prstGeom>
+        </p:spPr>
+      </p:pic>
+    </p:spTree>
+  </p:cSld>
+  <p:clrMapOvr>
+    <a:masterClrMapping/>
+  </p:clrMapOvr>
+</p:sld>
+</file>
+
+<file path=ppt/slides/slide16.xml><?xml version="1.0" encoding="utf-8"?>
+<p:sld xmlns:a="http://schemas.openxmlformats.org/drawingml/2006/main" xmlns:p="http://schemas.openxmlformats.org/presentationml/2006/main" xmlns:r="http://schemas.openxmlformats.org/officeDocument/2006/relationships">
+  <p:cSld>
+    <p:bg>
+      <p:bgPr>
+        <a:solidFill>
+          <a:srgbClr val="111420"/>
+        </a:solidFill>
+        <a:effectLst/>
+      </p:bgPr>
+    </p:bg>
+    <p:spTree>
+      <p:nvGrpSpPr>
+        <p:cNvPr id="1" name=""/>
+        <p:cNvGrpSpPr/>
+        <p:nvPr/>
+      </p:nvGrpSpPr>
+      <p:grpSpPr/>
+      <p:sp>
+        <p:nvSpPr>
+          <p:cNvPr id="2" name="TextBox 1"/>
+          <p:cNvSpPr txBox="1"/>
+          <p:nvPr/>
+        </p:nvSpPr>
+        <p:spPr>
+          <a:xfrm>
+            <a:off x="502920" y="292608"/>
+            <a:ext cx="10058400" cy="640080"/>
+          </a:xfrm>
+          <a:prstGeom prst="rect">
+            <a:avLst/>
+          </a:prstGeom>
+          <a:noFill/>
+        </p:spPr>
+        <p:txBody>
+          <a:bodyPr wrap="square" lIns="0" tIns="0" rIns="0" bIns="0" anchor="t">
+            <a:spAutoFit/>
+          </a:bodyPr>
+          <a:lstStyle/>
+          <a:p>
+            <a:pPr algn="l">
+              <a:spcAft>
+                <a:spcPts val="600"/>
+              </a:spcAft>
+            </a:pPr>
+            <a:r>
+              <a:rPr sz="2600" b="1">
+                <a:solidFill>
+                  <a:srgbClr val="EBEEF5"/>
+                </a:solidFill>
+                <a:latin typeface="微软雅黑"/>
+                <a:ea typeface="微软雅黑"/>
+              </a:rPr>
+              <a:t>AI 产出的验收体系</a:t>
+            </a:r>
+            <a:endParaRPr sz="2600" b="1">
+              <a:solidFill>
+                <a:srgbClr val="EBEEF5"/>
+              </a:solidFill>
+              <a:latin typeface="微软雅黑"/>
+              <a:ea typeface="微软雅黑"/>
+            </a:endParaRPr>
+          </a:p>
+        </p:txBody>
+      </p:sp>
+      <p:sp>
+        <p:nvSpPr>
+          <p:cNvPr id="3" name="Rectangle 2"/>
+          <p:cNvSpPr/>
+          <p:nvPr/>
+        </p:nvSpPr>
+        <p:spPr>
+          <a:xfrm>
+            <a:off x="521207" y="950976"/>
+            <a:ext cx="822960" cy="41148"/>
+          </a:xfrm>
+          <a:prstGeom prst="rect">
+            <a:avLst/>
+          </a:prstGeom>
+          <a:solidFill>
+            <a:srgbClr val="F5A623"/>
+          </a:solidFill>
+          <a:ln>
+            <a:noFill/>
+          </a:ln>
+          <a:effectLst/>
+        </p:spPr>
+        <p:style>
+          <a:lnRef idx="1">
+            <a:schemeClr val="accent1"/>
+          </a:lnRef>
+          <a:fillRef idx="3">
+            <a:schemeClr val="accent1"/>
+          </a:fillRef>
+          <a:effectRef idx="2">
+            <a:schemeClr val="accent1"/>
+          </a:effectRef>
+          <a:fontRef idx="minor">
+            <a:schemeClr val="lt1"/>
+          </a:fontRef>
+        </p:style>
+        <p:txBody>
+          <a:bodyPr rtlCol="0" anchor="ctr"/>
+          <a:lstStyle/>
+          <a:p>
+            <a:pPr algn="ctr"/>
+          </a:p>
+        </p:txBody>
+      </p:sp>
+      <p:sp>
+        <p:nvSpPr>
+          <p:cNvPr id="4" name="TextBox 3"/>
+          <p:cNvSpPr txBox="1"/>
+          <p:nvPr/>
+        </p:nvSpPr>
+        <p:spPr>
+          <a:xfrm>
+            <a:off x="502920" y="6473952"/>
+            <a:ext cx="5486400" cy="292608"/>
+          </a:xfrm>
+          <a:prstGeom prst="rect">
+            <a:avLst/>
+          </a:prstGeom>
+          <a:noFill/>
+        </p:spPr>
+        <p:txBody>
+          <a:bodyPr wrap="square" lIns="0" tIns="0" rIns="0" bIns="0" anchor="t">
+            <a:spAutoFit/>
+          </a:bodyPr>
+          <a:lstStyle/>
+          <a:p>
+            <a:pPr algn="l">
+              <a:spcAft>
+                <a:spcPts val="600"/>
+              </a:spcAft>
+            </a:pPr>
+            <a:r>
+              <a:rPr sz="900" b="0">
+                <a:solidFill>
+                  <a:srgbClr val="98A2B8"/>
+                </a:solidFill>
+                <a:latin typeface="微软雅黑"/>
+                <a:ea typeface="微软雅黑"/>
+              </a:rPr>
+              <a:t>董长坤 · 《递归之箱》结课汇报</a:t>
+            </a:r>
+            <a:endParaRPr sz="900" b="0">
+              <a:solidFill>
+                <a:srgbClr val="98A2B8"/>
+              </a:solidFill>
+              <a:latin typeface="微软雅黑"/>
+              <a:ea typeface="微软雅黑"/>
+            </a:endParaRPr>
+          </a:p>
+        </p:txBody>
+      </p:sp>
+      <p:sp>
+        <p:nvSpPr>
+          <p:cNvPr id="5" name="TextBox 4"/>
+          <p:cNvSpPr txBox="1"/>
+          <p:nvPr/>
+        </p:nvSpPr>
+        <p:spPr>
+          <a:xfrm>
+            <a:off x="11247120" y="6473952"/>
+            <a:ext cx="822960" cy="292608"/>
+          </a:xfrm>
+          <a:prstGeom prst="rect">
+            <a:avLst/>
+          </a:prstGeom>
+          <a:noFill/>
+        </p:spPr>
+        <p:txBody>
+          <a:bodyPr wrap="square" lIns="0" tIns="0" rIns="0" bIns="0" anchor="t">
+            <a:spAutoFit/>
+          </a:bodyPr>
+          <a:lstStyle/>
+          <a:p>
+            <a:pPr algn="r">
+              <a:spcAft>
+                <a:spcPts val="600"/>
+              </a:spcAft>
+            </a:pPr>
+            <a:r>
+              <a:rPr sz="900" b="0">
+                <a:solidFill>
+                  <a:srgbClr val="98A2B8"/>
+                </a:solidFill>
+                <a:latin typeface="微软雅黑"/>
+                <a:ea typeface="微软雅黑"/>
+              </a:rPr>
+              <a:t>11 / 13</a:t>
+            </a:r>
+            <a:endParaRPr sz="900" b="0">
+              <a:solidFill>
+                <a:srgbClr val="98A2B8"/>
+              </a:solidFill>
+              <a:latin typeface="微软雅黑"/>
+              <a:ea typeface="微软雅黑"/>
+            </a:endParaRPr>
+          </a:p>
+        </p:txBody>
+      </p:sp>
+      <p:sp>
+        <p:nvSpPr>
+          <p:cNvPr id="6" name="TextBox 5"/>
+          <p:cNvSpPr txBox="1"/>
+          <p:nvPr/>
+        </p:nvSpPr>
+        <p:spPr>
+          <a:xfrm>
+            <a:off x="502920" y="1234440"/>
+            <a:ext cx="5577840" cy="2590165"/>
+          </a:xfrm>
+          <a:prstGeom prst="rect">
+            <a:avLst/>
+          </a:prstGeom>
+          <a:noFill/>
+        </p:spPr>
+        <p:txBody>
+          <a:bodyPr wrap="square" lIns="0" tIns="0" rIns="0" bIns="0" anchor="t">
+            <a:spAutoFit/>
+          </a:bodyPr>
+          <a:lstStyle/>
+          <a:p>
+            <a:pPr algn="l">
+              <a:spcAft>
+                <a:spcPts val="1000"/>
+              </a:spcAft>
+            </a:pPr>
+            <a:r>
+              <a:rPr sz="1350" b="1">
+                <a:solidFill>
+                  <a:srgbClr val="F5A623"/>
+                </a:solidFill>
+                <a:latin typeface="微软雅黑"/>
+                <a:ea typeface="微软雅黑"/>
+              </a:rPr>
+              <a:t>为什么必须自动化</a:t>
+            </a:r>
+            <a:endParaRPr sz="1600" b="1">
+              <a:solidFill>
+                <a:srgbClr val="F5A623"/>
+              </a:solidFill>
+              <a:latin typeface="微软雅黑"/>
+              <a:ea typeface="微软雅黑"/>
+            </a:endParaRPr>
+          </a:p>
+          <a:p>
+            <a:pPr algn="l">
+              <a:spcAft>
+                <a:spcPts val="1000"/>
+              </a:spcAft>
+            </a:pPr>
+            <a:r>
+              <a:rPr sz="1250" b="0">
+                <a:solidFill>
+                  <a:srgbClr val="EBEEF5"/>
+                </a:solidFill>
+                <a:latin typeface="微软雅黑"/>
+                <a:ea typeface="微软雅黑"/>
+              </a:rPr>
+              <a:t>▪  AI 看不到画面、也说不出“手感不对”，验收只能变成可执行的断言</a:t>
+            </a:r>
+            <a:endParaRPr sz="1300" b="0">
+              <a:solidFill>
+                <a:srgbClr val="EBEEF5"/>
+              </a:solidFill>
+              <a:latin typeface="微软雅黑"/>
+              <a:ea typeface="微软雅黑"/>
+            </a:endParaRPr>
+          </a:p>
+          <a:p>
+            <a:pPr algn="l">
+              <a:spcAft>
+                <a:spcPts val="1000"/>
+              </a:spcAft>
+            </a:pPr>
+            <a:r>
+              <a:rPr sz="1350" b="1">
+                <a:solidFill>
+                  <a:srgbClr val="F5A623"/>
+                </a:solidFill>
+                <a:latin typeface="微软雅黑"/>
+                <a:ea typeface="微软雅黑"/>
+              </a:rPr>
+              <a:t>四道闸门（108 例 / 1043 行）</a:t>
+            </a:r>
+            <a:endParaRPr sz="1300" b="0">
+              <a:solidFill>
+                <a:srgbClr val="EBEEF5"/>
+              </a:solidFill>
+              <a:latin typeface="微软雅黑"/>
+              <a:ea typeface="微软雅黑"/>
+            </a:endParaRPr>
+          </a:p>
+          <a:p>
+            <a:pPr algn="l">
+              <a:spcAft>
+                <a:spcPts val="1000"/>
+              </a:spcAft>
+            </a:pPr>
+            <a:r>
+              <a:rPr sz="1250" b="0">
+                <a:solidFill>
+                  <a:srgbClr val="EBEEF5"/>
+                </a:solidFill>
+                <a:latin typeface="微软雅黑"/>
+                <a:ea typeface="微软雅黑"/>
+              </a:rPr>
+              <a:t>▪  规则 41：推箱 / 链推动 / 吸入 / 进出 / 双向穿口 / 自引用 / 胜判</a:t>
+            </a:r>
+            <a:endParaRPr sz="1300" b="0">
+              <a:solidFill>
+                <a:srgbClr val="EBEEF5"/>
+              </a:solidFill>
+              <a:latin typeface="微软雅黑"/>
+              <a:ea typeface="微软雅黑"/>
+            </a:endParaRPr>
+          </a:p>
+          <a:p>
+            <a:pPr algn="l">
+              <a:spcAft>
+                <a:spcPts val="1000"/>
+              </a:spcAft>
+            </a:pPr>
+            <a:r>
+              <a:rPr sz="1250" b="1">
+                <a:solidFill>
+                  <a:srgbClr val="F5A623"/>
+                </a:solidFill>
+                <a:latin typeface="微软雅黑"/>
+                <a:ea typeface="微软雅黑"/>
+              </a:rPr>
+              <a:t>▪  数据 44：关卡解析与非法数据 / 口规则 / 嵌套校验 / 目标点统计</a:t>
+            </a:r>
+            <a:endParaRPr sz="1600" b="1">
+              <a:solidFill>
+                <a:srgbClr val="F5A623"/>
+              </a:solidFill>
+              <a:latin typeface="微软雅黑"/>
+              <a:ea typeface="微软雅黑"/>
+            </a:endParaRPr>
+          </a:p>
+          <a:p>
+            <a:pPr algn="l">
+              <a:spcAft>
+                <a:spcPts val="1000"/>
+              </a:spcAft>
+            </a:pPr>
+            <a:r>
+              <a:rPr sz="1250" b="0">
+                <a:solidFill>
+                  <a:srgbClr val="EBEEF5"/>
+                </a:solidFill>
+                <a:latin typeface="微软雅黑"/>
+                <a:ea typeface="微软雅黑"/>
+              </a:rPr>
+              <a:t>▪  渲染 23：色板与技能文档逐值一致 / 对比度阈值 / 渲染只读 / 选关</a:t>
+            </a:r>
+            <a:endParaRPr sz="1300" b="0">
+              <a:solidFill>
+                <a:srgbClr val="EBEEF5"/>
+              </a:solidFill>
+              <a:latin typeface="微软雅黑"/>
+              <a:ea typeface="微软雅黑"/>
+            </a:endParaRPr>
+          </a:p>
+          <a:p>
+            <a:pPr algn="l">
+              <a:spcAft>
+                <a:spcPts val="1000"/>
+              </a:spcAft>
+            </a:pPr>
+            <a:r>
+              <a:rPr sz="1250" b="0">
+                <a:solidFill>
+                  <a:srgbClr val="EBEEF5"/>
+                </a:solidFill>
+                <a:latin typeface="微软雅黑"/>
+                <a:ea typeface="微软雅黑"/>
+              </a:rPr>
+              <a:t>▪  解算器：两关最短解（5 步 / 37 步），关卡被改坏立刻报红</a:t>
+            </a:r>
+            <a:endParaRPr sz="1300" b="0">
+              <a:solidFill>
+                <a:srgbClr val="EBEEF5"/>
+              </a:solidFill>
+              <a:latin typeface="微软雅黑"/>
+              <a:ea typeface="微软雅黑"/>
+            </a:endParaRPr>
+          </a:p>
+          <a:p>
+            <a:pPr algn="l">
+              <a:spcAft>
+                <a:spcPts val="1000"/>
+              </a:spcAft>
+            </a:pPr>
+            <a:r>
+              <a:rPr sz="1350" b="1">
+                <a:solidFill>
+                  <a:srgbClr val="F5A623"/>
+                </a:solidFill>
+                <a:latin typeface="微软雅黑"/>
+                <a:ea typeface="微软雅黑"/>
+              </a:rPr>
+              <a:t>文档也被测试管着</a:t>
+            </a:r>
+            <a:endParaRPr sz="1300" b="0">
+              <a:solidFill>
+                <a:srgbClr val="EBEEF5"/>
+              </a:solidFill>
+              <a:latin typeface="微软雅黑"/>
+              <a:ea typeface="微软雅黑"/>
+            </a:endParaRPr>
+          </a:p>
+          <a:p>
+            <a:pPr algn="l">
+              <a:spcAft>
+                <a:spcPts val="1000"/>
+              </a:spcAft>
+            </a:pPr>
+            <a:r>
+              <a:rPr sz="1250" b="0">
+                <a:solidFill>
+                  <a:srgbClr val="EBEEF5"/>
+                </a:solidFill>
+                <a:latin typeface="微软雅黑"/>
+                <a:ea typeface="微软雅黑"/>
+              </a:rPr>
+              <a:t>▪  改了技能文档里的颜色，测试会要求实现同步；反之亦然</a:t>
+            </a:r>
+            <a:endParaRPr sz="1300" b="0">
+              <a:solidFill>
+                <a:srgbClr val="EBEEF5"/>
+              </a:solidFill>
+              <a:latin typeface="微软雅黑"/>
+              <a:ea typeface="微软雅黑"/>
+            </a:endParaRPr>
+          </a:p>
+        </p:txBody>
+      </p:sp>
+      <p:sp>
+        <p:nvSpPr>
+          <p:cNvPr id="7" name="Rectangle 6"/>
+          <p:cNvSpPr/>
+          <p:nvPr/>
+        </p:nvSpPr>
+        <p:spPr>
+          <a:xfrm>
+            <a:off x="6446520" y="1234440"/>
+            <a:ext cx="5257800" cy="3337560"/>
+          </a:xfrm>
+          <a:prstGeom prst="rect">
+            <a:avLst/>
+          </a:prstGeom>
+          <a:solidFill>
+            <a:srgbClr val="1C2132"/>
+          </a:solidFill>
+          <a:ln>
+            <a:noFill/>
+          </a:ln>
+          <a:effectLst/>
+        </p:spPr>
+        <p:style>
+          <a:lnRef idx="1">
+            <a:schemeClr val="accent1"/>
+          </a:lnRef>
+          <a:fillRef idx="3">
+            <a:schemeClr val="accent1"/>
+          </a:fillRef>
+          <a:effectRef idx="2">
+            <a:schemeClr val="accent1"/>
+          </a:effectRef>
+          <a:fontRef idx="minor">
+            <a:schemeClr val="lt1"/>
+          </a:fontRef>
+        </p:style>
+        <p:txBody>
+          <a:bodyPr rtlCol="0" anchor="ctr"/>
+          <a:lstStyle/>
+          <a:p>
+            <a:pPr algn="ctr"/>
+          </a:p>
+        </p:txBody>
+      </p:sp>
+      <p:sp>
+        <p:nvSpPr>
+          <p:cNvPr id="8" name="TextBox 7"/>
+          <p:cNvSpPr txBox="1"/>
+          <p:nvPr/>
+        </p:nvSpPr>
+        <p:spPr>
+          <a:xfrm>
+            <a:off x="6675120" y="1389888"/>
+            <a:ext cx="4754880" cy="365760"/>
+          </a:xfrm>
+          <a:prstGeom prst="rect">
+            <a:avLst/>
+          </a:prstGeom>
+          <a:noFill/>
+        </p:spPr>
+        <p:txBody>
+          <a:bodyPr wrap="square" lIns="0" tIns="0" rIns="0" bIns="0" anchor="t">
+            <a:spAutoFit/>
+          </a:bodyPr>
+          <a:lstStyle/>
+          <a:p>
+            <a:pPr algn="l">
+              <a:spcAft>
+                <a:spcPts val="600"/>
+              </a:spcAft>
+            </a:pPr>
+            <a:r>
+              <a:rPr sz="1500" b="1">
+                <a:solidFill>
+                  <a:srgbClr val="EBEEF5"/>
+                </a:solidFill>
+                <a:latin typeface="微软雅黑"/>
+                <a:ea typeface="微软雅黑"/>
+              </a:rPr>
+              <a:t>一条命令验收</a:t>
+            </a:r>
+            <a:endParaRPr sz="1500" b="1">
+              <a:solidFill>
+                <a:srgbClr val="EBEEF5"/>
+              </a:solidFill>
+              <a:latin typeface="微软雅黑"/>
+              <a:ea typeface="微软雅黑"/>
+            </a:endParaRPr>
+          </a:p>
+        </p:txBody>
+      </p:sp>
+      <p:sp>
+        <p:nvSpPr>
+          <p:cNvPr id="9" name="TextBox 8"/>
+          <p:cNvSpPr txBox="1"/>
+          <p:nvPr/>
+        </p:nvSpPr>
+        <p:spPr>
+          <a:xfrm>
+            <a:off x="6675120" y="1874519"/>
+            <a:ext cx="4846320" cy="502920"/>
+          </a:xfrm>
+          <a:prstGeom prst="rect">
+            <a:avLst/>
+          </a:prstGeom>
+          <a:noFill/>
+        </p:spPr>
+        <p:txBody>
+          <a:bodyPr wrap="square" lIns="0" tIns="0" rIns="0" bIns="0" anchor="t">
+            <a:spAutoFit/>
+          </a:bodyPr>
+          <a:lstStyle/>
+          <a:p>
+            <a:pPr algn="l">
+              <a:spcAft>
+                <a:spcPts val="600"/>
+              </a:spcAft>
+            </a:pPr>
+            <a:r>
+              <a:rPr sz="1300" b="1">
+                <a:solidFill>
+                  <a:srgbClr val="F5A623"/>
+                </a:solidFill>
+                <a:latin typeface="微软雅黑"/>
+                <a:ea typeface="微软雅黑"/>
+              </a:rPr>
+              <a:t>命令　</a:t>
+            </a:r>
+            <a:r>
+              <a:rPr lang="zh-CN" sz="1300" b="1">
+                <a:solidFill>
+                  <a:srgbClr val="F5A623"/>
+                </a:solidFill>
+                <a:latin typeface="微软雅黑"/>
+                <a:ea typeface="微软雅黑"/>
+              </a:rPr>
+              <a:t>.venv/bin/python -m unittest discover tests -v</a:t>
+            </a:r>
+            <a:endParaRPr sz="1300" b="0">
+              <a:solidFill>
+                <a:srgbClr val="EBEEF5"/>
+              </a:solidFill>
+              <a:latin typeface="微软雅黑"/>
+              <a:ea typeface="微软雅黑"/>
+            </a:endParaRPr>
+          </a:p>
+        </p:txBody>
+      </p:sp>
+      <p:sp>
+        <p:nvSpPr>
+          <p:cNvPr id="10" name="TextBox 9"/>
+          <p:cNvSpPr txBox="1"/>
+          <p:nvPr/>
+        </p:nvSpPr>
+        <p:spPr>
+          <a:xfrm>
+            <a:off x="6675120" y="2468880"/>
+            <a:ext cx="4846320" cy="685800"/>
+          </a:xfrm>
+          <a:prstGeom prst="rect">
+            <a:avLst/>
+          </a:prstGeom>
+          <a:noFill/>
+        </p:spPr>
+        <p:txBody>
+          <a:bodyPr wrap="square" lIns="0" tIns="0" rIns="0" bIns="0" anchor="t">
+            <a:spAutoFit/>
+          </a:bodyPr>
+          <a:lstStyle/>
+          <a:p>
+            <a:pPr algn="l">
+              <a:spcAft>
+                <a:spcPts val="600"/>
+              </a:spcAft>
+            </a:pPr>
+            <a:r>
+              <a:rPr sz="1300" b="1">
+                <a:solidFill>
+                  <a:srgbClr val="569CD6"/>
+                </a:solidFill>
+                <a:latin typeface="微软雅黑"/>
+                <a:ea typeface="微软雅黑"/>
+              </a:rPr>
+              <a:t>标准　</a:t>
+            </a:r>
+            <a:r>
+              <a:rPr sz="1300" b="0">
+                <a:solidFill>
+                  <a:srgbClr val="EBEEF5"/>
+                </a:solidFill>
+                <a:latin typeface="微软雅黑"/>
+                <a:ea typeface="微软雅黑"/>
+              </a:rPr>
+              <a:t>108 / 108 通过；任何一项红都不提交</a:t>
+            </a:r>
+            <a:endParaRPr sz="1300" b="0">
+              <a:solidFill>
+                <a:srgbClr val="EBEEF5"/>
+              </a:solidFill>
+              <a:latin typeface="微软雅黑"/>
+              <a:ea typeface="微软雅黑"/>
+            </a:endParaRPr>
+          </a:p>
+        </p:txBody>
+      </p:sp>
+      <p:sp>
+        <p:nvSpPr>
+          <p:cNvPr id="11" name="TextBox 10"/>
+          <p:cNvSpPr txBox="1"/>
+          <p:nvPr/>
+        </p:nvSpPr>
+        <p:spPr>
+          <a:xfrm>
+            <a:off x="6675120" y="3246120"/>
+            <a:ext cx="4754880" cy="182880"/>
+          </a:xfrm>
+          <a:prstGeom prst="rect">
+            <a:avLst/>
+          </a:prstGeom>
+          <a:noFill/>
+        </p:spPr>
+        <p:txBody>
+          <a:bodyPr wrap="square" lIns="0" tIns="0" rIns="0" bIns="0" anchor="t">
+            <a:spAutoFit/>
+          </a:bodyPr>
+          <a:lstStyle/>
+          <a:p>
+            <a:pPr algn="l">
+              <a:spcAft>
+                <a:spcPts val="600"/>
+              </a:spcAft>
+            </a:pPr>
+            <a:r>
+              <a:rPr sz="1200" b="1">
+                <a:solidFill>
+                  <a:srgbClr val="98A2B8"/>
+                </a:solidFill>
+                <a:latin typeface="微软雅黑"/>
+                <a:ea typeface="微软雅黑"/>
+              </a:rPr>
+              <a:t>关键词</a:t>
+            </a:r>
+            <a:endParaRPr sz="1200" b="1">
+              <a:solidFill>
+                <a:srgbClr val="98A2B8"/>
+              </a:solidFill>
+              <a:latin typeface="微软雅黑"/>
+              <a:ea typeface="微软雅黑"/>
+            </a:endParaRPr>
+          </a:p>
+        </p:txBody>
+      </p:sp>
+      <p:sp>
+        <p:nvSpPr>
+          <p:cNvPr id="12" name="Rounded Rectangle 11"/>
+          <p:cNvSpPr/>
+          <p:nvPr/>
+        </p:nvSpPr>
+        <p:spPr>
+          <a:xfrm>
+            <a:off x="6675120" y="3611880"/>
+            <a:ext cx="1133856" cy="457200"/>
+          </a:xfrm>
+          <a:prstGeom prst="roundRect">
+            <a:avLst/>
+          </a:prstGeom>
+          <a:solidFill>
+            <a:srgbClr val="262C42"/>
+          </a:solidFill>
+          <a:ln w="12700">
+            <a:solidFill>
+              <a:srgbClr val="3E465E"/>
+            </a:solidFill>
+          </a:ln>
+          <a:effectLst/>
+        </p:spPr>
+        <p:style>
+          <a:lnRef idx="1">
+            <a:schemeClr val="accent1"/>
+          </a:lnRef>
+          <a:fillRef idx="3">
+            <a:schemeClr val="accent1"/>
+          </a:fillRef>
+          <a:effectRef idx="2">
+            <a:schemeClr val="accent1"/>
+          </a:effectRef>
+          <a:fontRef idx="minor">
+            <a:schemeClr val="lt1"/>
+          </a:fontRef>
+        </p:style>
+        <p:txBody>
+          <a:bodyPr wrap="square" lIns="73152" tIns="18288" rIns="73152" bIns="18288" rtlCol="0" anchor="ctr"/>
+          <a:lstStyle/>
+          <a:p>
+            <a:pPr algn="ctr"/>
+            <a:r>
+              <a:rPr sz="1100" b="0">
+                <a:solidFill>
+                  <a:srgbClr val="EBEEF5"/>
+                </a:solidFill>
+                <a:latin typeface="微软雅黑"/>
+                <a:ea typeface="微软雅黑"/>
+              </a:rPr>
+              <a:t>108 例</a:t>
+            </a:r>
+            <a:endParaRPr sz="1100" b="0">
+              <a:solidFill>
+                <a:srgbClr val="EBEEF5"/>
+              </a:solidFill>
+              <a:latin typeface="微软雅黑"/>
+              <a:ea typeface="微软雅黑"/>
+            </a:endParaRPr>
+          </a:p>
+        </p:txBody>
+      </p:sp>
+      <p:sp>
+        <p:nvSpPr>
+          <p:cNvPr id="13" name="Rounded Rectangle 12"/>
+          <p:cNvSpPr/>
+          <p:nvPr/>
+        </p:nvSpPr>
+        <p:spPr>
+          <a:xfrm>
+            <a:off x="7918704" y="3611880"/>
+            <a:ext cx="1133856" cy="457200"/>
+          </a:xfrm>
+          <a:prstGeom prst="roundRect">
+            <a:avLst/>
+          </a:prstGeom>
+          <a:solidFill>
+            <a:srgbClr val="262C42"/>
+          </a:solidFill>
+          <a:ln w="12700">
+            <a:solidFill>
+              <a:srgbClr val="3E465E"/>
+            </a:solidFill>
+          </a:ln>
+          <a:effectLst/>
+        </p:spPr>
+        <p:style>
+          <a:lnRef idx="1">
+            <a:schemeClr val="accent1"/>
+          </a:lnRef>
+          <a:fillRef idx="3">
+            <a:schemeClr val="accent1"/>
+          </a:fillRef>
+          <a:effectRef idx="2">
+            <a:schemeClr val="accent1"/>
+          </a:effectRef>
+          <a:fontRef idx="minor">
+            <a:schemeClr val="lt1"/>
+          </a:fontRef>
+        </p:style>
+        <p:txBody>
+          <a:bodyPr wrap="square" lIns="73152" tIns="18288" rIns="73152" bIns="18288" rtlCol="0" anchor="ctr"/>
+          <a:lstStyle/>
+          <a:p>
+            <a:pPr algn="ctr"/>
+            <a:r>
+              <a:rPr sz="1100" b="0">
+                <a:solidFill>
+                  <a:srgbClr val="EBEEF5"/>
+                </a:solidFill>
+                <a:latin typeface="微软雅黑"/>
+                <a:ea typeface="微软雅黑"/>
+              </a:rPr>
+              <a:t>文档一致性</a:t>
+            </a:r>
+            <a:endParaRPr sz="1100" b="0">
+              <a:solidFill>
+                <a:srgbClr val="EBEEF5"/>
+              </a:solidFill>
+              <a:latin typeface="微软雅黑"/>
+              <a:ea typeface="微软雅黑"/>
+            </a:endParaRPr>
+          </a:p>
+        </p:txBody>
+      </p:sp>
+      <p:sp>
+        <p:nvSpPr>
+          <p:cNvPr id="14" name="Rounded Rectangle 13"/>
+          <p:cNvSpPr/>
+          <p:nvPr/>
+        </p:nvSpPr>
+        <p:spPr>
+          <a:xfrm>
+            <a:off x="9162288" y="3611880"/>
+            <a:ext cx="1133856" cy="457200"/>
+          </a:xfrm>
+          <a:prstGeom prst="roundRect">
+            <a:avLst/>
+          </a:prstGeom>
+          <a:solidFill>
+            <a:srgbClr val="262C42"/>
+          </a:solidFill>
+          <a:ln w="12700">
+            <a:solidFill>
+              <a:srgbClr val="3E465E"/>
+            </a:solidFill>
+          </a:ln>
+          <a:effectLst/>
+        </p:spPr>
+        <p:style>
+          <a:lnRef idx="1">
+            <a:schemeClr val="accent1"/>
+          </a:lnRef>
+          <a:fillRef idx="3">
+            <a:schemeClr val="accent1"/>
+          </a:fillRef>
+          <a:effectRef idx="2">
+            <a:schemeClr val="accent1"/>
+          </a:effectRef>
+          <a:fontRef idx="minor">
+            <a:schemeClr val="lt1"/>
+          </a:fontRef>
+        </p:style>
+        <p:txBody>
+          <a:bodyPr wrap="square" lIns="73152" tIns="18288" rIns="73152" bIns="18288" rtlCol="0" anchor="ctr"/>
+          <a:lstStyle/>
+          <a:p>
+            <a:pPr algn="ctr"/>
+            <a:r>
+              <a:rPr sz="1100" b="0">
+                <a:solidFill>
+                  <a:srgbClr val="EBEEF5"/>
+                </a:solidFill>
+                <a:latin typeface="微软雅黑"/>
+                <a:ea typeface="微软雅黑"/>
+              </a:rPr>
+              <a:t>对比度</a:t>
+            </a:r>
+            <a:endParaRPr sz="1100" b="0">
+              <a:solidFill>
+                <a:srgbClr val="EBEEF5"/>
+              </a:solidFill>
+              <a:latin typeface="微软雅黑"/>
+              <a:ea typeface="微软雅黑"/>
+            </a:endParaRPr>
+          </a:p>
+        </p:txBody>
+      </p:sp>
+      <p:sp>
+        <p:nvSpPr>
+          <p:cNvPr id="15" name="Rounded Rectangle 14"/>
+          <p:cNvSpPr/>
+          <p:nvPr/>
+        </p:nvSpPr>
+        <p:spPr>
+          <a:xfrm>
+            <a:off x="10405872" y="3611880"/>
+            <a:ext cx="1133856" cy="457200"/>
+          </a:xfrm>
+          <a:prstGeom prst="roundRect">
+            <a:avLst/>
+          </a:prstGeom>
+          <a:solidFill>
+            <a:srgbClr val="262C42"/>
+          </a:solidFill>
+          <a:ln w="12700">
+            <a:solidFill>
+              <a:srgbClr val="3E465E"/>
+            </a:solidFill>
+          </a:ln>
+          <a:effectLst/>
+        </p:spPr>
+        <p:style>
+          <a:lnRef idx="1">
+            <a:schemeClr val="accent1"/>
+          </a:lnRef>
+          <a:fillRef idx="3">
+            <a:schemeClr val="accent1"/>
+          </a:fillRef>
+          <a:effectRef idx="2">
+            <a:schemeClr val="accent1"/>
+          </a:effectRef>
+          <a:fontRef idx="minor">
+            <a:schemeClr val="lt1"/>
+          </a:fontRef>
+        </p:style>
+        <p:txBody>
+          <a:bodyPr wrap="square" lIns="73152" tIns="18288" rIns="73152" bIns="18288" rtlCol="0" anchor="ctr"/>
+          <a:lstStyle/>
+          <a:p>
+            <a:pPr algn="ctr"/>
+            <a:r>
+              <a:rPr lang="zh-CN" sz="1100" b="0">
+                <a:solidFill>
+                  <a:srgbClr val="EBEEF5"/>
+                </a:solidFill>
+                <a:latin typeface="微软雅黑"/>
+                <a:ea typeface="微软雅黑"/>
+              </a:rPr>
+              <a:t>可解性</a:t>
+            </a:r>
+            <a:endParaRPr sz="1100" b="0">
+              <a:solidFill>
+                <a:srgbClr val="EBEEF5"/>
+              </a:solidFill>
+              <a:latin typeface="微软雅黑"/>
+              <a:ea typeface="微软雅黑"/>
+            </a:endParaRPr>
+          </a:p>
+        </p:txBody>
+      </p:sp>
+    </p:spTree>
+  </p:cSld>
+  <p:clrMapOvr>
+    <a:masterClrMapping/>
+  </p:clrMapOvr>
+</p:sld>
+</file>
+
+<file path=ppt/slides/slide17.xml><?xml version="1.0" encoding="utf-8"?>
+<p:sld xmlns:a="http://schemas.openxmlformats.org/drawingml/2006/main" xmlns:p="http://schemas.openxmlformats.org/presentationml/2006/main" xmlns:r="http://schemas.openxmlformats.org/officeDocument/2006/relationships">
+  <p:cSld>
+    <p:bg>
+      <p:bgPr>
+        <a:solidFill>
+          <a:srgbClr val="111420"/>
+        </a:solidFill>
+        <a:effectLst/>
+      </p:bgPr>
+    </p:bg>
+    <p:spTree>
+      <p:nvGrpSpPr>
+        <p:cNvPr id="1" name=""/>
+        <p:cNvGrpSpPr/>
+        <p:nvPr/>
+      </p:nvGrpSpPr>
+      <p:grpSpPr/>
+      <p:sp>
+        <p:nvSpPr>
+          <p:cNvPr id="2" name="TextBox 1"/>
+          <p:cNvSpPr txBox="1"/>
+          <p:nvPr/>
+        </p:nvSpPr>
+        <p:spPr>
+          <a:xfrm>
+            <a:off x="502920" y="292608"/>
+            <a:ext cx="10058400" cy="640080"/>
+          </a:xfrm>
+          <a:prstGeom prst="rect">
+            <a:avLst/>
+          </a:prstGeom>
+          <a:noFill/>
+        </p:spPr>
+        <p:txBody>
+          <a:bodyPr wrap="square" lIns="0" tIns="0" rIns="0" bIns="0" anchor="t">
+            <a:spAutoFit/>
+          </a:bodyPr>
+          <a:lstStyle/>
+          <a:p>
+            <a:pPr algn="l">
+              <a:spcAft>
+                <a:spcPts val="600"/>
+              </a:spcAft>
+            </a:pPr>
+            <a:r>
+              <a:rPr sz="2600" b="1">
+                <a:solidFill>
+                  <a:srgbClr val="EBEEF5"/>
+                </a:solidFill>
+                <a:latin typeface="微软雅黑"/>
+                <a:ea typeface="微软雅黑"/>
+              </a:rPr>
+              <a:t>项目目标达成情况</a:t>
+            </a:r>
+            <a:endParaRPr sz="2600" b="1">
+              <a:solidFill>
+                <a:srgbClr val="EBEEF5"/>
+              </a:solidFill>
+              <a:latin typeface="微软雅黑"/>
+              <a:ea typeface="微软雅黑"/>
+            </a:endParaRPr>
+          </a:p>
+        </p:txBody>
+      </p:sp>
+      <p:sp>
+        <p:nvSpPr>
+          <p:cNvPr id="3" name="Rectangle 2"/>
+          <p:cNvSpPr/>
+          <p:nvPr/>
+        </p:nvSpPr>
+        <p:spPr>
+          <a:xfrm>
+            <a:off x="521207" y="950976"/>
+            <a:ext cx="822960" cy="41148"/>
+          </a:xfrm>
+          <a:prstGeom prst="rect">
+            <a:avLst/>
+          </a:prstGeom>
+          <a:solidFill>
+            <a:srgbClr val="F5A623"/>
+          </a:solidFill>
+          <a:ln>
+            <a:noFill/>
+          </a:ln>
+          <a:effectLst/>
+        </p:spPr>
+        <p:style>
+          <a:lnRef idx="1">
+            <a:schemeClr val="accent1"/>
+          </a:lnRef>
+          <a:fillRef idx="3">
+            <a:schemeClr val="accent1"/>
+          </a:fillRef>
+          <a:effectRef idx="2">
+            <a:schemeClr val="accent1"/>
+          </a:effectRef>
+          <a:fontRef idx="minor">
+            <a:schemeClr val="lt1"/>
+          </a:fontRef>
+        </p:style>
+        <p:txBody>
+          <a:bodyPr rtlCol="0" anchor="ctr"/>
+          <a:lstStyle/>
+          <a:p>
+            <a:pPr algn="ctr"/>
+          </a:p>
+        </p:txBody>
+      </p:sp>
+      <p:sp>
+        <p:nvSpPr>
+          <p:cNvPr id="4" name="TextBox 3"/>
+          <p:cNvSpPr txBox="1"/>
+          <p:nvPr/>
+        </p:nvSpPr>
+        <p:spPr>
+          <a:xfrm>
+            <a:off x="502920" y="6473952"/>
+            <a:ext cx="5486400" cy="292608"/>
+          </a:xfrm>
+          <a:prstGeom prst="rect">
+            <a:avLst/>
+          </a:prstGeom>
+          <a:noFill/>
+        </p:spPr>
+        <p:txBody>
+          <a:bodyPr wrap="square" lIns="0" tIns="0" rIns="0" bIns="0" anchor="t">
+            <a:spAutoFit/>
+          </a:bodyPr>
+          <a:lstStyle/>
+          <a:p>
+            <a:pPr algn="l">
+              <a:spcAft>
+                <a:spcPts val="600"/>
+              </a:spcAft>
+            </a:pPr>
+            <a:r>
+              <a:rPr sz="900" b="0">
+                <a:solidFill>
+                  <a:srgbClr val="98A2B8"/>
+                </a:solidFill>
+                <a:latin typeface="微软雅黑"/>
+                <a:ea typeface="微软雅黑"/>
+              </a:rPr>
+              <a:t>董长坤 · 《递归之箱》结课汇报</a:t>
+            </a:r>
+            <a:endParaRPr sz="900" b="0">
+              <a:solidFill>
+                <a:srgbClr val="98A2B8"/>
+              </a:solidFill>
+              <a:latin typeface="微软雅黑"/>
+              <a:ea typeface="微软雅黑"/>
+            </a:endParaRPr>
+          </a:p>
+        </p:txBody>
+      </p:sp>
+      <p:sp>
+        <p:nvSpPr>
+          <p:cNvPr id="5" name="TextBox 4"/>
+          <p:cNvSpPr txBox="1"/>
+          <p:nvPr/>
+        </p:nvSpPr>
+        <p:spPr>
+          <a:xfrm>
+            <a:off x="11247120" y="6473952"/>
+            <a:ext cx="822960" cy="292608"/>
+          </a:xfrm>
+          <a:prstGeom prst="rect">
+            <a:avLst/>
+          </a:prstGeom>
+          <a:noFill/>
+        </p:spPr>
+        <p:txBody>
+          <a:bodyPr wrap="square" lIns="0" tIns="0" rIns="0" bIns="0" anchor="t">
+            <a:spAutoFit/>
+          </a:bodyPr>
+          <a:lstStyle/>
+          <a:p>
+            <a:pPr algn="r">
+              <a:spcAft>
+                <a:spcPts val="600"/>
+              </a:spcAft>
+            </a:pPr>
+            <a:r>
+              <a:rPr sz="900" b="0">
+                <a:solidFill>
+                  <a:srgbClr val="98A2B8"/>
+                </a:solidFill>
+                <a:latin typeface="微软雅黑"/>
+                <a:ea typeface="微软雅黑"/>
+              </a:rPr>
+              <a:t>12 / 13</a:t>
+            </a:r>
+            <a:endParaRPr sz="900" b="0">
+              <a:solidFill>
+                <a:srgbClr val="98A2B8"/>
+              </a:solidFill>
+              <a:latin typeface="微软雅黑"/>
+              <a:ea typeface="微软雅黑"/>
+            </a:endParaRPr>
+          </a:p>
+        </p:txBody>
+      </p:sp>
+      <p:sp>
+        <p:nvSpPr>
+          <p:cNvPr id="6" name="Rectangle 5"/>
+          <p:cNvSpPr/>
+          <p:nvPr/>
+        </p:nvSpPr>
+        <p:spPr>
+          <a:xfrm>
+            <a:off x="502920" y="1234440"/>
+            <a:ext cx="2286000" cy="411480"/>
+          </a:xfrm>
+          <a:prstGeom prst="rect">
+            <a:avLst/>
+          </a:prstGeom>
+          <a:solidFill>
+            <a:srgbClr val="262C42"/>
+          </a:solidFill>
+          <a:ln w="9525">
+            <a:solidFill>
+              <a:srgbClr val="3E465E"/>
+            </a:solidFill>
+          </a:ln>
+          <a:effectLst/>
+        </p:spPr>
+        <p:style>
+          <a:lnRef idx="1">
+            <a:schemeClr val="accent1"/>
+          </a:lnRef>
+          <a:fillRef idx="3">
+            <a:schemeClr val="accent1"/>
+          </a:fillRef>
+          <a:effectRef idx="2">
+            <a:schemeClr val="accent1"/>
+          </a:effectRef>
+          <a:fontRef idx="minor">
+            <a:schemeClr val="lt1"/>
+          </a:fontRef>
+        </p:style>
+        <p:txBody>
+          <a:bodyPr wrap="square" lIns="73152" tIns="18288" rIns="73152" bIns="18288" rtlCol="0" anchor="ctr"/>
+          <a:lstStyle/>
+          <a:p>
+            <a:pPr algn="ctr"/>
+            <a:r>
+              <a:rPr sz="1300" b="1">
+                <a:solidFill>
+                  <a:srgbClr val="EBEEF5"/>
+                </a:solidFill>
+                <a:latin typeface="微软雅黑"/>
+                <a:ea typeface="微软雅黑"/>
+              </a:rPr>
+              <a:t>目标</a:t>
+            </a:r>
+            <a:endParaRPr sz="1300" b="1">
+              <a:solidFill>
+                <a:srgbClr val="EBEEF5"/>
+              </a:solidFill>
+              <a:latin typeface="微软雅黑"/>
+              <a:ea typeface="微软雅黑"/>
+            </a:endParaRPr>
+          </a:p>
+        </p:txBody>
+      </p:sp>
+      <p:sp>
+        <p:nvSpPr>
+          <p:cNvPr id="7" name="Rectangle 6"/>
+          <p:cNvSpPr/>
+          <p:nvPr/>
+        </p:nvSpPr>
+        <p:spPr>
+          <a:xfrm>
+            <a:off x="2788920" y="1234440"/>
+            <a:ext cx="6263640" cy="411480"/>
+          </a:xfrm>
+          <a:prstGeom prst="rect">
+            <a:avLst/>
+          </a:prstGeom>
+          <a:solidFill>
+            <a:srgbClr val="262C42"/>
+          </a:solidFill>
+          <a:ln w="9525">
+            <a:solidFill>
+              <a:srgbClr val="3E465E"/>
+            </a:solidFill>
+          </a:ln>
+          <a:effectLst/>
+        </p:spPr>
+        <p:style>
+          <a:lnRef idx="1">
+            <a:schemeClr val="accent1"/>
+          </a:lnRef>
+          <a:fillRef idx="3">
+            <a:schemeClr val="accent1"/>
+          </a:fillRef>
+          <a:effectRef idx="2">
+            <a:schemeClr val="accent1"/>
+          </a:effectRef>
+          <a:fontRef idx="minor">
+            <a:schemeClr val="lt1"/>
+          </a:fontRef>
+        </p:style>
+        <p:txBody>
+          <a:bodyPr wrap="square" lIns="73152" tIns="18288" rIns="73152" bIns="18288" rtlCol="0" anchor="ctr"/>
+          <a:lstStyle/>
+          <a:p>
+            <a:pPr algn="ctr"/>
+            <a:r>
+              <a:rPr sz="1300" b="1">
+                <a:solidFill>
+                  <a:srgbClr val="EBEEF5"/>
+                </a:solidFill>
+                <a:latin typeface="微软雅黑"/>
+                <a:ea typeface="微软雅黑"/>
+              </a:rPr>
+              <a:t>内容</a:t>
+            </a:r>
+            <a:endParaRPr sz="1300" b="1">
+              <a:solidFill>
+                <a:srgbClr val="EBEEF5"/>
+              </a:solidFill>
+              <a:latin typeface="微软雅黑"/>
+              <a:ea typeface="微软雅黑"/>
+            </a:endParaRPr>
+          </a:p>
+        </p:txBody>
+      </p:sp>
+      <p:sp>
+        <p:nvSpPr>
+          <p:cNvPr id="8" name="Rectangle 7"/>
+          <p:cNvSpPr/>
+          <p:nvPr/>
+        </p:nvSpPr>
+        <p:spPr>
+          <a:xfrm>
+            <a:off x="9052560" y="1234440"/>
+            <a:ext cx="2651760" cy="411480"/>
+          </a:xfrm>
+          <a:prstGeom prst="rect">
+            <a:avLst/>
+          </a:prstGeom>
+          <a:solidFill>
+            <a:srgbClr val="262C42"/>
+          </a:solidFill>
+          <a:ln w="9525">
+            <a:solidFill>
+              <a:srgbClr val="3E465E"/>
+            </a:solidFill>
+          </a:ln>
+          <a:effectLst/>
+        </p:spPr>
+        <p:style>
+          <a:lnRef idx="1">
+            <a:schemeClr val="accent1"/>
+          </a:lnRef>
+          <a:fillRef idx="3">
+            <a:schemeClr val="accent1"/>
+          </a:fillRef>
+          <a:effectRef idx="2">
+            <a:schemeClr val="accent1"/>
+          </a:effectRef>
+          <a:fontRef idx="minor">
+            <a:schemeClr val="lt1"/>
+          </a:fontRef>
+        </p:style>
+        <p:txBody>
+          <a:bodyPr wrap="square" lIns="73152" tIns="18288" rIns="73152" bIns="18288" rtlCol="0" anchor="ctr"/>
+          <a:lstStyle/>
+          <a:p>
+            <a:pPr algn="ctr"/>
+            <a:r>
+              <a:rPr sz="1300" b="1">
+                <a:solidFill>
+                  <a:srgbClr val="EBEEF5"/>
+                </a:solidFill>
+                <a:latin typeface="微软雅黑"/>
+                <a:ea typeface="微软雅黑"/>
+              </a:rPr>
+              <a:t>状态</a:t>
+            </a:r>
+            <a:endParaRPr sz="1300" b="1">
+              <a:solidFill>
+                <a:srgbClr val="EBEEF5"/>
+              </a:solidFill>
+              <a:latin typeface="微软雅黑"/>
+              <a:ea typeface="微软雅黑"/>
+            </a:endParaRPr>
+          </a:p>
+        </p:txBody>
+      </p:sp>
+      <p:sp>
+        <p:nvSpPr>
+          <p:cNvPr id="9" name="Rectangle 8"/>
+          <p:cNvSpPr/>
+          <p:nvPr/>
+        </p:nvSpPr>
+        <p:spPr>
+          <a:xfrm>
+            <a:off x="502920" y="1645920"/>
+            <a:ext cx="2286000" cy="868680"/>
+          </a:xfrm>
+          <a:prstGeom prst="rect">
+            <a:avLst/>
+          </a:prstGeom>
+          <a:solidFill>
+            <a:srgbClr val="1C2132"/>
+          </a:solidFill>
+          <a:ln w="9525">
+            <a:solidFill>
+              <a:srgbClr val="3E465E"/>
+            </a:solidFill>
+          </a:ln>
+          <a:effectLst/>
+        </p:spPr>
+        <p:style>
+          <a:lnRef idx="1">
+            <a:schemeClr val="accent1"/>
+          </a:lnRef>
+          <a:fillRef idx="3">
+            <a:schemeClr val="accent1"/>
+          </a:fillRef>
+          <a:effectRef idx="2">
+            <a:schemeClr val="accent1"/>
+          </a:effectRef>
+          <a:fontRef idx="minor">
+            <a:schemeClr val="lt1"/>
+          </a:fontRef>
+        </p:style>
+        <p:txBody>
+          <a:bodyPr wrap="square" lIns="128016" tIns="18288" rIns="137160" bIns="18288" rtlCol="0" anchor="ctr"/>
+          <a:lstStyle/>
+          <a:p>
+            <a:pPr algn="l"/>
+            <a:r>
+              <a:rPr sz="1600" b="1">
+                <a:solidFill>
+                  <a:srgbClr val="EBEEF5"/>
+                </a:solidFill>
+                <a:latin typeface="微软雅黑"/>
+              </a:rPr>
+              <a:t>必做 · 开题承诺</a:t>
+            </a:r>
+            <a:endParaRPr sz="1300" b="1">
+              <a:solidFill>
+                <a:srgbClr val="EBEEF5"/>
+              </a:solidFill>
+              <a:latin typeface="微软雅黑"/>
+              <a:ea typeface="微软雅黑"/>
+            </a:endParaRPr>
+          </a:p>
+          <a:p>
+            <a:pPr algn="l"/>
+            <a:r>
+              <a:rPr sz="1050" b="0">
+                <a:solidFill>
+                  <a:srgbClr val="98A2B8"/>
+                </a:solidFill>
+                <a:latin typeface="微软雅黑"/>
+              </a:rPr>
+              <a:t>4 / 4</a:t>
+            </a:r>
+            <a:endParaRPr sz="1100" b="0">
+              <a:solidFill>
+                <a:srgbClr val="98A2B8"/>
+              </a:solidFill>
+              <a:latin typeface="微软雅黑"/>
+            </a:endParaRPr>
+          </a:p>
+        </p:txBody>
+      </p:sp>
+      <p:sp>
+        <p:nvSpPr>
+          <p:cNvPr id="10" name="Rectangle 9"/>
+          <p:cNvSpPr/>
+          <p:nvPr/>
+        </p:nvSpPr>
+        <p:spPr>
+          <a:xfrm>
+            <a:off x="2788920" y="1645920"/>
+            <a:ext cx="6263640" cy="868680"/>
+          </a:xfrm>
+          <a:prstGeom prst="rect">
+            <a:avLst/>
+          </a:prstGeom>
+          <a:solidFill>
+            <a:srgbClr val="1C2132"/>
+          </a:solidFill>
+          <a:ln w="9525">
+            <a:solidFill>
+              <a:srgbClr val="3E465E"/>
+            </a:solidFill>
+          </a:ln>
+          <a:effectLst/>
+        </p:spPr>
+        <p:style>
+          <a:lnRef idx="1">
+            <a:schemeClr val="accent1"/>
+          </a:lnRef>
+          <a:fillRef idx="3">
+            <a:schemeClr val="accent1"/>
+          </a:fillRef>
+          <a:effectRef idx="2">
+            <a:schemeClr val="accent1"/>
+          </a:effectRef>
+          <a:fontRef idx="minor">
+            <a:schemeClr val="lt1"/>
+          </a:fontRef>
+        </p:style>
+        <p:txBody>
+          <a:bodyPr wrap="square" lIns="137160" tIns="18288" rIns="137160" bIns="18288" rtlCol="0" anchor="ctr"/>
+          <a:lstStyle/>
+          <a:p>
+            <a:pPr algn="l">
+              <a:spcAft>
+                <a:spcPts val="500"/>
+              </a:spcAft>
+            </a:pPr>
+            <a:r>
+              <a:rPr sz="1100" b="0">
+                <a:solidFill>
+                  <a:srgbClr val="EBEEF5"/>
+                </a:solidFill>
+                <a:latin typeface="微软雅黑"/>
+              </a:rPr>
+              <a:t>▪ 推箱子移动 + 箱子链推动</a:t>
+            </a:r>
+            <a:endParaRPr sz="1150" b="0">
+              <a:solidFill>
+                <a:srgbClr val="EBEEF5"/>
+              </a:solidFill>
+              <a:latin typeface="微软雅黑"/>
+              <a:ea typeface="微软雅黑"/>
+            </a:endParaRPr>
+          </a:p>
+          <a:p>
+            <a:pPr algn="l">
+              <a:spcAft>
+                <a:spcPts val="500"/>
+              </a:spcAft>
+            </a:pPr>
+            <a:r>
+              <a:rPr sz="1100" b="0">
+                <a:solidFill>
+                  <a:srgbClr val="EBEEF5"/>
+                </a:solidFill>
+                <a:latin typeface="微软雅黑"/>
+              </a:rPr>
+              <a:t>▪ 嵌套世界进出（口由内层边缘决定）</a:t>
+            </a:r>
+            <a:endParaRPr sz="1150" b="0">
+              <a:solidFill>
+                <a:srgbClr val="EBEEF5"/>
+              </a:solidFill>
+              <a:latin typeface="微软雅黑"/>
+            </a:endParaRPr>
+          </a:p>
+          <a:p>
+            <a:pPr algn="l">
+              <a:spcAft>
+                <a:spcPts val="500"/>
+              </a:spcAft>
+            </a:pPr>
+            <a:r>
+              <a:rPr sz="1100" b="0">
+                <a:solidFill>
+                  <a:srgbClr val="EBEEF5"/>
+                </a:solidFill>
+                <a:latin typeface="微软雅黑"/>
+              </a:rPr>
+              <a:t>▪ 胜利判定：所有 g 被箱子盖住 + 玩家站上 G</a:t>
+            </a:r>
+            <a:endParaRPr sz="1150" b="0">
+              <a:solidFill>
+                <a:srgbClr val="EBEEF5"/>
+              </a:solidFill>
+              <a:latin typeface="微软雅黑"/>
+            </a:endParaRPr>
+          </a:p>
+        </p:txBody>
+      </p:sp>
+      <p:sp>
+        <p:nvSpPr>
+          <p:cNvPr id="11" name="Rectangle 10"/>
+          <p:cNvSpPr/>
+          <p:nvPr/>
+        </p:nvSpPr>
+        <p:spPr>
+          <a:xfrm>
+            <a:off x="9052560" y="1645920"/>
+            <a:ext cx="2651760" cy="868680"/>
+          </a:xfrm>
+          <a:prstGeom prst="rect">
+            <a:avLst/>
+          </a:prstGeom>
+          <a:solidFill>
+            <a:srgbClr val="1C2132"/>
+          </a:solidFill>
+          <a:ln w="9525">
+            <a:solidFill>
+              <a:srgbClr val="3E465E"/>
+            </a:solidFill>
+          </a:ln>
+          <a:effectLst/>
+        </p:spPr>
+        <p:style>
+          <a:lnRef idx="1">
+            <a:schemeClr val="accent1"/>
+          </a:lnRef>
+          <a:fillRef idx="3">
+            <a:schemeClr val="accent1"/>
+          </a:fillRef>
+          <a:effectRef idx="2">
+            <a:schemeClr val="accent1"/>
+          </a:effectRef>
+          <a:fontRef idx="minor">
+            <a:schemeClr val="lt1"/>
+          </a:fontRef>
+        </p:style>
+        <p:txBody>
+          <a:bodyPr wrap="square" lIns="73152" tIns="18288" rIns="73152" bIns="18288" rtlCol="0" anchor="ctr"/>
+          <a:lstStyle/>
+          <a:p>
+            <a:pPr algn="ctr"/>
+            <a:r>
+              <a:rPr sz="1400" b="1">
+                <a:solidFill>
+                  <a:srgbClr val="6CC77A"/>
+                </a:solidFill>
+                <a:latin typeface="微软雅黑"/>
+              </a:rPr>
+              <a:t>✅ 达成</a:t>
+            </a:r>
+            <a:endParaRPr sz="1250" b="1">
+              <a:solidFill>
+                <a:srgbClr val="6CC77A"/>
+              </a:solidFill>
+              <a:latin typeface="微软雅黑"/>
+              <a:ea typeface="微软雅黑"/>
+            </a:endParaRPr>
+          </a:p>
+        </p:txBody>
+      </p:sp>
+      <p:sp>
+        <p:nvSpPr>
+          <p:cNvPr id="21" name="Rounded Rectangle 20"/>
+          <p:cNvSpPr/>
+          <p:nvPr/>
+        </p:nvSpPr>
+        <p:spPr>
+          <a:xfrm>
+            <a:off x="502920" y="4434840"/>
+            <a:ext cx="11201400" cy="685800"/>
+          </a:xfrm>
+          <a:prstGeom prst="roundRect">
+            <a:avLst/>
+          </a:prstGeom>
+          <a:solidFill>
+            <a:srgbClr val="262C42"/>
+          </a:solidFill>
+          <a:ln>
+            <a:noFill/>
+          </a:ln>
+          <a:effectLst/>
+        </p:spPr>
+        <p:style>
+          <a:lnRef idx="1">
+            <a:schemeClr val="accent1"/>
+          </a:lnRef>
+          <a:fillRef idx="3">
+            <a:schemeClr val="accent1"/>
+          </a:fillRef>
+          <a:effectRef idx="2">
+            <a:schemeClr val="accent1"/>
+          </a:effectRef>
+          <a:fontRef idx="minor">
+            <a:schemeClr val="lt1"/>
+          </a:fontRef>
+        </p:style>
+        <p:txBody>
+          <a:bodyPr wrap="square" lIns="256032" tIns="18288" rIns="256032" bIns="18288" rtlCol="0" anchor="ctr"/>
+          <a:lstStyle/>
+          <a:p>
+            <a:pPr algn="l"/>
+            <a:r>
+              <a:rPr sz="1400" b="1">
+                <a:solidFill>
+                  <a:srgbClr val="F5A623"/>
+                </a:solidFill>
+                <a:latin typeface="微软雅黑"/>
+                <a:ea typeface="微软雅黑"/>
+              </a:rPr>
+              <a:t>结论　</a:t>
+            </a:r>
+            <a:r>
+              <a:rPr sz="1300" b="0">
+                <a:solidFill>
+                  <a:srgbClr val="EBEEF5"/>
+                </a:solidFill>
+                <a:latin typeface="微软雅黑"/>
+                <a:ea typeface="微软雅黑"/>
+              </a:rPr>
+              <a:t>开题承诺的必做项全部达成；选做完成 1 项；其余与动画、更多关卡一起列为后续方向</a:t>
+            </a:r>
+            <a:endParaRPr sz="1300" b="0">
+              <a:solidFill>
+                <a:srgbClr val="EBEEF5"/>
+              </a:solidFill>
+              <a:latin typeface="微软雅黑"/>
+              <a:ea typeface="微软雅黑"/>
+            </a:endParaRPr>
+          </a:p>
+        </p:txBody>
+      </p:sp>
+      <p:sp>
+        <p:nvSpPr>
+          <p:cNvPr id="22" name="TextBox 21"/>
+          <p:cNvSpPr txBox="1"/>
+          <p:nvPr/>
+        </p:nvSpPr>
+        <p:spPr>
+          <a:xfrm>
+            <a:off x="502920" y="5413248"/>
+            <a:ext cx="1005840" cy="365760"/>
+          </a:xfrm>
+          <a:prstGeom prst="rect">
+            <a:avLst/>
+          </a:prstGeom>
+          <a:noFill/>
+        </p:spPr>
+        <p:txBody>
+          <a:bodyPr wrap="square" lIns="0" tIns="0" rIns="0" bIns="0" anchor="t">
+            <a:spAutoFit/>
+          </a:bodyPr>
+          <a:lstStyle/>
+          <a:p>
+            <a:pPr algn="l">
+              <a:spcAft>
+                <a:spcPts val="600"/>
+              </a:spcAft>
+            </a:pPr>
+            <a:r>
+              <a:rPr sz="1300" b="1">
+                <a:solidFill>
+                  <a:srgbClr val="EBEEF5"/>
+                </a:solidFill>
+                <a:latin typeface="微软雅黑"/>
+                <a:ea typeface="微软雅黑"/>
+              </a:rPr>
+              <a:t>项目数据</a:t>
+            </a:r>
+            <a:endParaRPr sz="1300" b="1">
+              <a:solidFill>
+                <a:srgbClr val="EBEEF5"/>
+              </a:solidFill>
+              <a:latin typeface="微软雅黑"/>
+              <a:ea typeface="微软雅黑"/>
+            </a:endParaRPr>
+          </a:p>
+        </p:txBody>
+      </p:sp>
+      <p:sp>
+        <p:nvSpPr>
+          <p:cNvPr id="23" name="Rounded Rectangle 22"/>
+          <p:cNvSpPr/>
+          <p:nvPr/>
+        </p:nvSpPr>
+        <p:spPr>
+          <a:xfrm>
+            <a:off x="1600200" y="5349240"/>
+            <a:ext cx="2286000" cy="457200"/>
+          </a:xfrm>
+          <a:prstGeom prst="roundRect">
+            <a:avLst/>
+          </a:prstGeom>
+          <a:solidFill>
+            <a:srgbClr val="1C2132"/>
+          </a:solidFill>
+          <a:ln w="12700">
+            <a:solidFill>
+              <a:srgbClr val="3E465E"/>
+            </a:solidFill>
+          </a:ln>
+          <a:effectLst/>
+        </p:spPr>
+        <p:style>
+          <a:lnRef idx="1">
+            <a:schemeClr val="accent1"/>
+          </a:lnRef>
+          <a:fillRef idx="3">
+            <a:schemeClr val="accent1"/>
+          </a:fillRef>
+          <a:effectRef idx="2">
+            <a:schemeClr val="accent1"/>
+          </a:effectRef>
+          <a:fontRef idx="minor">
+            <a:schemeClr val="lt1"/>
+          </a:fontRef>
+        </p:style>
+        <p:txBody>
+          <a:bodyPr wrap="square" lIns="73152" tIns="18288" rIns="73152" bIns="18288" rtlCol="0" anchor="ctr"/>
+          <a:lstStyle/>
+          <a:p>
+            <a:pPr algn="ctr"/>
+            <a:r>
+              <a:rPr sz="1150" b="0">
+                <a:solidFill>
+                  <a:srgbClr val="EBEEF5"/>
+                </a:solidFill>
+                <a:latin typeface="微软雅黑"/>
+                <a:ea typeface="微软雅黑"/>
+              </a:rPr>
+              <a:t>7 个模块</a:t>
+            </a:r>
+            <a:endParaRPr sz="1150" b="0">
+              <a:solidFill>
+                <a:srgbClr val="EBEEF5"/>
+              </a:solidFill>
+              <a:latin typeface="微软雅黑"/>
+              <a:ea typeface="微软雅黑"/>
+            </a:endParaRPr>
+          </a:p>
+        </p:txBody>
+      </p:sp>
+      <p:sp>
+        <p:nvSpPr>
+          <p:cNvPr id="24" name="Rounded Rectangle 23"/>
+          <p:cNvSpPr/>
+          <p:nvPr/>
+        </p:nvSpPr>
+        <p:spPr>
+          <a:xfrm>
+            <a:off x="4069080" y="5349240"/>
+            <a:ext cx="2286000" cy="457200"/>
+          </a:xfrm>
+          <a:prstGeom prst="roundRect">
+            <a:avLst/>
+          </a:prstGeom>
+          <a:solidFill>
+            <a:srgbClr val="1C2132"/>
+          </a:solidFill>
+          <a:ln w="12700">
+            <a:solidFill>
+              <a:srgbClr val="3E465E"/>
+            </a:solidFill>
+          </a:ln>
+          <a:effectLst/>
+        </p:spPr>
+        <p:style>
+          <a:lnRef idx="1">
+            <a:schemeClr val="accent1"/>
+          </a:lnRef>
+          <a:fillRef idx="3">
+            <a:schemeClr val="accent1"/>
+          </a:fillRef>
+          <a:effectRef idx="2">
+            <a:schemeClr val="accent1"/>
+          </a:effectRef>
+          <a:fontRef idx="minor">
+            <a:schemeClr val="lt1"/>
+          </a:fontRef>
+        </p:style>
+        <p:txBody>
+          <a:bodyPr wrap="square" lIns="73152" tIns="18288" rIns="73152" bIns="18288" rtlCol="0" anchor="ctr"/>
+          <a:lstStyle/>
+          <a:p>
+            <a:pPr algn="ctr"/>
+            <a:r>
+              <a:rPr sz="1150" b="0">
+                <a:solidFill>
+                  <a:srgbClr val="EBEEF5"/>
+                </a:solidFill>
+                <a:latin typeface="微软雅黑"/>
+                <a:ea typeface="微软雅黑"/>
+              </a:rPr>
+              <a:t>1326 行源码</a:t>
+            </a:r>
+            <a:endParaRPr sz="1150" b="0">
+              <a:solidFill>
+                <a:srgbClr val="EBEEF5"/>
+              </a:solidFill>
+              <a:latin typeface="微软雅黑"/>
+              <a:ea typeface="微软雅黑"/>
+            </a:endParaRPr>
+          </a:p>
+        </p:txBody>
+      </p:sp>
+      <p:sp>
+        <p:nvSpPr>
+          <p:cNvPr id="25" name="Rounded Rectangle 24"/>
+          <p:cNvSpPr/>
+          <p:nvPr/>
+        </p:nvSpPr>
+        <p:spPr>
+          <a:xfrm>
+            <a:off x="6537960" y="5349240"/>
+            <a:ext cx="2286000" cy="457200"/>
+          </a:xfrm>
+          <a:prstGeom prst="roundRect">
+            <a:avLst/>
+          </a:prstGeom>
+          <a:solidFill>
+            <a:srgbClr val="1C2132"/>
+          </a:solidFill>
+          <a:ln w="12700">
+            <a:solidFill>
+              <a:srgbClr val="3E465E"/>
+            </a:solidFill>
+          </a:ln>
+          <a:effectLst/>
+        </p:spPr>
+        <p:style>
+          <a:lnRef idx="1">
+            <a:schemeClr val="accent1"/>
+          </a:lnRef>
+          <a:fillRef idx="3">
+            <a:schemeClr val="accent1"/>
+          </a:fillRef>
+          <a:effectRef idx="2">
+            <a:schemeClr val="accent1"/>
+          </a:effectRef>
+          <a:fontRef idx="minor">
+            <a:schemeClr val="lt1"/>
+          </a:fontRef>
+        </p:style>
+        <p:txBody>
+          <a:bodyPr wrap="square" lIns="73152" tIns="18288" rIns="73152" bIns="18288" rtlCol="0" anchor="ctr"/>
+          <a:lstStyle/>
+          <a:p>
+            <a:pPr algn="ctr"/>
+            <a:r>
+              <a:rPr sz="1150" b="0">
+                <a:solidFill>
+                  <a:srgbClr val="EBEEF5"/>
+                </a:solidFill>
+                <a:latin typeface="微软雅黑"/>
+                <a:ea typeface="微软雅黑"/>
+              </a:rPr>
+              <a:t>108 个测试</a:t>
+            </a:r>
+            <a:endParaRPr sz="1150" b="0">
+              <a:solidFill>
+                <a:srgbClr val="EBEEF5"/>
+              </a:solidFill>
+              <a:latin typeface="微软雅黑"/>
+              <a:ea typeface="微软雅黑"/>
+            </a:endParaRPr>
+          </a:p>
+        </p:txBody>
+      </p:sp>
+      <p:sp>
+        <p:nvSpPr>
+          <p:cNvPr id="26" name="Rounded Rectangle 25"/>
+          <p:cNvSpPr/>
+          <p:nvPr/>
+        </p:nvSpPr>
+        <p:spPr>
+          <a:xfrm>
+            <a:off x="9006840" y="5349240"/>
+            <a:ext cx="2286000" cy="457200"/>
+          </a:xfrm>
+          <a:prstGeom prst="roundRect">
+            <a:avLst/>
+          </a:prstGeom>
+          <a:solidFill>
+            <a:srgbClr val="1C2132"/>
+          </a:solidFill>
+          <a:ln w="12700">
+            <a:solidFill>
+              <a:srgbClr val="3E465E"/>
+            </a:solidFill>
+          </a:ln>
+          <a:effectLst/>
+        </p:spPr>
+        <p:style>
+          <a:lnRef idx="1">
+            <a:schemeClr val="accent1"/>
+          </a:lnRef>
+          <a:fillRef idx="3">
+            <a:schemeClr val="accent1"/>
+          </a:fillRef>
+          <a:effectRef idx="2">
+            <a:schemeClr val="accent1"/>
+          </a:effectRef>
+          <a:fontRef idx="minor">
+            <a:schemeClr val="lt1"/>
+          </a:fontRef>
+        </p:style>
+        <p:txBody>
+          <a:bodyPr wrap="square" lIns="73152" tIns="18288" rIns="73152" bIns="18288" rtlCol="0" anchor="ctr"/>
+          <a:lstStyle/>
+          <a:p>
+            <a:pPr algn="ctr"/>
+            <a:r>
+              <a:rPr sz="1150" b="0">
+                <a:solidFill>
+                  <a:srgbClr val="EBEEF5"/>
+                </a:solidFill>
+                <a:latin typeface="微软雅黑"/>
+                <a:ea typeface="微软雅黑"/>
+              </a:rPr>
+              <a:t>2 个关卡</a:t>
+            </a:r>
+            <a:endParaRPr sz="1150" b="0">
+              <a:solidFill>
+                <a:srgbClr val="EBEEF5"/>
+              </a:solidFill>
+              <a:latin typeface="微软雅黑"/>
+              <a:ea typeface="微软雅黑"/>
+            </a:endParaRPr>
+          </a:p>
+        </p:txBody>
+      </p:sp>
+      <p:sp>
+        <p:nvSpPr>
+          <p:cNvPr id="9" name="Rectangle 8"/>
+          <p:cNvSpPr/>
+          <p:nvPr/>
+        </p:nvSpPr>
+        <p:spPr>
+          <a:xfrm>
+            <a:off x="502920" y="2578608"/>
+            <a:ext cx="2286000" cy="868680"/>
+          </a:xfrm>
+          <a:prstGeom prst="rect">
+            <a:avLst/>
+          </a:prstGeom>
+          <a:solidFill>
+            <a:srgbClr val="1C2132"/>
+          </a:solidFill>
+          <a:ln w="9525">
+            <a:solidFill>
+              <a:srgbClr val="3E465E"/>
+            </a:solidFill>
+          </a:ln>
+          <a:effectLst/>
+        </p:spPr>
+        <p:style>
+          <a:lnRef idx="1">
+            <a:schemeClr val="accent1"/>
+          </a:lnRef>
+          <a:fillRef idx="3">
+            <a:schemeClr val="accent1"/>
+          </a:fillRef>
+          <a:effectRef idx="2">
+            <a:schemeClr val="accent1"/>
+          </a:effectRef>
+          <a:fontRef idx="minor">
+            <a:schemeClr val="lt1"/>
+          </a:fontRef>
+        </p:style>
+        <p:txBody>
+          <a:bodyPr wrap="square" lIns="128016" tIns="18288" rIns="137160" bIns="18288" rtlCol="0" anchor="ctr"/>
+          <a:lstStyle/>
+          <a:p>
+            <a:pPr algn="l"/>
+            <a:r>
+              <a:rPr sz="1600" b="1">
+                <a:solidFill>
+                  <a:srgbClr val="EBEEF5"/>
+                </a:solidFill>
+                <a:latin typeface="微软雅黑"/>
+              </a:rPr>
+              <a:t>选做</a:t>
+            </a:r>
+            <a:endParaRPr sz="1300" b="1">
+              <a:solidFill>
+                <a:srgbClr val="EBEEF5"/>
+              </a:solidFill>
+              <a:latin typeface="微软雅黑"/>
+              <a:ea typeface="微软雅黑"/>
+            </a:endParaRPr>
+          </a:p>
+          <a:p>
+            <a:pPr algn="l"/>
+            <a:r>
+              <a:rPr sz="1050" b="0">
+                <a:solidFill>
+                  <a:srgbClr val="98A2B8"/>
+                </a:solidFill>
+                <a:latin typeface="微软雅黑"/>
+              </a:rPr>
+              <a:t>1 / 3</a:t>
+            </a:r>
+            <a:endParaRPr sz="1100" b="0">
+              <a:solidFill>
+                <a:srgbClr val="98A2B8"/>
+              </a:solidFill>
+              <a:latin typeface="微软雅黑"/>
+            </a:endParaRPr>
+          </a:p>
+        </p:txBody>
+      </p:sp>
+      <p:sp>
+        <p:nvSpPr>
+          <p:cNvPr id="10" name="Rectangle 9"/>
+          <p:cNvSpPr/>
+          <p:nvPr/>
+        </p:nvSpPr>
+        <p:spPr>
+          <a:xfrm>
+            <a:off x="2788920" y="2578608"/>
+            <a:ext cx="6263640" cy="868680"/>
+          </a:xfrm>
+          <a:prstGeom prst="rect">
+            <a:avLst/>
+          </a:prstGeom>
+          <a:solidFill>
+            <a:srgbClr val="1C2132"/>
+          </a:solidFill>
+          <a:ln w="9525">
+            <a:solidFill>
+              <a:srgbClr val="3E465E"/>
+            </a:solidFill>
+          </a:ln>
+          <a:effectLst/>
+        </p:spPr>
+        <p:style>
+          <a:lnRef idx="1">
+            <a:schemeClr val="accent1"/>
+          </a:lnRef>
+          <a:fillRef idx="3">
+            <a:schemeClr val="accent1"/>
+          </a:fillRef>
+          <a:effectRef idx="2">
+            <a:schemeClr val="accent1"/>
+          </a:effectRef>
+          <a:fontRef idx="minor">
+            <a:schemeClr val="lt1"/>
+          </a:fontRef>
+        </p:style>
+        <p:txBody>
+          <a:bodyPr wrap="square" lIns="137160" tIns="18288" rIns="137160" bIns="18288" rtlCol="0" anchor="ctr"/>
+          <a:lstStyle/>
+          <a:p>
+            <a:pPr algn="l">
+              <a:spcAft>
+                <a:spcPts val="500"/>
+              </a:spcAft>
+            </a:pPr>
+            <a:r>
+              <a:rPr sz="1100" b="0">
+                <a:solidFill>
+                  <a:srgbClr val="EBEEF5"/>
+                </a:solidFill>
+                <a:latin typeface="微软雅黑"/>
+              </a:rPr>
+              <a:t>▪ 撤销 / 重置 —— ✅ 提前完成（纯函数 + 快照）</a:t>
+            </a:r>
+            <a:endParaRPr sz="1150" b="0">
+              <a:solidFill>
+                <a:srgbClr val="EBEEF5"/>
+              </a:solidFill>
+              <a:latin typeface="微软雅黑"/>
+              <a:ea typeface="微软雅黑"/>
+            </a:endParaRPr>
+          </a:p>
+          <a:p>
+            <a:pPr algn="l">
+              <a:spcAft>
+                <a:spcPts val="500"/>
+              </a:spcAft>
+            </a:pPr>
+            <a:r>
+              <a:rPr sz="1100" b="0">
+                <a:solidFill>
+                  <a:srgbClr val="EBEEF5"/>
+                </a:solidFill>
+                <a:latin typeface="微软雅黑"/>
+              </a:rPr>
+              <a:t>▪ 通关计时 —— 未做</a:t>
+            </a:r>
+            <a:endParaRPr sz="1150" b="0">
+              <a:solidFill>
+                <a:srgbClr val="EBEEF5"/>
+              </a:solidFill>
+              <a:latin typeface="微软雅黑"/>
+            </a:endParaRPr>
+          </a:p>
+          <a:p>
+            <a:pPr algn="l">
+              <a:spcAft>
+                <a:spcPts val="500"/>
+              </a:spcAft>
+            </a:pPr>
+            <a:r>
+              <a:rPr sz="1100" b="0">
+                <a:solidFill>
+                  <a:srgbClr val="EBEEF5"/>
+                </a:solidFill>
+                <a:latin typeface="微软雅黑"/>
+              </a:rPr>
+              <a:t>▪ 简单音效 —— 未做</a:t>
+            </a:r>
+            <a:endParaRPr sz="1150" b="0">
+              <a:solidFill>
+                <a:srgbClr val="EBEEF5"/>
+              </a:solidFill>
+              <a:latin typeface="微软雅黑"/>
+            </a:endParaRPr>
+          </a:p>
+        </p:txBody>
+      </p:sp>
+      <p:sp>
+        <p:nvSpPr>
+          <p:cNvPr id="11" name="Rectangle 10"/>
+          <p:cNvSpPr/>
+          <p:nvPr/>
+        </p:nvSpPr>
+        <p:spPr>
+          <a:xfrm>
+            <a:off x="9052560" y="2578608"/>
+            <a:ext cx="2651760" cy="868680"/>
+          </a:xfrm>
+          <a:prstGeom prst="rect">
+            <a:avLst/>
+          </a:prstGeom>
+          <a:solidFill>
+            <a:srgbClr val="1C2132"/>
+          </a:solidFill>
+          <a:ln w="9525">
+            <a:solidFill>
+              <a:srgbClr val="3E465E"/>
+            </a:solidFill>
+          </a:ln>
+          <a:effectLst/>
+        </p:spPr>
+        <p:style>
+          <a:lnRef idx="1">
+            <a:schemeClr val="accent1"/>
+          </a:lnRef>
+          <a:fillRef idx="3">
+            <a:schemeClr val="accent1"/>
+          </a:fillRef>
+          <a:effectRef idx="2">
+            <a:schemeClr val="accent1"/>
+          </a:effectRef>
+          <a:fontRef idx="minor">
+            <a:schemeClr val="lt1"/>
+          </a:fontRef>
+        </p:style>
+        <p:txBody>
+          <a:bodyPr wrap="square" lIns="73152" tIns="18288" rIns="73152" bIns="18288" rtlCol="0" anchor="ctr"/>
+          <a:lstStyle/>
+          <a:p>
+            <a:pPr algn="ctr"/>
+            <a:r>
+              <a:rPr sz="1400" b="1">
+                <a:solidFill>
+                  <a:srgbClr val="6CC77A"/>
+                </a:solidFill>
+                <a:latin typeface="微软雅黑"/>
+              </a:rPr>
+              <a:t>✅ 1 / 3</a:t>
+            </a:r>
+            <a:endParaRPr sz="1250" b="1">
+              <a:solidFill>
+                <a:srgbClr val="6CC77A"/>
+              </a:solidFill>
+              <a:latin typeface="微软雅黑"/>
+              <a:ea typeface="微软雅黑"/>
+            </a:endParaRPr>
+          </a:p>
+        </p:txBody>
+      </p:sp>
+      <p:sp>
+        <p:nvSpPr>
+          <p:cNvPr id="9" name="Rectangle 8"/>
+          <p:cNvSpPr/>
+          <p:nvPr/>
+        </p:nvSpPr>
+        <p:spPr>
+          <a:xfrm>
+            <a:off x="502920" y="3511296"/>
+            <a:ext cx="2286000" cy="868680"/>
+          </a:xfrm>
+          <a:prstGeom prst="rect">
+            <a:avLst/>
+          </a:prstGeom>
+          <a:solidFill>
+            <a:srgbClr val="1C2132"/>
+          </a:solidFill>
+          <a:ln w="9525">
+            <a:solidFill>
+              <a:srgbClr val="3E465E"/>
+            </a:solidFill>
+          </a:ln>
+          <a:effectLst/>
+        </p:spPr>
+        <p:style>
+          <a:lnRef idx="1">
+            <a:schemeClr val="accent1"/>
+          </a:lnRef>
+          <a:fillRef idx="3">
+            <a:schemeClr val="accent1"/>
+          </a:fillRef>
+          <a:effectRef idx="2">
+            <a:schemeClr val="accent1"/>
+          </a:effectRef>
+          <a:fontRef idx="minor">
+            <a:schemeClr val="lt1"/>
+          </a:fontRef>
+        </p:style>
+        <p:txBody>
+          <a:bodyPr wrap="square" lIns="128016" tIns="18288" rIns="137160" bIns="18288" rtlCol="0" anchor="ctr"/>
+          <a:lstStyle/>
+          <a:p>
+            <a:pPr algn="l"/>
+            <a:r>
+              <a:rPr sz="1600" b="1">
+                <a:solidFill>
+                  <a:srgbClr val="EBEEF5"/>
+                </a:solidFill>
+                <a:latin typeface="微软雅黑"/>
+              </a:rPr>
+              <a:t>超出开题预期</a:t>
+            </a:r>
+            <a:endParaRPr sz="1300" b="1">
+              <a:solidFill>
+                <a:srgbClr val="EBEEF5"/>
+              </a:solidFill>
+              <a:latin typeface="微软雅黑"/>
+              <a:ea typeface="微软雅黑"/>
+            </a:endParaRPr>
+          </a:p>
+          <a:p>
+            <a:pPr algn="l"/>
+            <a:r>
+              <a:rPr sz="1050" b="0">
+                <a:solidFill>
+                  <a:srgbClr val="98A2B8"/>
+                </a:solidFill>
+                <a:latin typeface="微软雅黑"/>
+              </a:rPr>
+              <a:t>6 项</a:t>
+            </a:r>
+            <a:endParaRPr sz="1100" b="0">
+              <a:solidFill>
+                <a:srgbClr val="98A2B8"/>
+              </a:solidFill>
+              <a:latin typeface="微软雅黑"/>
+            </a:endParaRPr>
+          </a:p>
+        </p:txBody>
+      </p:sp>
+      <p:sp>
+        <p:nvSpPr>
+          <p:cNvPr id="10" name="Rectangle 9"/>
+          <p:cNvSpPr/>
+          <p:nvPr/>
+        </p:nvSpPr>
+        <p:spPr>
+          <a:xfrm>
+            <a:off x="2788920" y="3511296"/>
+            <a:ext cx="6263640" cy="868680"/>
+          </a:xfrm>
+          <a:prstGeom prst="rect">
+            <a:avLst/>
+          </a:prstGeom>
+          <a:solidFill>
+            <a:srgbClr val="1C2132"/>
+          </a:solidFill>
+          <a:ln w="9525">
+            <a:solidFill>
+              <a:srgbClr val="3E465E"/>
+            </a:solidFill>
+          </a:ln>
+          <a:effectLst/>
+        </p:spPr>
+        <p:style>
+          <a:lnRef idx="1">
+            <a:schemeClr val="accent1"/>
+          </a:lnRef>
+          <a:fillRef idx="3">
+            <a:schemeClr val="accent1"/>
+          </a:fillRef>
+          <a:effectRef idx="2">
+            <a:schemeClr val="accent1"/>
+          </a:effectRef>
+          <a:fontRef idx="minor">
+            <a:schemeClr val="lt1"/>
+          </a:fontRef>
+        </p:style>
+        <p:txBody>
+          <a:bodyPr wrap="square" lIns="137160" tIns="18288" rIns="137160" bIns="18288" rtlCol="0" anchor="ctr"/>
+          <a:lstStyle/>
+          <a:p>
+            <a:pPr algn="l">
+              <a:spcAft>
+                <a:spcPts val="500"/>
+              </a:spcAft>
+            </a:pPr>
+            <a:r>
+              <a:rPr sz="1100" b="0">
+                <a:solidFill>
+                  <a:srgbClr val="EBEEF5"/>
+                </a:solidFill>
+                <a:latin typeface="微软雅黑"/>
+              </a:rPr>
+              <a:t>▪ 嵌套不限层数 + 自引用校验 / 双向穿口与吞食</a:t>
+            </a:r>
+            <a:endParaRPr sz="1150" b="0">
+              <a:solidFill>
+                <a:srgbClr val="EBEEF5"/>
+              </a:solidFill>
+              <a:latin typeface="微软雅黑"/>
+              <a:ea typeface="微软雅黑"/>
+            </a:endParaRPr>
+          </a:p>
+          <a:p>
+            <a:pPr algn="l">
+              <a:spcAft>
+                <a:spcPts val="500"/>
+              </a:spcAft>
+            </a:pPr>
+            <a:r>
+              <a:rPr sz="1100" b="0">
+                <a:solidFill>
+                  <a:srgbClr val="EBEEF5"/>
+                </a:solidFill>
+                <a:latin typeface="微软雅黑"/>
+              </a:rPr>
+              <a:t>▪ 双条件判定点（箱子 g + 玩家 G）</a:t>
+            </a:r>
+            <a:endParaRPr sz="1150" b="0">
+              <a:solidFill>
+                <a:srgbClr val="EBEEF5"/>
+              </a:solidFill>
+              <a:latin typeface="微软雅黑"/>
+            </a:endParaRPr>
+          </a:p>
+          <a:p>
+            <a:pPr algn="l">
+              <a:spcAft>
+                <a:spcPts val="500"/>
+              </a:spcAft>
+            </a:pPr>
+            <a:r>
+              <a:rPr sz="1100" b="0">
+                <a:solidFill>
+                  <a:srgbClr val="EBEEF5"/>
+                </a:solidFill>
+                <a:latin typeface="微软雅黑"/>
+              </a:rPr>
+              <a:t>▪ BFS 解算器 + 108 个自动化测试 + 文档一致性校验</a:t>
+            </a:r>
+            <a:endParaRPr sz="1150" b="0">
+              <a:solidFill>
+                <a:srgbClr val="EBEEF5"/>
+              </a:solidFill>
+              <a:latin typeface="微软雅黑"/>
+            </a:endParaRPr>
+          </a:p>
+        </p:txBody>
+      </p:sp>
+      <p:sp>
+        <p:nvSpPr>
+          <p:cNvPr id="11" name="Rectangle 10"/>
+          <p:cNvSpPr/>
+          <p:nvPr/>
+        </p:nvSpPr>
+        <p:spPr>
+          <a:xfrm>
+            <a:off x="9052560" y="3511296"/>
+            <a:ext cx="2651760" cy="868680"/>
+          </a:xfrm>
+          <a:prstGeom prst="rect">
+            <a:avLst/>
+          </a:prstGeom>
+          <a:solidFill>
+            <a:srgbClr val="1C2132"/>
+          </a:solidFill>
+          <a:ln w="9525">
+            <a:solidFill>
+              <a:srgbClr val="3E465E"/>
+            </a:solidFill>
+          </a:ln>
+          <a:effectLst/>
+        </p:spPr>
+        <p:style>
+          <a:lnRef idx="1">
+            <a:schemeClr val="accent1"/>
+          </a:lnRef>
+          <a:fillRef idx="3">
+            <a:schemeClr val="accent1"/>
+          </a:fillRef>
+          <a:effectRef idx="2">
+            <a:schemeClr val="accent1"/>
+          </a:effectRef>
+          <a:fontRef idx="minor">
+            <a:schemeClr val="lt1"/>
+          </a:fontRef>
+        </p:style>
+        <p:txBody>
+          <a:bodyPr wrap="square" lIns="73152" tIns="18288" rIns="73152" bIns="18288" rtlCol="0" anchor="ctr"/>
+          <a:lstStyle/>
+          <a:p>
+            <a:pPr algn="ctr"/>
+            <a:r>
+              <a:rPr sz="1400" b="1">
+                <a:solidFill>
+                  <a:srgbClr val="6CC77A"/>
+                </a:solidFill>
+                <a:latin typeface="微软雅黑"/>
+              </a:rPr>
+              <a:t>⭐ 加分</a:t>
+            </a:r>
+            <a:endParaRPr sz="1250" b="1">
+              <a:solidFill>
+                <a:srgbClr val="6CC77A"/>
+              </a:solidFill>
+              <a:latin typeface="微软雅黑"/>
+              <a:ea typeface="微软雅黑"/>
+            </a:endParaRPr>
+          </a:p>
+        </p:txBody>
+      </p:sp>
+    </p:spTree>
+  </p:cSld>
+  <p:clrMapOvr>
+    <a:masterClrMapping/>
+  </p:clrMapOvr>
+</p:sld>
+</file>
+
+<file path=ppt/slides/slide18.xml><?xml version="1.0" encoding="utf-8"?>
+<p:sld xmlns:a="http://schemas.openxmlformats.org/drawingml/2006/main" xmlns:p="http://schemas.openxmlformats.org/presentationml/2006/main" xmlns:r="http://schemas.openxmlformats.org/officeDocument/2006/relationships">
+  <p:cSld>
+    <p:bg>
+      <p:bgPr>
+        <a:solidFill>
+          <a:srgbClr val="111420"/>
+        </a:solidFill>
+        <a:effectLst/>
+      </p:bgPr>
+    </p:bg>
+    <p:spTree>
+      <p:nvGrpSpPr>
+        <p:cNvPr id="1" name=""/>
+        <p:cNvGrpSpPr/>
+        <p:nvPr/>
+      </p:nvGrpSpPr>
+      <p:grpSpPr/>
+      <p:sp>
+        <p:nvSpPr>
+          <p:cNvPr id="2" name="TextBox 1"/>
+          <p:cNvSpPr txBox="1"/>
+          <p:nvPr/>
+        </p:nvSpPr>
+        <p:spPr>
+          <a:xfrm>
+            <a:off x="502920" y="292608"/>
+            <a:ext cx="10058400" cy="640080"/>
+          </a:xfrm>
+          <a:prstGeom prst="rect">
+            <a:avLst/>
+          </a:prstGeom>
+          <a:noFill/>
+        </p:spPr>
+        <p:txBody>
+          <a:bodyPr wrap="square" lIns="0" tIns="0" rIns="0" bIns="0" anchor="t">
+            <a:spAutoFit/>
+          </a:bodyPr>
+          <a:lstStyle/>
+          <a:p>
+            <a:pPr algn="l">
+              <a:spcAft>
+                <a:spcPts val="600"/>
+              </a:spcAft>
+            </a:pPr>
+            <a:r>
+              <a:rPr sz="2600" b="1">
+                <a:solidFill>
+                  <a:srgbClr val="EBEEF5"/>
+                </a:solidFill>
+                <a:latin typeface="微软雅黑"/>
+                <a:ea typeface="微软雅黑"/>
+              </a:rPr>
+              <a:t>人员分工 · 演示与总结</a:t>
+            </a:r>
+            <a:endParaRPr sz="2600" b="1">
+              <a:solidFill>
+                <a:srgbClr val="EBEEF5"/>
+              </a:solidFill>
+              <a:latin typeface="微软雅黑"/>
+              <a:ea typeface="微软雅黑"/>
+            </a:endParaRPr>
+          </a:p>
+        </p:txBody>
+      </p:sp>
+      <p:sp>
+        <p:nvSpPr>
+          <p:cNvPr id="3" name="Rectangle 2"/>
+          <p:cNvSpPr/>
+          <p:nvPr/>
+        </p:nvSpPr>
+        <p:spPr>
+          <a:xfrm>
+            <a:off x="521207" y="950976"/>
+            <a:ext cx="822960" cy="41148"/>
+          </a:xfrm>
+          <a:prstGeom prst="rect">
+            <a:avLst/>
+          </a:prstGeom>
+          <a:solidFill>
+            <a:srgbClr val="F5A623"/>
+          </a:solidFill>
+          <a:ln>
+            <a:noFill/>
+          </a:ln>
+          <a:effectLst/>
+        </p:spPr>
+        <p:style>
+          <a:lnRef idx="1">
+            <a:schemeClr val="accent1"/>
+          </a:lnRef>
+          <a:fillRef idx="3">
+            <a:schemeClr val="accent1"/>
+          </a:fillRef>
+          <a:effectRef idx="2">
+            <a:schemeClr val="accent1"/>
+          </a:effectRef>
+          <a:fontRef idx="minor">
+            <a:schemeClr val="lt1"/>
+          </a:fontRef>
+        </p:style>
+        <p:txBody>
+          <a:bodyPr rtlCol="0" anchor="ctr"/>
+          <a:lstStyle/>
+          <a:p>
+            <a:pPr algn="ctr"/>
+          </a:p>
+        </p:txBody>
+      </p:sp>
+      <p:sp>
+        <p:nvSpPr>
+          <p:cNvPr id="4" name="TextBox 3"/>
+          <p:cNvSpPr txBox="1"/>
+          <p:nvPr/>
+        </p:nvSpPr>
+        <p:spPr>
+          <a:xfrm>
+            <a:off x="502920" y="6473952"/>
+            <a:ext cx="5486400" cy="292608"/>
+          </a:xfrm>
+          <a:prstGeom prst="rect">
+            <a:avLst/>
+          </a:prstGeom>
+          <a:noFill/>
+        </p:spPr>
+        <p:txBody>
+          <a:bodyPr wrap="square" lIns="0" tIns="0" rIns="0" bIns="0" anchor="t">
+            <a:spAutoFit/>
+          </a:bodyPr>
+          <a:lstStyle/>
+          <a:p>
+            <a:pPr algn="l">
+              <a:spcAft>
+                <a:spcPts val="600"/>
+              </a:spcAft>
+            </a:pPr>
+            <a:r>
+              <a:rPr sz="900" b="0">
+                <a:solidFill>
+                  <a:srgbClr val="98A2B8"/>
+                </a:solidFill>
+                <a:latin typeface="微软雅黑"/>
+                <a:ea typeface="微软雅黑"/>
+              </a:rPr>
+              <a:t>董长坤 · 《递归之箱》结课汇报</a:t>
+            </a:r>
+            <a:endParaRPr sz="900" b="0">
+              <a:solidFill>
+                <a:srgbClr val="98A2B8"/>
+              </a:solidFill>
+              <a:latin typeface="微软雅黑"/>
+              <a:ea typeface="微软雅黑"/>
+            </a:endParaRPr>
+          </a:p>
+        </p:txBody>
+      </p:sp>
+      <p:sp>
+        <p:nvSpPr>
+          <p:cNvPr id="5" name="TextBox 4"/>
+          <p:cNvSpPr txBox="1"/>
+          <p:nvPr/>
+        </p:nvSpPr>
+        <p:spPr>
+          <a:xfrm>
+            <a:off x="11247120" y="6473952"/>
+            <a:ext cx="822960" cy="292608"/>
+          </a:xfrm>
+          <a:prstGeom prst="rect">
+            <a:avLst/>
+          </a:prstGeom>
+          <a:noFill/>
+        </p:spPr>
+        <p:txBody>
+          <a:bodyPr wrap="square" lIns="0" tIns="0" rIns="0" bIns="0" anchor="t">
+            <a:spAutoFit/>
+          </a:bodyPr>
+          <a:lstStyle/>
+          <a:p>
+            <a:pPr algn="r">
+              <a:spcAft>
+                <a:spcPts val="600"/>
+              </a:spcAft>
+            </a:pPr>
+            <a:r>
+              <a:rPr sz="900" b="0">
+                <a:solidFill>
+                  <a:srgbClr val="98A2B8"/>
+                </a:solidFill>
+                <a:latin typeface="微软雅黑"/>
+                <a:ea typeface="微软雅黑"/>
+              </a:rPr>
+              <a:t>13 / 13</a:t>
+            </a:r>
+            <a:endParaRPr sz="900" b="0">
+              <a:solidFill>
+                <a:srgbClr val="98A2B8"/>
+              </a:solidFill>
+              <a:latin typeface="微软雅黑"/>
+              <a:ea typeface="微软雅黑"/>
+            </a:endParaRPr>
+          </a:p>
+        </p:txBody>
+      </p:sp>
+      <p:sp>
+        <p:nvSpPr>
+          <p:cNvPr id="6" name="TextBox 5"/>
+          <p:cNvSpPr txBox="1"/>
+          <p:nvPr/>
+        </p:nvSpPr>
+        <p:spPr>
+          <a:xfrm>
+            <a:off x="502920" y="1234440"/>
+            <a:ext cx="5577840" cy="2590165"/>
+          </a:xfrm>
+          <a:prstGeom prst="rect">
+            <a:avLst/>
+          </a:prstGeom>
+          <a:noFill/>
+        </p:spPr>
+        <p:txBody>
+          <a:bodyPr wrap="square" lIns="0" tIns="0" rIns="0" bIns="0" anchor="t">
+            <a:spAutoFit/>
+          </a:bodyPr>
+          <a:lstStyle/>
+          <a:p>
+            <a:pPr algn="l">
+              <a:spcAft>
+                <a:spcPts val="1000"/>
+              </a:spcAft>
+            </a:pPr>
+            <a:r>
+              <a:rPr sz="1350" b="1">
+                <a:solidFill>
+                  <a:srgbClr val="F5A623"/>
+                </a:solidFill>
+                <a:latin typeface="微软雅黑"/>
+                <a:ea typeface="微软雅黑"/>
+              </a:rPr>
+              <a:t>单人项目：完成人 董长坤</a:t>
+            </a:r>
+            <a:endParaRPr sz="1600" b="1">
+              <a:solidFill>
+                <a:srgbClr val="F5A623"/>
+              </a:solidFill>
+              <a:latin typeface="微软雅黑"/>
+              <a:ea typeface="微软雅黑"/>
+            </a:endParaRPr>
+          </a:p>
+          <a:p>
+            <a:pPr algn="l">
+              <a:spcAft>
+                <a:spcPts val="1000"/>
+              </a:spcAft>
+            </a:pPr>
+            <a:r>
+              <a:rPr sz="1250" b="0">
+                <a:solidFill>
+                  <a:srgbClr val="EBEEF5"/>
+                </a:solidFill>
+                <a:latin typeface="微软雅黑"/>
+                <a:ea typeface="微软雅黑"/>
+              </a:rPr>
+              <a:t>▪  需求、机制、编码、测试、文档、演示全部独立完成</a:t>
+            </a:r>
+            <a:endParaRPr sz="1300" b="0">
+              <a:solidFill>
+                <a:srgbClr val="EBEEF5"/>
+              </a:solidFill>
+              <a:latin typeface="微软雅黑"/>
+              <a:ea typeface="微软雅黑"/>
+            </a:endParaRPr>
+          </a:p>
+          <a:p>
+            <a:pPr algn="l">
+              <a:spcAft>
+                <a:spcPts val="1000"/>
+              </a:spcAft>
+            </a:pPr>
+            <a:r>
+              <a:rPr sz="1250" b="0">
+                <a:solidFill>
+                  <a:srgbClr val="EBEEF5"/>
+                </a:solidFill>
+                <a:latin typeface="微软雅黑"/>
+                <a:ea typeface="微软雅黑"/>
+              </a:rPr>
+              <a:t>▪  两周交付 2 个关卡 + 7 个模块 + 108 个测试 + 4 份机制文档</a:t>
+            </a:r>
+            <a:endParaRPr sz="1300" b="0">
+              <a:solidFill>
+                <a:srgbClr val="EBEEF5"/>
+              </a:solidFill>
+              <a:latin typeface="微软雅黑"/>
+              <a:ea typeface="微软雅黑"/>
+            </a:endParaRPr>
+          </a:p>
+          <a:p>
+            <a:pPr algn="l">
+              <a:spcAft>
+                <a:spcPts val="1000"/>
+              </a:spcAft>
+            </a:pPr>
+            <a:r>
+              <a:rPr sz="1250" b="0">
+                <a:solidFill>
+                  <a:srgbClr val="EBEEF5"/>
+                </a:solidFill>
+                <a:latin typeface="微软雅黑"/>
+                <a:ea typeface="微软雅黑"/>
+              </a:rPr>
+              <a:t>▪  精力分配：机制与文档约 40%，实现约 35%，测试与验证约 25%</a:t>
+            </a:r>
+            <a:endParaRPr sz="1300" b="0">
+              <a:solidFill>
+                <a:srgbClr val="EBEEF5"/>
+              </a:solidFill>
+              <a:latin typeface="微软雅黑"/>
+              <a:ea typeface="微软雅黑"/>
+            </a:endParaRPr>
+          </a:p>
+          <a:p>
+            <a:pPr algn="l">
+              <a:spcAft>
+                <a:spcPts val="1000"/>
+              </a:spcAft>
+            </a:pPr>
+            <a:r>
+              <a:rPr sz="1350" b="1">
+                <a:solidFill>
+                  <a:srgbClr val="F5A623"/>
+                </a:solidFill>
+                <a:latin typeface="微软雅黑"/>
+                <a:ea typeface="微软雅黑"/>
+              </a:rPr>
+              <a:t>与 AI 的分工</a:t>
+            </a:r>
+            <a:endParaRPr sz="1600" b="1">
+              <a:solidFill>
+                <a:srgbClr val="F5A623"/>
+              </a:solidFill>
+              <a:latin typeface="微软雅黑"/>
+              <a:ea typeface="微软雅黑"/>
+            </a:endParaRPr>
+          </a:p>
+          <a:p>
+            <a:pPr algn="l">
+              <a:spcAft>
+                <a:spcPts val="1000"/>
+              </a:spcAft>
+            </a:pPr>
+            <a:r>
+              <a:rPr sz="1250" b="0">
+                <a:solidFill>
+                  <a:srgbClr val="EBEEF5"/>
+                </a:solidFill>
+                <a:latin typeface="微软雅黑"/>
+                <a:ea typeface="微软雅黑"/>
+              </a:rPr>
+              <a:t>▪  AI：代码生成、文档校对、解算器原型、关卡数据转换</a:t>
+            </a:r>
+            <a:endParaRPr sz="1300" b="0">
+              <a:solidFill>
+                <a:srgbClr val="EBEEF5"/>
+              </a:solidFill>
+              <a:latin typeface="微软雅黑"/>
+              <a:ea typeface="微软雅黑"/>
+            </a:endParaRPr>
+          </a:p>
+          <a:p>
+            <a:pPr algn="l">
+              <a:spcAft>
+                <a:spcPts val="1000"/>
+              </a:spcAft>
+            </a:pPr>
+            <a:r>
+              <a:rPr sz="1250" b="0">
+                <a:solidFill>
+                  <a:srgbClr val="EBEEF5"/>
+                </a:solidFill>
+                <a:latin typeface="微软雅黑"/>
+                <a:ea typeface="微软雅黑"/>
+              </a:rPr>
+              <a:t>▪  我：定机制、定优先级、验收观感与手感、决定取舍</a:t>
+            </a:r>
+            <a:endParaRPr sz="1300" b="0">
+              <a:solidFill>
+                <a:srgbClr val="EBEEF5"/>
+              </a:solidFill>
+              <a:latin typeface="微软雅黑"/>
+              <a:ea typeface="微软雅黑"/>
+            </a:endParaRPr>
+          </a:p>
+          <a:p>
+            <a:pPr algn="l">
+              <a:spcAft>
+                <a:spcPts val="1000"/>
+              </a:spcAft>
+            </a:pPr>
+            <a:r>
+              <a:rPr sz="1350" b="1">
+                <a:solidFill>
+                  <a:srgbClr val="F5A623"/>
+                </a:solidFill>
+                <a:latin typeface="微软雅黑"/>
+                <a:ea typeface="微软雅黑"/>
+              </a:rPr>
+              <a:t>现场演示（约 2 分钟）</a:t>
+            </a:r>
+            <a:endParaRPr sz="1300" b="0">
+              <a:solidFill>
+                <a:srgbClr val="EBEEF5"/>
+              </a:solidFill>
+              <a:latin typeface="微软雅黑"/>
+              <a:ea typeface="微软雅黑"/>
+            </a:endParaRPr>
+          </a:p>
+          <a:p>
+            <a:pPr algn="l">
+              <a:spcAft>
+                <a:spcPts val="1000"/>
+              </a:spcAft>
+            </a:pPr>
+            <a:r>
+              <a:rPr sz="1250" b="0">
+                <a:solidFill>
+                  <a:srgbClr val="EBEEF5"/>
+                </a:solidFill>
+                <a:latin typeface="微软雅黑"/>
+                <a:ea typeface="微软雅黑"/>
+              </a:rPr>
+              <a:t>▪  python main.py → 选关 →「测试」5 步 →「吞食01」37 步</a:t>
+            </a:r>
+            <a:endParaRPr sz="1300" b="0">
+              <a:solidFill>
+                <a:srgbClr val="EBEEF5"/>
+              </a:solidFill>
+              <a:latin typeface="微软雅黑"/>
+              <a:ea typeface="微软雅黑"/>
+            </a:endParaRPr>
+          </a:p>
+        </p:txBody>
+      </p:sp>
+      <p:sp>
+        <p:nvSpPr>
+          <p:cNvPr id="7" name="Rectangle 6"/>
+          <p:cNvSpPr/>
+          <p:nvPr/>
+        </p:nvSpPr>
+        <p:spPr>
+          <a:xfrm>
+            <a:off x="6446520" y="1234440"/>
+            <a:ext cx="5257800" cy="3337560"/>
+          </a:xfrm>
+          <a:prstGeom prst="rect">
+            <a:avLst/>
+          </a:prstGeom>
+          <a:solidFill>
+            <a:srgbClr val="1C2132"/>
+          </a:solidFill>
+          <a:ln>
+            <a:noFill/>
+          </a:ln>
+          <a:effectLst/>
+        </p:spPr>
+        <p:style>
+          <a:lnRef idx="1">
+            <a:schemeClr val="accent1"/>
+          </a:lnRef>
+          <a:fillRef idx="3">
+            <a:schemeClr val="accent1"/>
+          </a:fillRef>
+          <a:effectRef idx="2">
+            <a:schemeClr val="accent1"/>
+          </a:effectRef>
+          <a:fontRef idx="minor">
+            <a:schemeClr val="lt1"/>
+          </a:fontRef>
+        </p:style>
+        <p:txBody>
+          <a:bodyPr rtlCol="0" anchor="ctr"/>
+          <a:lstStyle/>
+          <a:p>
+            <a:pPr algn="ctr"/>
+          </a:p>
+        </p:txBody>
+      </p:sp>
+      <p:sp>
+        <p:nvSpPr>
+          <p:cNvPr id="8" name="TextBox 7"/>
+          <p:cNvSpPr txBox="1"/>
+          <p:nvPr/>
+        </p:nvSpPr>
+        <p:spPr>
+          <a:xfrm>
+            <a:off x="6675120" y="1389888"/>
+            <a:ext cx="4754880" cy="365760"/>
+          </a:xfrm>
+          <a:prstGeom prst="rect">
+            <a:avLst/>
+          </a:prstGeom>
+          <a:noFill/>
+        </p:spPr>
+        <p:txBody>
+          <a:bodyPr wrap="square" lIns="0" tIns="0" rIns="0" bIns="0" anchor="t">
+            <a:spAutoFit/>
+          </a:bodyPr>
+          <a:lstStyle/>
+          <a:p>
+            <a:pPr algn="l">
+              <a:spcAft>
+                <a:spcPts val="600"/>
+              </a:spcAft>
+            </a:pPr>
+            <a:r>
+              <a:rPr sz="1500" b="1">
+                <a:solidFill>
+                  <a:srgbClr val="EBEEF5"/>
+                </a:solidFill>
+                <a:latin typeface="微软雅黑"/>
+                <a:ea typeface="微软雅黑"/>
+              </a:rPr>
+              <a:t>已知限制与后续</a:t>
+            </a:r>
+            <a:endParaRPr sz="1500" b="1">
+              <a:solidFill>
+                <a:srgbClr val="EBEEF5"/>
+              </a:solidFill>
+              <a:latin typeface="微软雅黑"/>
+              <a:ea typeface="微软雅黑"/>
+            </a:endParaRPr>
+          </a:p>
+        </p:txBody>
+      </p:sp>
+      <p:sp>
+        <p:nvSpPr>
+          <p:cNvPr id="9" name="TextBox 8"/>
+          <p:cNvSpPr txBox="1"/>
+          <p:nvPr/>
+        </p:nvSpPr>
+        <p:spPr>
+          <a:xfrm>
+            <a:off x="6675120" y="1874519"/>
+            <a:ext cx="4846320" cy="502920"/>
+          </a:xfrm>
+          <a:prstGeom prst="rect">
+            <a:avLst/>
+          </a:prstGeom>
+          <a:noFill/>
+        </p:spPr>
+        <p:txBody>
+          <a:bodyPr wrap="square" lIns="0" tIns="0" rIns="0" bIns="0" anchor="t">
+            <a:spAutoFit/>
+          </a:bodyPr>
+          <a:lstStyle/>
+          <a:p>
+            <a:pPr algn="l">
+              <a:spcAft>
+                <a:spcPts val="600"/>
+              </a:spcAft>
+            </a:pPr>
+            <a:r>
+              <a:rPr sz="1300" b="1">
+                <a:solidFill>
+                  <a:srgbClr val="F5A623"/>
+                </a:solidFill>
+                <a:latin typeface="微软雅黑"/>
+                <a:ea typeface="微软雅黑"/>
+              </a:rPr>
+              <a:t>暂未实现　</a:t>
+            </a:r>
+            <a:r>
+              <a:rPr lang="zh-CN" sz="1300" b="1">
+                <a:solidFill>
+                  <a:srgbClr val="F5A623"/>
+                </a:solidFill>
+                <a:latin typeface="微软雅黑"/>
+                <a:ea typeface="微软雅黑"/>
+              </a:rPr>
+              <a:t>音效、通关计时、死局提示</a:t>
+            </a:r>
+            <a:endParaRPr sz="1300" b="0">
+              <a:solidFill>
+                <a:srgbClr val="EBEEF5"/>
+              </a:solidFill>
+              <a:latin typeface="微软雅黑"/>
+              <a:ea typeface="微软雅黑"/>
+            </a:endParaRPr>
+          </a:p>
+        </p:txBody>
+      </p:sp>
+      <p:sp>
+        <p:nvSpPr>
+          <p:cNvPr id="10" name="TextBox 9"/>
+          <p:cNvSpPr txBox="1"/>
+          <p:nvPr/>
+        </p:nvSpPr>
+        <p:spPr>
+          <a:xfrm>
+            <a:off x="6675120" y="2468880"/>
+            <a:ext cx="4846320" cy="685800"/>
+          </a:xfrm>
+          <a:prstGeom prst="rect">
+            <a:avLst/>
+          </a:prstGeom>
+          <a:noFill/>
+        </p:spPr>
+        <p:txBody>
+          <a:bodyPr wrap="square" lIns="0" tIns="0" rIns="0" bIns="0" anchor="t">
+            <a:spAutoFit/>
+          </a:bodyPr>
+          <a:lstStyle/>
+          <a:p>
+            <a:pPr algn="l">
+              <a:spcAft>
+                <a:spcPts val="600"/>
+              </a:spcAft>
+            </a:pPr>
+            <a:r>
+              <a:rPr sz="1300" b="1">
+                <a:solidFill>
+                  <a:srgbClr val="569CD6"/>
+                </a:solidFill>
+                <a:latin typeface="微软雅黑"/>
+                <a:ea typeface="微软雅黑"/>
+              </a:rPr>
+              <a:t>后续方向　</a:t>
+            </a:r>
+            <a:r>
+              <a:rPr sz="1300" b="0">
+                <a:solidFill>
+                  <a:srgbClr val="EBEEF5"/>
+                </a:solidFill>
+                <a:latin typeface="微软雅黑"/>
+                <a:ea typeface="微软雅黑"/>
+              </a:rPr>
+              <a:t>解算器工具化、动画补间、更多关卡</a:t>
+            </a:r>
+            <a:endParaRPr sz="1300" b="0">
+              <a:solidFill>
+                <a:srgbClr val="EBEEF5"/>
+              </a:solidFill>
+              <a:latin typeface="微软雅黑"/>
+              <a:ea typeface="微软雅黑"/>
+            </a:endParaRPr>
+          </a:p>
+        </p:txBody>
+      </p:sp>
+      <p:sp>
+        <p:nvSpPr>
+          <p:cNvPr id="11" name="TextBox 10"/>
+          <p:cNvSpPr txBox="1"/>
+          <p:nvPr/>
+        </p:nvSpPr>
+        <p:spPr>
+          <a:xfrm>
+            <a:off x="6675120" y="3246120"/>
+            <a:ext cx="4754880" cy="182880"/>
+          </a:xfrm>
+          <a:prstGeom prst="rect">
+            <a:avLst/>
+          </a:prstGeom>
+          <a:noFill/>
+        </p:spPr>
+        <p:txBody>
+          <a:bodyPr wrap="square" lIns="0" tIns="0" rIns="0" bIns="0" anchor="t">
+            <a:spAutoFit/>
+          </a:bodyPr>
+          <a:lstStyle/>
+          <a:p>
+            <a:pPr algn="l">
+              <a:spcAft>
+                <a:spcPts val="600"/>
+              </a:spcAft>
+            </a:pPr>
+            <a:r>
+              <a:rPr sz="1200" b="1">
+                <a:solidFill>
+                  <a:srgbClr val="98A2B8"/>
+                </a:solidFill>
+                <a:latin typeface="微软雅黑"/>
+                <a:ea typeface="微软雅黑"/>
+              </a:rPr>
+              <a:t>关键词</a:t>
+            </a:r>
+            <a:endParaRPr sz="1200" b="1">
+              <a:solidFill>
+                <a:srgbClr val="98A2B8"/>
+              </a:solidFill>
+              <a:latin typeface="微软雅黑"/>
+              <a:ea typeface="微软雅黑"/>
+            </a:endParaRPr>
+          </a:p>
+        </p:txBody>
+      </p:sp>
+      <p:sp>
+        <p:nvSpPr>
+          <p:cNvPr id="12" name="Rounded Rectangle 11"/>
+          <p:cNvSpPr/>
+          <p:nvPr/>
+        </p:nvSpPr>
+        <p:spPr>
+          <a:xfrm>
+            <a:off x="6675120" y="3611880"/>
+            <a:ext cx="1133856" cy="457200"/>
+          </a:xfrm>
+          <a:prstGeom prst="roundRect">
+            <a:avLst/>
+          </a:prstGeom>
+          <a:solidFill>
+            <a:srgbClr val="262C42"/>
+          </a:solidFill>
+          <a:ln w="12700">
+            <a:solidFill>
+              <a:srgbClr val="3E465E"/>
+            </a:solidFill>
+          </a:ln>
+          <a:effectLst/>
+        </p:spPr>
+        <p:style>
+          <a:lnRef idx="1">
+            <a:schemeClr val="accent1"/>
+          </a:lnRef>
+          <a:fillRef idx="3">
+            <a:schemeClr val="accent1"/>
+          </a:fillRef>
+          <a:effectRef idx="2">
+            <a:schemeClr val="accent1"/>
+          </a:effectRef>
+          <a:fontRef idx="minor">
+            <a:schemeClr val="lt1"/>
+          </a:fontRef>
+        </p:style>
+        <p:txBody>
+          <a:bodyPr wrap="square" lIns="73152" tIns="18288" rIns="73152" bIns="18288" rtlCol="0" anchor="ctr"/>
+          <a:lstStyle/>
+          <a:p>
+            <a:pPr algn="ctr"/>
+            <a:r>
+              <a:rPr sz="1100" b="0">
+                <a:solidFill>
+                  <a:srgbClr val="EBEEF5"/>
+                </a:solidFill>
+                <a:latin typeface="微软雅黑"/>
+                <a:ea typeface="微软雅黑"/>
+              </a:rPr>
+              <a:t>现场演示</a:t>
+            </a:r>
+            <a:endParaRPr sz="1100" b="0">
+              <a:solidFill>
+                <a:srgbClr val="EBEEF5"/>
+              </a:solidFill>
+              <a:latin typeface="微软雅黑"/>
+              <a:ea typeface="微软雅黑"/>
+            </a:endParaRPr>
+          </a:p>
+        </p:txBody>
+      </p:sp>
+      <p:sp>
+        <p:nvSpPr>
+          <p:cNvPr id="13" name="Rounded Rectangle 12"/>
+          <p:cNvSpPr/>
+          <p:nvPr/>
+        </p:nvSpPr>
+        <p:spPr>
+          <a:xfrm>
+            <a:off x="7918704" y="3611880"/>
+            <a:ext cx="1133856" cy="457200"/>
+          </a:xfrm>
+          <a:prstGeom prst="roundRect">
+            <a:avLst/>
+          </a:prstGeom>
+          <a:solidFill>
+            <a:srgbClr val="262C42"/>
+          </a:solidFill>
+          <a:ln w="12700">
+            <a:solidFill>
+              <a:srgbClr val="3E465E"/>
+            </a:solidFill>
+          </a:ln>
+          <a:effectLst/>
+        </p:spPr>
+        <p:style>
+          <a:lnRef idx="1">
+            <a:schemeClr val="accent1"/>
+          </a:lnRef>
+          <a:fillRef idx="3">
+            <a:schemeClr val="accent1"/>
+          </a:fillRef>
+          <a:effectRef idx="2">
+            <a:schemeClr val="accent1"/>
+          </a:effectRef>
+          <a:fontRef idx="minor">
+            <a:schemeClr val="lt1"/>
+          </a:fontRef>
+        </p:style>
+        <p:txBody>
+          <a:bodyPr wrap="square" lIns="73152" tIns="18288" rIns="73152" bIns="18288" rtlCol="0" anchor="ctr"/>
+          <a:lstStyle/>
+          <a:p>
+            <a:pPr algn="ctr"/>
+            <a:r>
+              <a:rPr sz="1100" b="0">
+                <a:solidFill>
+                  <a:srgbClr val="EBEEF5"/>
+                </a:solidFill>
+                <a:latin typeface="微软雅黑"/>
+                <a:ea typeface="微软雅黑"/>
+              </a:rPr>
+              <a:t>录屏备份</a:t>
+            </a:r>
+            <a:endParaRPr sz="1100" b="0">
+              <a:solidFill>
+                <a:srgbClr val="EBEEF5"/>
+              </a:solidFill>
+              <a:latin typeface="微软雅黑"/>
+              <a:ea typeface="微软雅黑"/>
+            </a:endParaRPr>
+          </a:p>
+        </p:txBody>
+      </p:sp>
+      <p:sp>
+        <p:nvSpPr>
+          <p:cNvPr id="14" name="Rounded Rectangle 13"/>
+          <p:cNvSpPr/>
+          <p:nvPr/>
+        </p:nvSpPr>
+        <p:spPr>
+          <a:xfrm>
+            <a:off x="9162288" y="3611880"/>
+            <a:ext cx="1133856" cy="457200"/>
+          </a:xfrm>
+          <a:prstGeom prst="roundRect">
+            <a:avLst/>
+          </a:prstGeom>
+          <a:solidFill>
+            <a:srgbClr val="262C42"/>
+          </a:solidFill>
+          <a:ln w="12700">
+            <a:solidFill>
+              <a:srgbClr val="3E465E"/>
+            </a:solidFill>
+          </a:ln>
+          <a:effectLst/>
+        </p:spPr>
+        <p:style>
+          <a:lnRef idx="1">
+            <a:schemeClr val="accent1"/>
+          </a:lnRef>
+          <a:fillRef idx="3">
+            <a:schemeClr val="accent1"/>
+          </a:fillRef>
+          <a:effectRef idx="2">
+            <a:schemeClr val="accent1"/>
+          </a:effectRef>
+          <a:fontRef idx="minor">
+            <a:schemeClr val="lt1"/>
+          </a:fontRef>
+        </p:style>
+        <p:txBody>
+          <a:bodyPr wrap="square" lIns="73152" tIns="18288" rIns="73152" bIns="18288" rtlCol="0" anchor="ctr"/>
+          <a:lstStyle/>
+          <a:p>
+            <a:pPr algn="ctr"/>
+            <a:r>
+              <a:rPr sz="1100" b="0">
+                <a:solidFill>
+                  <a:srgbClr val="EBEEF5"/>
+                </a:solidFill>
+                <a:latin typeface="微软雅黑"/>
+                <a:ea typeface="微软雅黑"/>
+              </a:rPr>
+              <a:t>AI 辅助</a:t>
+            </a:r>
+            <a:endParaRPr sz="1100" b="0">
+              <a:solidFill>
+                <a:srgbClr val="EBEEF5"/>
+              </a:solidFill>
+              <a:latin typeface="微软雅黑"/>
+              <a:ea typeface="微软雅黑"/>
+            </a:endParaRPr>
+          </a:p>
+        </p:txBody>
+      </p:sp>
+      <p:sp>
+        <p:nvSpPr>
+          <p:cNvPr id="15" name="Rounded Rectangle 14"/>
+          <p:cNvSpPr/>
+          <p:nvPr/>
+        </p:nvSpPr>
+        <p:spPr>
+          <a:xfrm>
+            <a:off x="10405872" y="3611880"/>
+            <a:ext cx="1133856" cy="457200"/>
+          </a:xfrm>
+          <a:prstGeom prst="roundRect">
+            <a:avLst/>
+          </a:prstGeom>
+          <a:solidFill>
+            <a:srgbClr val="262C42"/>
+          </a:solidFill>
+          <a:ln w="12700">
+            <a:solidFill>
+              <a:srgbClr val="3E465E"/>
+            </a:solidFill>
+          </a:ln>
+          <a:effectLst/>
+        </p:spPr>
+        <p:style>
+          <a:lnRef idx="1">
+            <a:schemeClr val="accent1"/>
+          </a:lnRef>
+          <a:fillRef idx="3">
+            <a:schemeClr val="accent1"/>
+          </a:fillRef>
+          <a:effectRef idx="2">
+            <a:schemeClr val="accent1"/>
+          </a:effectRef>
+          <a:fontRef idx="minor">
+            <a:schemeClr val="lt1"/>
+          </a:fontRef>
+        </p:style>
+        <p:txBody>
+          <a:bodyPr wrap="square" lIns="73152" tIns="18288" rIns="73152" bIns="18288" rtlCol="0" anchor="ctr"/>
+          <a:lstStyle/>
+          <a:p>
+            <a:pPr algn="ctr"/>
+            <a:r>
+              <a:rPr lang="zh-CN" sz="1100" b="0">
+                <a:solidFill>
+                  <a:srgbClr val="EBEEF5"/>
+                </a:solidFill>
+                <a:latin typeface="微软雅黑"/>
+                <a:ea typeface="微软雅黑"/>
+              </a:rPr>
+              <a:t>可追溯</a:t>
             </a:r>
             <a:endParaRPr sz="1100" b="0">
               <a:solidFill>
@@ -9982,7 +13871,7 @@
                 <a:latin typeface="微软雅黑"/>
                 <a:ea typeface="微软雅黑"/>
               </a:rPr>
-              <a:t>2 / 10</a:t>
+              <a:t>2 / 13</a:t>
             </a:r>
             <a:endParaRPr sz="900" b="0">
               <a:solidFill>
@@ -10022,7 +13911,7 @@
               </a:spcAft>
             </a:pPr>
             <a:r>
-              <a:rPr sz="1600" b="1">
+              <a:rPr sz="1350" b="1">
                 <a:solidFill>
                   <a:srgbClr val="F5A623"/>
                 </a:solidFill>
@@ -10046,7 +13935,7 @@
               </a:spcAft>
             </a:pPr>
             <a:r>
-              <a:rPr sz="1300" b="0">
+              <a:rPr sz="1250" b="0">
                 <a:solidFill>
                   <a:srgbClr val="EBEEF5"/>
                 </a:solidFill>
@@ -10070,7 +13959,7 @@
               </a:spcAft>
             </a:pPr>
             <a:r>
-              <a:rPr sz="1300" b="0">
+              <a:rPr sz="1250" b="0">
                 <a:solidFill>
                   <a:srgbClr val="EBEEF5"/>
                 </a:solidFill>
@@ -10094,14 +13983,14 @@
               </a:spcAft>
             </a:pPr>
             <a:r>
-              <a:rPr sz="1300" b="0">
+              <a:rPr sz="1250" b="0">
                 <a:solidFill>
                   <a:srgbClr val="EBEEF5"/>
                 </a:solidFill>
                 <a:latin typeface="微软雅黑"/>
                 <a:ea typeface="微软雅黑"/>
               </a:rPr>
-              <a:t>▪  箱子之间能互相进出：吞食、穿口、跨层搬运</a:t>
+              <a:t>▪  箱子之间能互相进出：吞食、双向穿口、跨层搬运</a:t>
             </a:r>
             <a:endParaRPr sz="1300" b="0">
               <a:solidFill>
@@ -10118,7 +14007,7 @@
               </a:spcAft>
             </a:pPr>
             <a:r>
-              <a:rPr sz="1600" b="1">
+              <a:rPr sz="1350" b="1">
                 <a:solidFill>
                   <a:srgbClr val="F5A623"/>
                 </a:solidFill>
@@ -10142,7 +14031,7 @@
               </a:spcAft>
             </a:pPr>
             <a:r>
-              <a:rPr sz="1300" b="0">
+              <a:rPr sz="1250" b="0">
                 <a:solidFill>
                   <a:srgbClr val="EBEEF5"/>
                 </a:solidFill>
@@ -10166,7 +14055,7 @@
               </a:spcAft>
             </a:pPr>
             <a:r>
-              <a:rPr sz="1300" b="0">
+              <a:rPr sz="1250" b="0">
                 <a:solidFill>
                   <a:srgbClr val="EBEEF5"/>
                 </a:solidFill>
@@ -10174,6 +14063,54 @@
                 <a:ea typeface="微软雅黑"/>
               </a:rPr>
               <a:t>▪  7 个源码模块 1326 行 + 108 个自动化测试 1043 行</a:t>
+            </a:r>
+            <a:endParaRPr sz="1300" b="0">
+              <a:solidFill>
+                <a:srgbClr val="EBEEF5"/>
+              </a:solidFill>
+              <a:latin typeface="微软雅黑"/>
+              <a:ea typeface="微软雅黑"/>
+            </a:endParaRPr>
+          </a:p>
+          <a:p>
+            <a:pPr algn="l">
+              <a:spcAft>
+                <a:spcPts val="1000"/>
+              </a:spcAft>
+            </a:pPr>
+            <a:r>
+              <a:rPr sz="1350" b="1">
+                <a:solidFill>
+                  <a:srgbClr val="F5A623"/>
+                </a:solidFill>
+                <a:latin typeface="微软雅黑"/>
+                <a:ea typeface="微软雅黑"/>
+              </a:rPr>
+              <a:t>本汇报重点</a:t>
+            </a:r>
+            <a:endParaRPr sz="1300" b="0">
+              <a:solidFill>
+                <a:srgbClr val="EBEEF5"/>
+              </a:solidFill>
+              <a:latin typeface="微软雅黑"/>
+              <a:ea typeface="微软雅黑"/>
+            </a:endParaRPr>
+          </a:p>
+          <a:p>
+            <a:pPr algn="l">
+              <a:spcAft>
+                <a:spcPts val="1000"/>
+              </a:spcAft>
+            </a:pPr>
+            <a:r>
+              <a:rPr sz="1250" b="0">
+                <a:solidFill>
+                  <a:srgbClr val="EBEEF5"/>
+                </a:solidFill>
+                <a:latin typeface="微软雅黑"/>
+                <a:ea typeface="微软雅黑"/>
+              </a:rPr>
+              <a:t>▪  AI 怎么被约束着用（第 4–5 页）+ 问题怎么定位与解决（第 6–9 页）</a:t>
             </a:r>
             <a:endParaRPr sz="1300" b="0">
               <a:solidFill>
@@ -11007,7 +14944,7 @@
                 <a:latin typeface="微软雅黑"/>
                 <a:ea typeface="微软雅黑"/>
               </a:rPr>
-              <a:t>3 / 10</a:t>
+              <a:t>3 / 13</a:t>
             </a:r>
             <a:endParaRPr sz="900" b="0">
               <a:solidFill>
@@ -12717,7 +16654,7 @@
                 <a:latin typeface="微软雅黑"/>
                 <a:ea typeface="微软雅黑"/>
               </a:rPr>
-              <a:t>关键算法 · 一次按键的完整判定</a:t>
+              <a:t>AI 协作流程 · 规则先行，测试兜底</a:t>
             </a:r>
             <a:endParaRPr sz="2600" b="1">
               <a:solidFill>
@@ -12855,7 +16792,7 @@
                 <a:latin typeface="微软雅黑"/>
                 <a:ea typeface="微软雅黑"/>
               </a:rPr>
-              <a:t>4 / 10</a:t>
+              <a:t>4 / 13</a:t>
             </a:r>
             <a:endParaRPr sz="900" b="0">
               <a:solidFill>
@@ -12946,7 +16883,7 @@
                 <a:latin typeface="微软雅黑"/>
                 <a:ea typeface="微软雅黑"/>
               </a:rPr>
-              <a:t>分支顺序 = 规则优先级</a:t>
+              <a:t>四条硬约束</a:t>
             </a:r>
             <a:endParaRPr sz="1500" b="1">
               <a:solidFill>
@@ -12967,7 +16904,7 @@
         <p:spPr>
           <a:xfrm>
             <a:off x="8686800" y="1783080"/>
-            <a:ext cx="2852928" cy="685800"/>
+            <a:ext cx="2852928" cy="777240"/>
           </a:xfrm>
           <a:prstGeom prst="rect">
             <a:avLst/>
@@ -12993,7 +16930,7 @@
                 <a:latin typeface="微软雅黑"/>
                 <a:ea typeface="微软雅黑"/>
               </a:rPr>
-              <a:t>先判口　</a:t>
+              <a:t>规格先行　</a:t>
             </a:r>
             <a:r>
               <a:rPr lang="zh-CN" sz="1300" b="1">
@@ -13003,7 +16940,7 @@
                 <a:latin typeface="微软雅黑"/>
                 <a:ea typeface="微软雅黑"/>
               </a:rPr>
-              <a:t>站在口格朝外走 = 退出内层</a:t>
+              <a:t>机制先写进 SKILL.md，再动代码</a:t>
             </a:r>
             <a:endParaRPr sz="1300" b="0">
               <a:solidFill>
@@ -13023,8 +16960,8 @@
         </p:nvSpPr>
         <p:spPr>
           <a:xfrm>
-            <a:off x="8686800" y="2377440"/>
-            <a:ext cx="2852928" cy="685800"/>
+            <a:off x="8686800" y="2606040"/>
+            <a:ext cx="2852928" cy="777240"/>
           </a:xfrm>
           <a:prstGeom prst="rect">
             <a:avLst/>
@@ -13050,7 +16987,7 @@
                 <a:latin typeface="微软雅黑"/>
                 <a:ea typeface="微软雅黑"/>
               </a:rPr>
-              <a:t>再判碰撞　</a:t>
+              <a:t>不得自创　</a:t>
             </a:r>
             <a:r>
               <a:rPr sz="1300" b="0">
@@ -13060,7 +16997,7 @@
                 <a:latin typeface="微软雅黑"/>
                 <a:ea typeface="微软雅黑"/>
               </a:rPr>
-              <a:t>墙 → 不动；空格 → 走一格</a:t>
+              <a:t>技能没覆盖的先问，不自行扩展（RULE §二）</a:t>
             </a:r>
             <a:endParaRPr sz="1300" b="0">
               <a:solidFill>
@@ -13080,7 +17017,7 @@
         </p:nvSpPr>
         <p:spPr>
           <a:xfrm>
-            <a:off x="8686800" y="2971800"/>
+            <a:off x="8686800" y="3310128"/>
             <a:ext cx="2834640" cy="274320"/>
           </a:xfrm>
           <a:prstGeom prst="rect">
@@ -13107,7 +17044,7 @@
                 <a:latin typeface="微软雅黑"/>
                 <a:ea typeface="微软雅黑"/>
               </a:rPr>
-              <a:t>被拒绝的操作</a:t>
+              <a:t>每一步都有护栏</a:t>
             </a:r>
             <a:endParaRPr sz="1200" b="1">
               <a:solidFill>
@@ -13127,7 +17064,7 @@
         </p:nvSpPr>
         <p:spPr>
           <a:xfrm>
-            <a:off x="8686800" y="3383280"/>
+            <a:off x="8686800" y="3611880"/>
             <a:ext cx="1170432" cy="411480"/>
           </a:xfrm>
           <a:prstGeom prst="roundRect">
@@ -13170,7 +17107,7 @@
                 <a:latin typeface="微软雅黑"/>
                 <a:ea typeface="微软雅黑"/>
               </a:rPr>
-              <a:t>不记步数</a:t>
+              <a:t>改完必跑测试</a:t>
             </a:r>
             <a:endParaRPr sz="1100" b="0">
               <a:solidFill>
@@ -13190,7 +17127,7 @@
         </p:nvSpPr>
         <p:spPr>
           <a:xfrm>
-            <a:off x="9966960" y="3383280"/>
+            <a:off x="9966960" y="3611880"/>
             <a:ext cx="1170432" cy="411480"/>
           </a:xfrm>
           <a:prstGeom prst="roundRect">
@@ -13233,7 +17170,7 @@
                 <a:latin typeface="微软雅黑"/>
                 <a:ea typeface="微软雅黑"/>
               </a:rPr>
-              <a:t>不进撤销</a:t>
+              <a:t>小步提交</a:t>
             </a:r>
             <a:endParaRPr sz="1100" b="0">
               <a:solidFill>
@@ -13253,7 +17190,7 @@
         </p:nvSpPr>
         <p:spPr>
           <a:xfrm>
-            <a:off x="8686800" y="3886200"/>
+            <a:off x="8686800" y="4087368"/>
             <a:ext cx="1170432" cy="411480"/>
           </a:xfrm>
           <a:prstGeom prst="roundRect">
@@ -13296,7 +17233,7 @@
                 <a:latin typeface="微软雅黑"/>
                 <a:ea typeface="微软雅黑"/>
               </a:rPr>
-              <a:t>状态不变</a:t>
+              <a:t>禁止自动 push</a:t>
             </a:r>
             <a:endParaRPr sz="1100" b="0">
               <a:solidFill>
@@ -13316,7 +17253,7 @@
         </p:nvSpPr>
         <p:spPr>
           <a:xfrm>
-            <a:off x="9966960" y="3886200"/>
+            <a:off x="9966960" y="4087368"/>
             <a:ext cx="1170432" cy="411480"/>
           </a:xfrm>
           <a:prstGeom prst="roundRect">
@@ -13359,11 +17296,178 @@
                 <a:latin typeface="微软雅黑"/>
                 <a:ea typeface="微软雅黑"/>
               </a:rPr>
-              <a:t>可重试</a:t>
+              <a:t>人工验收</a:t>
             </a:r>
             <a:endParaRPr sz="1100" b="0">
               <a:solidFill>
                 <a:srgbClr val="EBEEF5"/>
+              </a:solidFill>
+              <a:latin typeface="微软雅黑"/>
+              <a:ea typeface="微软雅黑"/>
+            </a:endParaRPr>
+          </a:p>
+        </p:txBody>
+      </p:sp>
+      <p:sp>
+        <p:nvSpPr>
+          <p:cNvPr id="11" name="TextBox 10"/>
+          <p:cNvSpPr txBox="1"/>
+          <p:nvPr/>
+        </p:nvSpPr>
+        <p:spPr>
+          <a:xfrm>
+            <a:off x="8686800" y="4846320"/>
+            <a:ext cx="2880360" cy="1481328"/>
+          </a:xfrm>
+          <a:prstGeom prst="rect">
+            <a:avLst/>
+          </a:prstGeom>
+          <a:noFill/>
+        </p:spPr>
+        <p:txBody>
+          <a:bodyPr wrap="square" lIns="0" tIns="0" rIns="0" bIns="0" anchor="t">
+            <a:spAutoFit/>
+          </a:bodyPr>
+          <a:lstStyle/>
+          <a:p>
+            <a:pPr algn="l">
+              <a:spcAft>
+                <a:spcPts val="600"/>
+              </a:spcAft>
+            </a:pPr>
+            <a:r>
+              <a:rPr sz="1150" b="1">
+                <a:solidFill>
+                  <a:srgbClr val="F5A623"/>
+                </a:solidFill>
+                <a:latin typeface="微软雅黑"/>
+                <a:ea typeface="微软雅黑"/>
+              </a:rPr>
+              <a:t>五步闭环，全程留痕</a:t>
+            </a:r>
+            <a:endParaRPr sz="1200" b="1">
+              <a:solidFill>
+                <a:srgbClr val="98A2B8"/>
+              </a:solidFill>
+              <a:latin typeface="微软雅黑"/>
+              <a:ea typeface="微软雅黑"/>
+            </a:endParaRPr>
+          </a:p>
+          <a:p>
+            <a:pPr algn="l">
+              <a:spcAft>
+                <a:spcPts val="600"/>
+              </a:spcAft>
+            </a:pPr>
+            <a:r>
+              <a:rPr sz="1100" b="1">
+                <a:solidFill>
+                  <a:srgbClr val="98A2B8"/>
+                </a:solidFill>
+                <a:latin typeface="微软雅黑"/>
+                <a:ea typeface="微软雅黑"/>
+              </a:rPr>
+              <a:t>① 人把机制写进 SKILL.md</a:t>
+            </a:r>
+            <a:endParaRPr sz="1200" b="1">
+              <a:solidFill>
+                <a:srgbClr val="98A2B8"/>
+              </a:solidFill>
+              <a:latin typeface="微软雅黑"/>
+              <a:ea typeface="微软雅黑"/>
+            </a:endParaRPr>
+          </a:p>
+          <a:p>
+            <a:pPr algn="l">
+              <a:spcAft>
+                <a:spcPts val="600"/>
+              </a:spcAft>
+            </a:pPr>
+            <a:r>
+              <a:rPr sz="1100" b="1">
+                <a:solidFill>
+                  <a:srgbClr val="98A2B8"/>
+                </a:solidFill>
+                <a:latin typeface="微软雅黑"/>
+                <a:ea typeface="微软雅黑"/>
+              </a:rPr>
+              <a:t>② AI 按规格实现并自查</a:t>
+            </a:r>
+            <a:endParaRPr sz="1200" b="1">
+              <a:solidFill>
+                <a:srgbClr val="98A2B8"/>
+              </a:solidFill>
+              <a:latin typeface="微软雅黑"/>
+              <a:ea typeface="微软雅黑"/>
+            </a:endParaRPr>
+          </a:p>
+          <a:p>
+            <a:pPr algn="l">
+              <a:spcAft>
+                <a:spcPts val="600"/>
+              </a:spcAft>
+            </a:pPr>
+            <a:r>
+              <a:rPr sz="1100" b="1">
+                <a:solidFill>
+                  <a:srgbClr val="98A2B8"/>
+                </a:solidFill>
+                <a:latin typeface="微软雅黑"/>
+                <a:ea typeface="微软雅黑"/>
+              </a:rPr>
+              <a:t>③ 跑 108 个测试 + 解算器</a:t>
+            </a:r>
+            <a:endParaRPr sz="1200" b="1">
+              <a:solidFill>
+                <a:srgbClr val="98A2B8"/>
+              </a:solidFill>
+              <a:latin typeface="微软雅黑"/>
+              <a:ea typeface="微软雅黑"/>
+            </a:endParaRPr>
+          </a:p>
+          <a:p>
+            <a:pPr algn="l">
+              <a:spcAft>
+                <a:spcPts val="600"/>
+              </a:spcAft>
+            </a:pPr>
+            <a:r>
+              <a:rPr sz="1100" b="1">
+                <a:solidFill>
+                  <a:srgbClr val="98A2B8"/>
+                </a:solidFill>
+                <a:latin typeface="微软雅黑"/>
+                <a:ea typeface="微软雅黑"/>
+              </a:rPr>
+              <a:t>④ 红了回去修 / 绿了人验收</a:t>
+            </a:r>
+            <a:endParaRPr sz="1200" b="1">
+              <a:solidFill>
+                <a:srgbClr val="98A2B8"/>
+              </a:solidFill>
+              <a:latin typeface="微软雅黑"/>
+              <a:ea typeface="微软雅黑"/>
+            </a:endParaRPr>
+          </a:p>
+          <a:p>
+            <a:pPr algn="l">
+              <a:spcAft>
+                <a:spcPts val="600"/>
+              </a:spcAft>
+            </a:pPr>
+            <a:r>
+              <a:rPr sz="1100" b="1">
+                <a:solidFill>
+                  <a:srgbClr val="98A2B8"/>
+                </a:solidFill>
+                <a:latin typeface="微软雅黑"/>
+                <a:ea typeface="微软雅黑"/>
+              </a:rPr>
+              <a:t>⑤ git 小步提交，可追溯可回退</a:t>
+            </a:r>
+            <a:endParaRPr sz="1200" b="1">
+              <a:solidFill>
+                <a:srgbClr val="98A2B8"/>
               </a:solidFill>
               <a:latin typeface="微软雅黑"/>
               <a:ea typeface="微软雅黑"/>
@@ -13373,7 +17477,7 @@
       </p:sp>
       <p:pic>
         <p:nvPicPr>
-          <p:cNvPr id="16" name="Picture 15" descr="flow_move.png"/>
+          <p:cNvPr id="16" name="Picture 15" descr="flow_ai.png"/>
           <p:cNvPicPr>
             <a:picLocks noChangeAspect="1"/>
           </p:cNvPicPr>
@@ -13388,132 +17492,13 @@
         <p:spPr>
           <a:xfrm>
             <a:off x="384048" y="1188720"/>
-            <a:ext cx="7882127" cy="4926329"/>
+            <a:ext cx="7882127" cy="3546957"/>
           </a:xfrm>
           <a:prstGeom prst="rect">
             <a:avLst/>
           </a:prstGeom>
         </p:spPr>
       </p:pic>
-      <p:sp>
-        <p:nvSpPr>
-          <p:cNvPr id="11" name="TextBox 10"/>
-          <p:cNvSpPr txBox="1"/>
-          <p:nvPr/>
-        </p:nvSpPr>
-        <p:spPr>
-          <a:xfrm>
-            <a:off x="8686800" y="4846320"/>
-            <a:ext cx="2880360" cy="1188720"/>
-          </a:xfrm>
-          <a:prstGeom prst="rect">
-            <a:avLst/>
-          </a:prstGeom>
-          <a:noFill/>
-        </p:spPr>
-        <p:txBody>
-          <a:bodyPr wrap="square" lIns="0" tIns="0" rIns="0" bIns="0" anchor="t">
-            <a:spAutoFit/>
-          </a:bodyPr>
-          <a:lstStyle/>
-          <a:p>
-            <a:pPr algn="l">
-              <a:spcAft>
-                <a:spcPts val="600"/>
-              </a:spcAft>
-            </a:pPr>
-            <a:r>
-              <a:rPr sz="1150" b="1">
-                <a:solidFill>
-                  <a:srgbClr val="F5A623"/>
-                </a:solidFill>
-                <a:latin typeface="微软雅黑"/>
-                <a:ea typeface="微软雅黑"/>
-              </a:rPr>
-              <a:t>六条分支全部有单元测试覆盖</a:t>
-            </a:r>
-            <a:endParaRPr sz="1200" b="1">
-              <a:solidFill>
-                <a:srgbClr val="98A2B8"/>
-              </a:solidFill>
-              <a:latin typeface="微软雅黑"/>
-              <a:ea typeface="微软雅黑"/>
-            </a:endParaRPr>
-          </a:p>
-          <a:p>
-            <a:pPr algn="l">
-              <a:spcAft>
-                <a:spcPts val="600"/>
-              </a:spcAft>
-            </a:pPr>
-            <a:r>
-              <a:rPr sz="1100" b="1">
-                <a:solidFill>
-                  <a:srgbClr val="98A2B8"/>
-                </a:solidFill>
-                <a:latin typeface="微软雅黑"/>
-                <a:ea typeface="微软雅黑"/>
-              </a:rPr>
-              <a:t>① 退出内层 ② 撞墙 ③ 走一格</a:t>
-            </a:r>
-            <a:endParaRPr sz="1200" b="1">
-              <a:solidFill>
-                <a:srgbClr val="98A2B8"/>
-              </a:solidFill>
-              <a:latin typeface="微软雅黑"/>
-              <a:ea typeface="微软雅黑"/>
-            </a:endParaRPr>
-          </a:p>
-          <a:p>
-            <a:pPr algn="l">
-              <a:spcAft>
-                <a:spcPts val="600"/>
-              </a:spcAft>
-            </a:pPr>
-            <a:r>
-              <a:rPr sz="1100" b="1">
-                <a:solidFill>
-                  <a:srgbClr val="98A2B8"/>
-                </a:solidFill>
-                <a:latin typeface="微软雅黑"/>
-                <a:ea typeface="微软雅黑"/>
-              </a:rPr>
-              <a:t>④ 整链前进 ⑤ 吸入 ⑥ 进入箱子</a:t>
-            </a:r>
-            <a:endParaRPr sz="1200" b="1">
-              <a:solidFill>
-                <a:srgbClr val="98A2B8"/>
-              </a:solidFill>
-              <a:latin typeface="微软雅黑"/>
-              <a:ea typeface="微软雅黑"/>
-            </a:endParaRPr>
-          </a:p>
-          <a:p>
-            <a:pPr algn="l">
-              <a:spcAft>
-                <a:spcPts val="600"/>
-              </a:spcAft>
-            </a:pPr>
-            <a:r>
-              <a:rPr sz="1100" b="1">
-                <a:solidFill>
-                  <a:srgbClr val="98A2B8"/>
-                </a:solidFill>
-                <a:latin typeface="微软雅黑"/>
-                <a:ea typeface="微软雅黑"/>
-              </a:rPr>
-              <a:t>⑦ 否则状态不变（操作被拒绝）</a:t>
-            </a:r>
-            <a:endParaRPr sz="1200" b="1">
-              <a:solidFill>
-                <a:srgbClr val="98A2B8"/>
-              </a:solidFill>
-              <a:latin typeface="微软雅黑"/>
-              <a:ea typeface="微软雅黑"/>
-            </a:endParaRPr>
-          </a:p>
-        </p:txBody>
-      </p:sp>
     </p:spTree>
   </p:cSld>
   <p:clrMapOvr>
